--- a/assets/结构图/等权并列卡片-001/example.pptx
+++ b/assets/结构图/等权并列卡片-001/example.pptx
@@ -2,13 +2,13 @@
 <file path=ppt/presentation.xml><?xml version="1.0" encoding="utf-8"?>
 <p:presentation xmlns:p="http://schemas.openxmlformats.org/presentationml/2006/main">
   <p:sldMasterIdLst>
-    <p:sldMasterId xmlns:r="http://schemas.openxmlformats.org/officeDocument/2006/relationships" id="2147483648" r:id="R0595810cf18a4751"/>
+    <p:sldMasterId xmlns:r="http://schemas.openxmlformats.org/officeDocument/2006/relationships" id="2147483648" r:id="R065d53fb67ac45f3"/>
   </p:sldMasterIdLst>
   <p:notesMasterIdLst>
-    <p:notesMasterId xmlns:r="http://schemas.openxmlformats.org/officeDocument/2006/relationships" r:id="R6e4f75292550400a"/>
+    <p:notesMasterId xmlns:r="http://schemas.openxmlformats.org/officeDocument/2006/relationships" r:id="R9b7ea4260f1946ed"/>
   </p:notesMasterIdLst>
   <p:sldIdLst>
-    <p:sldId xmlns:r="http://schemas.openxmlformats.org/officeDocument/2006/relationships" id="256" r:id="R31ed72ef27a74e5f"/>
+    <p:sldId xmlns:r="http://schemas.openxmlformats.org/officeDocument/2006/relationships" id="256" r:id="R5c807773d9234439"/>
   </p:sldIdLst>
   <p:sldSz cx="12192000" cy="6858000"/>
   <p:notesSz cx="6858000" cy="9144000"/>
@@ -358,6 +358,24 @@
             </a:outerShdw>
           </a:effectLst>
         </a:effectStyle>
+        <a:effectStyle>
+          <a:effectLst>
+            <a:outerShdw blurRad="247650" dist="114300" dir="5400000">
+              <a:srgbClr val="1F487E">
+                <a:alpha val="12000"/>
+              </a:srgbClr>
+            </a:outerShdw>
+          </a:effectLst>
+        </a:effectStyle>
+        <a:effectStyle>
+          <a:effectLst>
+            <a:outerShdw blurRad="171450" dist="76200" dir="5400000">
+              <a:srgbClr val="2F5EA8">
+                <a:alpha val="24000"/>
+              </a:srgbClr>
+            </a:outerShdw>
+          </a:effectLst>
+        </a:effectStyle>
       </a:effectStyleLst>
       <a:bgFillStyleLst>
         <a:solidFill>
@@ -506,7 +524,7 @@
   </p:cSld>
   <p:clrMap bg1="lt1" tx1="dk1" bg2="lt2" tx2="dk2" accent1="accent1" accent2="accent2" accent3="accent3" accent4="accent4" accent5="accent5" accent6="accent6" hlink="hlink" folHlink="folHlink"/>
   <p:sldLayoutIdLst>
-    <p:sldLayoutId xmlns:r="http://schemas.openxmlformats.org/officeDocument/2006/relationships" id="2147483649" r:id="R98bedc03385f4c54"/>
+    <p:sldLayoutId xmlns:r="http://schemas.openxmlformats.org/officeDocument/2006/relationships" id="2147483649" r:id="Rb325eea0ef944269"/>
   </p:sldLayoutIdLst>
   <p:txStyles>
     <p:titleStyle>
@@ -989,6 +1007,24 @@
             </a:outerShdw>
           </a:effectLst>
         </a:effectStyle>
+        <a:effectStyle>
+          <a:effectLst>
+            <a:outerShdw blurRad="247650" dist="114300" dir="5400000">
+              <a:srgbClr val="1F487E">
+                <a:alpha val="12000"/>
+              </a:srgbClr>
+            </a:outerShdw>
+          </a:effectLst>
+        </a:effectStyle>
+        <a:effectStyle>
+          <a:effectLst>
+            <a:outerShdw blurRad="171450" dist="76200" dir="5400000">
+              <a:srgbClr val="2F5EA8">
+                <a:alpha val="24000"/>
+              </a:srgbClr>
+            </a:outerShdw>
+          </a:effectLst>
+        </a:effectStyle>
       </a:effectStyleLst>
       <a:bgFillStyleLst>
         <a:solidFill>
@@ -1054,10 +1090,10 @@
       </p:grpSpPr>
       <p:sp>
         <p:nvSpPr>
-          <p:cNvPr id="49" name="parallel-card-underlay-0">
-            <a:extLst xmlns:a="http://schemas.openxmlformats.org/drawingml/2006/main">
-              <a:ext uri="{FF2B5EF4-FFF2-40B4-BE49-F238E27FC236}">
-                <a16:creationId xmlns:a16="http://schemas.microsoft.com/office/drawing/2014/main" id="{39116179-F6D8-4FF5-BFAF-F2F4E953E44D}"/>
+          <p:cNvPr id="37" name="parallel-card-underlay-0">
+            <a:extLst xmlns:a="http://schemas.openxmlformats.org/drawingml/2006/main">
+              <a:ext uri="{FF2B5EF4-FFF2-40B4-BE49-F238E27FC236}">
+                <a16:creationId xmlns:a16="http://schemas.microsoft.com/office/drawing/2014/main" id="{DCD56AF2-8DF9-4821-83DB-488E7D0C852F}"/>
               </a:ext>
             </a:extLst>
           </p:cNvPr>
@@ -1073,7 +1109,7 @@
           </a:xfrm>
           <a:prstGeom xmlns:a="http://schemas.openxmlformats.org/drawingml/2006/main" prst="roundRect">
             <a:avLst>
-              <a:gd name="adj" fmla="val 4928"/>
+              <a:gd name="adj" fmla="val 10678"/>
             </a:avLst>
           </a:prstGeom>
           <a:solidFill xmlns:a="http://schemas.openxmlformats.org/drawingml/2006/main">
@@ -1092,7 +1128,7 @@
           <p:cNvPr id="2" name="parallel-card-surface-0">
             <a:extLst xmlns:a="http://schemas.openxmlformats.org/drawingml/2006/main">
               <a:ext uri="{FF2B5EF4-FFF2-40B4-BE49-F238E27FC236}">
-                <a16:creationId xmlns:a16="http://schemas.microsoft.com/office/drawing/2014/main" id="{2BBD91D0-276F-4CA9-B2F1-D8D709D5BBC2}"/>
+                <a16:creationId xmlns:a16="http://schemas.microsoft.com/office/drawing/2014/main" id="{995AB3FD-86FB-4187-84AF-268B4F25B4B6}"/>
               </a:ext>
             </a:extLst>
           </p:cNvPr>
@@ -1108,7 +1144,7 @@
           </a:xfrm>
           <a:prstGeom xmlns:a="http://schemas.openxmlformats.org/drawingml/2006/main" prst="roundRect">
             <a:avLst>
-              <a:gd name="adj" fmla="val 4624"/>
+              <a:gd name="adj" fmla="val 10019"/>
             </a:avLst>
           </a:prstGeom>
           <a:solidFill xmlns:a="http://schemas.openxmlformats.org/drawingml/2006/main">
@@ -1124,7 +1160,7 @@
         <p:style>
           <a:lnRef xmlns:a="http://schemas.openxmlformats.org/drawingml/2006/main" idx="0"/>
           <a:fillRef xmlns:a="http://schemas.openxmlformats.org/drawingml/2006/main" idx="0"/>
-          <a:effectRef xmlns:a="http://schemas.openxmlformats.org/drawingml/2006/main" idx="4"/>
+          <a:effectRef xmlns:a="http://schemas.openxmlformats.org/drawingml/2006/main" idx="10"/>
           <a:fontRef xmlns:a="http://schemas.openxmlformats.org/drawingml/2006/main" idx="major"/>
         </p:style>
       </p:sp>
@@ -1133,7 +1169,7 @@
           <p:cNvPr id="3" name="parallel-card-accent-0">
             <a:extLst xmlns:a="http://schemas.openxmlformats.org/drawingml/2006/main">
               <a:ext uri="{FF2B5EF4-FFF2-40B4-BE49-F238E27FC236}">
-                <a16:creationId xmlns:a16="http://schemas.microsoft.com/office/drawing/2014/main" id="{16BE35ED-7669-4F39-B2A3-044C0996F75E}"/>
+                <a16:creationId xmlns:a16="http://schemas.microsoft.com/office/drawing/2014/main" id="{6873FEAA-7A3C-4CF5-B799-B00DB450736C}"/>
               </a:ext>
             </a:extLst>
           </p:cNvPr>
@@ -1166,7 +1202,7 @@
           <p:cNvPr id="4" name="parallel-marker-halo-0">
             <a:extLst xmlns:a="http://schemas.openxmlformats.org/drawingml/2006/main">
               <a:ext uri="{FF2B5EF4-FFF2-40B4-BE49-F238E27FC236}">
-                <a16:creationId xmlns:a16="http://schemas.microsoft.com/office/drawing/2014/main" id="{6C21F9F0-E7CD-4494-9098-8DB58BF2154C}"/>
+                <a16:creationId xmlns:a16="http://schemas.microsoft.com/office/drawing/2014/main" id="{A89E3D7C-9727-4E31-B2F7-6C0FF20AB29D}"/>
               </a:ext>
             </a:extLst>
           </p:cNvPr>
@@ -1199,7 +1235,7 @@
           <p:cNvPr id="5" name="parallel-marker-core-0">
             <a:extLst xmlns:a="http://schemas.openxmlformats.org/drawingml/2006/main">
               <a:ext uri="{FF2B5EF4-FFF2-40B4-BE49-F238E27FC236}">
-                <a16:creationId xmlns:a16="http://schemas.microsoft.com/office/drawing/2014/main" id="{35F81278-1358-45A1-AA6A-7F803483FAD2}"/>
+                <a16:creationId xmlns:a16="http://schemas.microsoft.com/office/drawing/2014/main" id="{74A61A25-9949-4083-83A6-EEE98DBB1CE4}"/>
               </a:ext>
             </a:extLst>
           </p:cNvPr>
@@ -1224,149 +1260,59 @@
             <a:prstDash val="solid"/>
           </a:ln>
         </p:spPr>
-      </p:sp>
-      <p:sp>
-        <p:nvSpPr>
-          <p:cNvPr id="6" name="parallel-marker-orbit-0">
-            <a:extLst xmlns:a="http://schemas.openxmlformats.org/drawingml/2006/main">
-              <a:ext uri="{FF2B5EF4-FFF2-40B4-BE49-F238E27FC236}">
-                <a16:creationId xmlns:a16="http://schemas.microsoft.com/office/drawing/2014/main" id="{9700C4AB-01BD-42E4-8BB1-68039F478722}"/>
-              </a:ext>
-            </a:extLst>
-          </p:cNvPr>
-          <p:cNvSpPr>
-            <a:spLocks xmlns:a="http://schemas.openxmlformats.org/drawingml/2006/main" noGrp="1"/>
-          </p:cNvSpPr>
-          <p:nvPr/>
-        </p:nvSpPr>
-        <p:spPr>
-          <a:xfrm xmlns:a="http://schemas.openxmlformats.org/drawingml/2006/main" rot="0">
-            <a:off x="1845469" y="2219325"/>
-            <a:ext cx="400050" cy="400050"/>
-          </a:xfrm>
-          <a:prstGeom xmlns:a="http://schemas.openxmlformats.org/drawingml/2006/main" prst="ellipse">
+        <p:style>
+          <a:lnRef xmlns:a="http://schemas.openxmlformats.org/drawingml/2006/main" idx="0"/>
+          <a:fillRef xmlns:a="http://schemas.openxmlformats.org/drawingml/2006/main" idx="0"/>
+          <a:effectRef xmlns:a="http://schemas.openxmlformats.org/drawingml/2006/main" idx="11"/>
+          <a:fontRef xmlns:a="http://schemas.openxmlformats.org/drawingml/2006/main" idx="major"/>
+        </p:style>
+      </p:sp>
+      <p:pic>
+        <p:nvPicPr>
+          <p:cNvPr id="42" name=""/>
+          <p:cNvPicPr>
+            <a:picLocks xmlns:a="http://schemas.openxmlformats.org/drawingml/2006/main" noChangeAspect="1"/>
+          </p:cNvPicPr>
+          <p:nvPr/>
+        </p:nvPicPr>
+        <p:blipFill>
+          <a:blip xmlns:r="http://schemas.openxmlformats.org/officeDocument/2006/relationships" xmlns:a="http://schemas.openxmlformats.org/drawingml/2006/main" r:embed="Ree74caf074c24747">
+            <a:extLst>
+              <a:ext uri="{96DAC541-7B7A-43D3-8B79-37D633B846F1}">
+                <asvg:svgBlip xmlns:asvg="http://schemas.microsoft.com/office/drawing/2016/SVG/main" r:embed="R9144ba218e094b0d"/>
+              </a:ext>
+            </a:extLst>
+          </a:blip>
+          <a:stretch xmlns:a="http://schemas.openxmlformats.org/drawingml/2006/main"/>
+        </p:blipFill>
+        <p:spPr>
+          <a:xfrm xmlns:a="http://schemas.openxmlformats.org/drawingml/2006/main">
+            <a:off x="1874044" y="2247900"/>
+            <a:ext cx="342900" cy="342900"/>
+          </a:xfrm>
+          <a:prstGeom xmlns:a="http://schemas.openxmlformats.org/drawingml/2006/main" prst="rect">
             <a:avLst/>
           </a:prstGeom>
-          <a:noFill xmlns:a="http://schemas.openxmlformats.org/drawingml/2006/main"/>
-          <a:ln xmlns:a="http://schemas.openxmlformats.org/drawingml/2006/main" w="19050">
-            <a:solidFill>
-              <a:srgbClr val="FFFFFF"/>
-            </a:solidFill>
-            <a:prstDash val="solid"/>
-          </a:ln>
-        </p:spPr>
-      </p:sp>
-      <p:sp>
-        <p:nvSpPr>
-          <p:cNvPr id="7" name="parallel-marker-dot-center-0">
-            <a:extLst xmlns:a="http://schemas.openxmlformats.org/drawingml/2006/main">
-              <a:ext uri="{FF2B5EF4-FFF2-40B4-BE49-F238E27FC236}">
-                <a16:creationId xmlns:a16="http://schemas.microsoft.com/office/drawing/2014/main" id="{7DC9CA1D-1D33-4296-870D-CD9BE35F2DC0}"/>
-              </a:ext>
-            </a:extLst>
-          </p:cNvPr>
-          <p:cNvSpPr>
-            <a:spLocks xmlns:a="http://schemas.openxmlformats.org/drawingml/2006/main" noGrp="1"/>
-          </p:cNvSpPr>
-          <p:nvPr/>
-        </p:nvSpPr>
-        <p:spPr>
-          <a:xfrm xmlns:a="http://schemas.openxmlformats.org/drawingml/2006/main" rot="0">
-            <a:off x="2007394" y="2381250"/>
-            <a:ext cx="76200" cy="76200"/>
-          </a:xfrm>
-          <a:prstGeom xmlns:a="http://schemas.openxmlformats.org/drawingml/2006/main" prst="ellipse">
-            <a:avLst/>
-          </a:prstGeom>
-          <a:solidFill xmlns:a="http://schemas.openxmlformats.org/drawingml/2006/main">
-            <a:srgbClr val="FFFFFF"/>
-          </a:solidFill>
-          <a:ln xmlns:a="http://schemas.openxmlformats.org/drawingml/2006/main" w="0">
-            <a:noFill/>
-            <a:prstDash val="solid"/>
-          </a:ln>
-        </p:spPr>
-      </p:sp>
-      <p:sp>
-        <p:nvSpPr>
-          <p:cNvPr id="8" name="parallel-marker-dot-left-0">
-            <a:extLst xmlns:a="http://schemas.openxmlformats.org/drawingml/2006/main">
-              <a:ext uri="{FF2B5EF4-FFF2-40B4-BE49-F238E27FC236}">
-                <a16:creationId xmlns:a16="http://schemas.microsoft.com/office/drawing/2014/main" id="{E3ACC251-63B0-49D6-8B3F-024A330E3A63}"/>
-              </a:ext>
-            </a:extLst>
-          </p:cNvPr>
-          <p:cNvSpPr>
-            <a:spLocks xmlns:a="http://schemas.openxmlformats.org/drawingml/2006/main" noGrp="1"/>
-          </p:cNvSpPr>
-          <p:nvPr/>
-        </p:nvSpPr>
-        <p:spPr>
-          <a:xfrm xmlns:a="http://schemas.openxmlformats.org/drawingml/2006/main" rot="0">
-            <a:off x="1835944" y="2381250"/>
-            <a:ext cx="57150" cy="57150"/>
-          </a:xfrm>
-          <a:prstGeom xmlns:a="http://schemas.openxmlformats.org/drawingml/2006/main" prst="ellipse">
-            <a:avLst/>
-          </a:prstGeom>
-          <a:solidFill xmlns:a="http://schemas.openxmlformats.org/drawingml/2006/main">
-            <a:srgbClr val="FFFFFF"/>
-          </a:solidFill>
-          <a:ln xmlns:a="http://schemas.openxmlformats.org/drawingml/2006/main" w="0">
-            <a:noFill/>
-            <a:prstDash val="solid"/>
-          </a:ln>
-        </p:spPr>
-      </p:sp>
-      <p:sp>
-        <p:nvSpPr>
-          <p:cNvPr id="9" name="parallel-marker-dot-right-0">
-            <a:extLst xmlns:a="http://schemas.openxmlformats.org/drawingml/2006/main">
-              <a:ext uri="{FF2B5EF4-FFF2-40B4-BE49-F238E27FC236}">
-                <a16:creationId xmlns:a16="http://schemas.microsoft.com/office/drawing/2014/main" id="{99D0BD48-ABF3-462F-8CDE-51E12FB88930}"/>
-              </a:ext>
-            </a:extLst>
-          </p:cNvPr>
-          <p:cNvSpPr>
-            <a:spLocks xmlns:a="http://schemas.openxmlformats.org/drawingml/2006/main" noGrp="1"/>
-          </p:cNvSpPr>
-          <p:nvPr/>
-        </p:nvSpPr>
-        <p:spPr>
-          <a:xfrm xmlns:a="http://schemas.openxmlformats.org/drawingml/2006/main" rot="0">
-            <a:off x="2197894" y="2381250"/>
-            <a:ext cx="57150" cy="57150"/>
-          </a:xfrm>
-          <a:prstGeom xmlns:a="http://schemas.openxmlformats.org/drawingml/2006/main" prst="ellipse">
-            <a:avLst/>
-          </a:prstGeom>
-          <a:solidFill xmlns:a="http://schemas.openxmlformats.org/drawingml/2006/main">
-            <a:srgbClr val="FFFFFF"/>
-          </a:solidFill>
-          <a:ln xmlns:a="http://schemas.openxmlformats.org/drawingml/2006/main" w="0">
-            <a:noFill/>
-            <a:prstDash val="solid"/>
-          </a:ln>
-        </p:spPr>
-      </p:sp>
-      <p:sp>
-        <p:nvSpPr>
-          <p:cNvPr id="10" name="parallel-title-0">
-            <a:extLst xmlns:a="http://schemas.openxmlformats.org/drawingml/2006/main">
-              <a:ext uri="{FF2B5EF4-FFF2-40B4-BE49-F238E27FC236}">
-                <a16:creationId xmlns:a16="http://schemas.microsoft.com/office/drawing/2014/main" id="{8194D6E5-114E-4912-8A37-940858F1BA04}"/>
-              </a:ext>
-            </a:extLst>
-          </p:cNvPr>
-          <p:cNvSpPr>
-            <a:spLocks xmlns:a="http://schemas.openxmlformats.org/drawingml/2006/main" noGrp="1"/>
-          </p:cNvSpPr>
-          <p:nvPr/>
-        </p:nvSpPr>
-        <p:spPr>
-          <a:xfrm xmlns:a="http://schemas.openxmlformats.org/drawingml/2006/main" rot="0">
-            <a:off x="1019175" y="3181350"/>
-            <a:ext cx="2052638" cy="342900"/>
+        </p:spPr>
+      </p:pic>
+      <p:sp>
+        <p:nvSpPr>
+          <p:cNvPr id="7" name="parallel-title-0">
+            <a:extLst xmlns:a="http://schemas.openxmlformats.org/drawingml/2006/main">
+              <a:ext uri="{FF2B5EF4-FFF2-40B4-BE49-F238E27FC236}">
+                <a16:creationId xmlns:a16="http://schemas.microsoft.com/office/drawing/2014/main" id="{A87828D4-00EE-4E6F-AAD8-22F0BD78796B}"/>
+              </a:ext>
+            </a:extLst>
+          </p:cNvPr>
+          <p:cNvSpPr>
+            <a:spLocks xmlns:a="http://schemas.openxmlformats.org/drawingml/2006/main" noGrp="1"/>
+          </p:cNvSpPr>
+          <p:nvPr/>
+        </p:nvSpPr>
+        <p:spPr>
+          <a:xfrm xmlns:a="http://schemas.openxmlformats.org/drawingml/2006/main" rot="0">
+            <a:off x="1038225" y="3489569"/>
+            <a:ext cx="2014538" cy="333375"/>
           </a:xfrm>
           <a:prstGeom xmlns:a="http://schemas.openxmlformats.org/drawingml/2006/main" prst="rect">
             <a:avLst/>
@@ -1378,13 +1324,17 @@
           </a:ln>
         </p:spPr>
         <p:txBody>
-          <a:bodyPr xmlns:a="http://schemas.openxmlformats.org/drawingml/2006/main" lIns="0" tIns="0" rIns="0" bIns="0" anchor="ctr">
+          <a:bodyPr xmlns:a="http://schemas.openxmlformats.org/drawingml/2006/main" wrap="square" lIns="0" tIns="0" rIns="0" bIns="0" anchor="ctr">
             <a:noAutofit/>
           </a:bodyPr>
           <a:lstStyle xmlns:a="http://schemas.openxmlformats.org/drawingml/2006/main"/>
           <a:p xmlns:a="http://schemas.openxmlformats.org/drawingml/2006/main">
             <a:pPr algn="ctr">
-              <a:defRPr sz="1575" b="1" i="0">
+              <a:lnSpc>
+                <a:spcPct val="125000"/>
+              </a:lnSpc>
+              <a:buNone/>
+              <a:defRPr sz="2100" b="1" i="0">
                 <a:solidFill>
                   <a:srgbClr val="254B7C"/>
                 </a:solidFill>
@@ -1394,7 +1344,7 @@
               </a:defRPr>
             </a:pPr>
             <a:r>
-              <a:rPr sz="1575" b="1" i="0">
+              <a:rPr sz="2100" b="1" i="0">
                 <a:solidFill>
                   <a:srgbClr val="254B7C"/>
                 </a:solidFill>
@@ -1409,21 +1359,21 @@
       </p:sp>
       <p:sp>
         <p:nvSpPr>
-          <p:cNvPr id="11" name="parallel-rule-0">
-            <a:extLst xmlns:a="http://schemas.openxmlformats.org/drawingml/2006/main">
-              <a:ext uri="{FF2B5EF4-FFF2-40B4-BE49-F238E27FC236}">
-                <a16:creationId xmlns:a16="http://schemas.microsoft.com/office/drawing/2014/main" id="{A728BCF8-7A0D-4862-A8D5-76F3A6D98022}"/>
-              </a:ext>
-            </a:extLst>
-          </p:cNvPr>
-          <p:cNvSpPr>
-            <a:spLocks xmlns:a="http://schemas.openxmlformats.org/drawingml/2006/main" noGrp="1"/>
-          </p:cNvSpPr>
-          <p:nvPr/>
-        </p:nvSpPr>
-        <p:spPr>
-          <a:xfrm xmlns:a="http://schemas.openxmlformats.org/drawingml/2006/main" rot="0">
-            <a:off x="1788319" y="3657600"/>
+          <p:cNvPr id="8" name="parallel-rule-0">
+            <a:extLst xmlns:a="http://schemas.openxmlformats.org/drawingml/2006/main">
+              <a:ext uri="{FF2B5EF4-FFF2-40B4-BE49-F238E27FC236}">
+                <a16:creationId xmlns:a16="http://schemas.microsoft.com/office/drawing/2014/main" id="{71C3B70C-C65A-4DCD-9E74-8B026C254E0B}"/>
+              </a:ext>
+            </a:extLst>
+          </p:cNvPr>
+          <p:cNvSpPr>
+            <a:spLocks xmlns:a="http://schemas.openxmlformats.org/drawingml/2006/main" noGrp="1"/>
+          </p:cNvSpPr>
+          <p:nvPr/>
+        </p:nvSpPr>
+        <p:spPr>
+          <a:xfrm xmlns:a="http://schemas.openxmlformats.org/drawingml/2006/main" rot="0">
+            <a:off x="1788319" y="3956294"/>
             <a:ext cx="514350" cy="38100"/>
           </a:xfrm>
           <a:prstGeom xmlns:a="http://schemas.openxmlformats.org/drawingml/2006/main" prst="roundRect">
@@ -1442,22 +1392,22 @@
       </p:sp>
       <p:sp>
         <p:nvSpPr>
-          <p:cNvPr id="12" name="parallel-body-0">
-            <a:extLst xmlns:a="http://schemas.openxmlformats.org/drawingml/2006/main">
-              <a:ext uri="{FF2B5EF4-FFF2-40B4-BE49-F238E27FC236}">
-                <a16:creationId xmlns:a16="http://schemas.microsoft.com/office/drawing/2014/main" id="{C3445A33-832C-438A-A096-307832CDD6EA}"/>
-              </a:ext>
-            </a:extLst>
-          </p:cNvPr>
-          <p:cNvSpPr>
-            <a:spLocks xmlns:a="http://schemas.openxmlformats.org/drawingml/2006/main" noGrp="1"/>
-          </p:cNvSpPr>
-          <p:nvPr/>
-        </p:nvSpPr>
-        <p:spPr>
-          <a:xfrm xmlns:a="http://schemas.openxmlformats.org/drawingml/2006/main" rot="0">
-            <a:off x="1076325" y="3962400"/>
-            <a:ext cx="1938338" cy="1104900"/>
+          <p:cNvPr id="9" name="parallel-body-0">
+            <a:extLst xmlns:a="http://schemas.openxmlformats.org/drawingml/2006/main">
+              <a:ext uri="{FF2B5EF4-FFF2-40B4-BE49-F238E27FC236}">
+                <a16:creationId xmlns:a16="http://schemas.microsoft.com/office/drawing/2014/main" id="{17D54E66-F13A-4D97-8D2F-5CFEC4E12A8D}"/>
+              </a:ext>
+            </a:extLst>
+          </p:cNvPr>
+          <p:cNvSpPr>
+            <a:spLocks xmlns:a="http://schemas.openxmlformats.org/drawingml/2006/main" noGrp="1"/>
+          </p:cNvSpPr>
+          <p:nvPr/>
+        </p:nvSpPr>
+        <p:spPr>
+          <a:xfrm xmlns:a="http://schemas.openxmlformats.org/drawingml/2006/main" rot="0">
+            <a:off x="1038225" y="4127744"/>
+            <a:ext cx="2014538" cy="669427"/>
           </a:xfrm>
           <a:prstGeom xmlns:a="http://schemas.openxmlformats.org/drawingml/2006/main" prst="rect">
             <a:avLst/>
@@ -1469,13 +1419,17 @@
           </a:ln>
         </p:spPr>
         <p:txBody>
-          <a:bodyPr xmlns:a="http://schemas.openxmlformats.org/drawingml/2006/main" lIns="0" tIns="0" rIns="0" bIns="0" anchor="ctr">
+          <a:bodyPr xmlns:a="http://schemas.openxmlformats.org/drawingml/2006/main" wrap="square" lIns="0" tIns="0" rIns="0" bIns="0" anchor="ctr">
             <a:noAutofit/>
           </a:bodyPr>
           <a:lstStyle xmlns:a="http://schemas.openxmlformats.org/drawingml/2006/main"/>
           <a:p xmlns:a="http://schemas.openxmlformats.org/drawingml/2006/main">
             <a:pPr algn="ctr">
-              <a:defRPr sz="1425" b="0" i="0">
+              <a:lnSpc>
+                <a:spcPct val="155000"/>
+              </a:lnSpc>
+              <a:buNone/>
+              <a:defRPr sz="1700" b="0" i="0">
                 <a:solidFill>
                   <a:srgbClr val="46566A"/>
                 </a:solidFill>
@@ -1485,7 +1439,7 @@
               </a:defRPr>
             </a:pPr>
             <a:r>
-              <a:rPr sz="1425" b="0" i="0">
+              <a:rPr sz="1700" b="0" i="0">
                 <a:solidFill>
                   <a:srgbClr val="46566A"/>
                 </a:solidFill>
@@ -1493,17 +1447,44 @@
                 <a:ea typeface="Microsoft YaHei"/>
                 <a:cs typeface="Microsoft YaHei"/>
               </a:rPr>
-              <a:t>以可靠的方法与扎实知识解决复杂任务</a:t>
+              <a:t>以可靠的方法与扎实</a:t>
+            </a:r>
+          </a:p>
+          <a:p xmlns:a="http://schemas.openxmlformats.org/drawingml/2006/main">
+            <a:pPr algn="ctr">
+              <a:lnSpc>
+                <a:spcPct val="155000"/>
+              </a:lnSpc>
+              <a:buNone/>
+              <a:defRPr sz="1700" b="0" i="0">
+                <a:solidFill>
+                  <a:srgbClr val="46566A"/>
+                </a:solidFill>
+                <a:latin typeface="Microsoft YaHei"/>
+                <a:ea typeface="Microsoft YaHei"/>
+                <a:cs typeface="Microsoft YaHei"/>
+              </a:defRPr>
+            </a:pPr>
+            <a:r>
+              <a:rPr sz="1700" b="0" i="0">
+                <a:solidFill>
+                  <a:srgbClr val="46566A"/>
+                </a:solidFill>
+                <a:latin typeface="Microsoft YaHei"/>
+                <a:ea typeface="Microsoft YaHei"/>
+                <a:cs typeface="Microsoft YaHei"/>
+              </a:rPr>
+              <a:t>知识解决复杂任务</a:t>
             </a:r>
           </a:p>
         </p:txBody>
       </p:sp>
       <p:sp>
         <p:nvSpPr>
-          <p:cNvPr id="13" name="parallel-card-underlay-1">
-            <a:extLst xmlns:a="http://schemas.openxmlformats.org/drawingml/2006/main">
-              <a:ext uri="{FF2B5EF4-FFF2-40B4-BE49-F238E27FC236}">
-                <a16:creationId xmlns:a16="http://schemas.microsoft.com/office/drawing/2014/main" id="{4B6FCD22-D09E-42FA-A084-F98AFDB7A259}"/>
+          <p:cNvPr id="10" name="parallel-card-underlay-1">
+            <a:extLst xmlns:a="http://schemas.openxmlformats.org/drawingml/2006/main">
+              <a:ext uri="{FF2B5EF4-FFF2-40B4-BE49-F238E27FC236}">
+                <a16:creationId xmlns:a16="http://schemas.microsoft.com/office/drawing/2014/main" id="{535D8097-5C52-4DFD-8FC9-DF9562D85373}"/>
               </a:ext>
             </a:extLst>
           </p:cNvPr>
@@ -1519,7 +1500,7 @@
           </a:xfrm>
           <a:prstGeom xmlns:a="http://schemas.openxmlformats.org/drawingml/2006/main" prst="roundRect">
             <a:avLst>
-              <a:gd name="adj" fmla="val 4928"/>
+              <a:gd name="adj" fmla="val 10678"/>
             </a:avLst>
           </a:prstGeom>
           <a:solidFill xmlns:a="http://schemas.openxmlformats.org/drawingml/2006/main">
@@ -1535,10 +1516,10 @@
       </p:sp>
       <p:sp>
         <p:nvSpPr>
-          <p:cNvPr id="14" name="parallel-card-surface-1">
-            <a:extLst xmlns:a="http://schemas.openxmlformats.org/drawingml/2006/main">
-              <a:ext uri="{FF2B5EF4-FFF2-40B4-BE49-F238E27FC236}">
-                <a16:creationId xmlns:a16="http://schemas.microsoft.com/office/drawing/2014/main" id="{8D7D869C-27CD-4432-95B6-9811D8FF5354}"/>
+          <p:cNvPr id="11" name="parallel-card-surface-1">
+            <a:extLst xmlns:a="http://schemas.openxmlformats.org/drawingml/2006/main">
+              <a:ext uri="{FF2B5EF4-FFF2-40B4-BE49-F238E27FC236}">
+                <a16:creationId xmlns:a16="http://schemas.microsoft.com/office/drawing/2014/main" id="{D194674C-7338-478F-B175-E77570890F86}"/>
               </a:ext>
             </a:extLst>
           </p:cNvPr>
@@ -1554,7 +1535,7 @@
           </a:xfrm>
           <a:prstGeom xmlns:a="http://schemas.openxmlformats.org/drawingml/2006/main" prst="roundRect">
             <a:avLst>
-              <a:gd name="adj" fmla="val 4624"/>
+              <a:gd name="adj" fmla="val 10019"/>
             </a:avLst>
           </a:prstGeom>
           <a:solidFill xmlns:a="http://schemas.openxmlformats.org/drawingml/2006/main">
@@ -1570,16 +1551,16 @@
         <p:style>
           <a:lnRef xmlns:a="http://schemas.openxmlformats.org/drawingml/2006/main" idx="0"/>
           <a:fillRef xmlns:a="http://schemas.openxmlformats.org/drawingml/2006/main" idx="0"/>
-          <a:effectRef xmlns:a="http://schemas.openxmlformats.org/drawingml/2006/main" idx="4"/>
+          <a:effectRef xmlns:a="http://schemas.openxmlformats.org/drawingml/2006/main" idx="10"/>
           <a:fontRef xmlns:a="http://schemas.openxmlformats.org/drawingml/2006/main" idx="major"/>
         </p:style>
       </p:sp>
       <p:sp>
         <p:nvSpPr>
-          <p:cNvPr id="15" name="parallel-card-accent-1">
-            <a:extLst xmlns:a="http://schemas.openxmlformats.org/drawingml/2006/main">
-              <a:ext uri="{FF2B5EF4-FFF2-40B4-BE49-F238E27FC236}">
-                <a16:creationId xmlns:a16="http://schemas.microsoft.com/office/drawing/2014/main" id="{15AE39D6-AF16-47EB-8E56-2E81112E0AC7}"/>
+          <p:cNvPr id="12" name="parallel-card-accent-1">
+            <a:extLst xmlns:a="http://schemas.openxmlformats.org/drawingml/2006/main">
+              <a:ext uri="{FF2B5EF4-FFF2-40B4-BE49-F238E27FC236}">
+                <a16:creationId xmlns:a16="http://schemas.microsoft.com/office/drawing/2014/main" id="{B8E229AA-8808-490B-91A0-2802DBF8F31F}"/>
               </a:ext>
             </a:extLst>
           </p:cNvPr>
@@ -1609,10 +1590,10 @@
       </p:sp>
       <p:sp>
         <p:nvSpPr>
-          <p:cNvPr id="16" name="parallel-marker-halo-1">
-            <a:extLst xmlns:a="http://schemas.openxmlformats.org/drawingml/2006/main">
-              <a:ext uri="{FF2B5EF4-FFF2-40B4-BE49-F238E27FC236}">
-                <a16:creationId xmlns:a16="http://schemas.microsoft.com/office/drawing/2014/main" id="{37E37248-79E9-4C16-8A5A-B2BEFBEAE612}"/>
+          <p:cNvPr id="13" name="parallel-marker-halo-1">
+            <a:extLst xmlns:a="http://schemas.openxmlformats.org/drawingml/2006/main">
+              <a:ext uri="{FF2B5EF4-FFF2-40B4-BE49-F238E27FC236}">
+                <a16:creationId xmlns:a16="http://schemas.microsoft.com/office/drawing/2014/main" id="{BD94ACCF-8DBE-4CE2-8D49-8716A76CB374}"/>
               </a:ext>
             </a:extLst>
           </p:cNvPr>
@@ -1642,10 +1623,10 @@
       </p:sp>
       <p:sp>
         <p:nvSpPr>
-          <p:cNvPr id="17" name="parallel-marker-core-1">
-            <a:extLst xmlns:a="http://schemas.openxmlformats.org/drawingml/2006/main">
-              <a:ext uri="{FF2B5EF4-FFF2-40B4-BE49-F238E27FC236}">
-                <a16:creationId xmlns:a16="http://schemas.microsoft.com/office/drawing/2014/main" id="{69B073AF-4829-4378-A920-662341289223}"/>
+          <p:cNvPr id="14" name="parallel-marker-core-1">
+            <a:extLst xmlns:a="http://schemas.openxmlformats.org/drawingml/2006/main">
+              <a:ext uri="{FF2B5EF4-FFF2-40B4-BE49-F238E27FC236}">
+                <a16:creationId xmlns:a16="http://schemas.microsoft.com/office/drawing/2014/main" id="{9B273BC6-AD24-4016-90BC-796F9ADB12C8}"/>
               </a:ext>
             </a:extLst>
           </p:cNvPr>
@@ -1670,149 +1651,59 @@
             <a:prstDash val="solid"/>
           </a:ln>
         </p:spPr>
-      </p:sp>
-      <p:sp>
-        <p:nvSpPr>
-          <p:cNvPr id="18" name="parallel-marker-orbit-1">
-            <a:extLst xmlns:a="http://schemas.openxmlformats.org/drawingml/2006/main">
-              <a:ext uri="{FF2B5EF4-FFF2-40B4-BE49-F238E27FC236}">
-                <a16:creationId xmlns:a16="http://schemas.microsoft.com/office/drawing/2014/main" id="{B4531963-EA71-4800-8177-B6C6504996AB}"/>
-              </a:ext>
-            </a:extLst>
-          </p:cNvPr>
-          <p:cNvSpPr>
-            <a:spLocks xmlns:a="http://schemas.openxmlformats.org/drawingml/2006/main" noGrp="1"/>
-          </p:cNvSpPr>
-          <p:nvPr/>
-        </p:nvSpPr>
-        <p:spPr>
-          <a:xfrm xmlns:a="http://schemas.openxmlformats.org/drawingml/2006/main" rot="0">
-            <a:off x="4545806" y="2219325"/>
-            <a:ext cx="400050" cy="400050"/>
-          </a:xfrm>
-          <a:prstGeom xmlns:a="http://schemas.openxmlformats.org/drawingml/2006/main" prst="ellipse">
+        <p:style>
+          <a:lnRef xmlns:a="http://schemas.openxmlformats.org/drawingml/2006/main" idx="0"/>
+          <a:fillRef xmlns:a="http://schemas.openxmlformats.org/drawingml/2006/main" idx="0"/>
+          <a:effectRef xmlns:a="http://schemas.openxmlformats.org/drawingml/2006/main" idx="11"/>
+          <a:fontRef xmlns:a="http://schemas.openxmlformats.org/drawingml/2006/main" idx="major"/>
+        </p:style>
+      </p:sp>
+      <p:pic>
+        <p:nvPicPr>
+          <p:cNvPr id="51" name=""/>
+          <p:cNvPicPr>
+            <a:picLocks xmlns:a="http://schemas.openxmlformats.org/drawingml/2006/main" noChangeAspect="1"/>
+          </p:cNvPicPr>
+          <p:nvPr/>
+        </p:nvPicPr>
+        <p:blipFill>
+          <a:blip xmlns:r="http://schemas.openxmlformats.org/officeDocument/2006/relationships" xmlns:a="http://schemas.openxmlformats.org/drawingml/2006/main" r:embed="R2f69c9ee7df54401">
+            <a:extLst>
+              <a:ext uri="{96DAC541-7B7A-43D3-8B79-37D633B846F1}">
+                <asvg:svgBlip xmlns:asvg="http://schemas.microsoft.com/office/drawing/2016/SVG/main" r:embed="R3ff09c57427f4f41"/>
+              </a:ext>
+            </a:extLst>
+          </a:blip>
+          <a:stretch xmlns:a="http://schemas.openxmlformats.org/drawingml/2006/main"/>
+        </p:blipFill>
+        <p:spPr>
+          <a:xfrm xmlns:a="http://schemas.openxmlformats.org/drawingml/2006/main">
+            <a:off x="4574381" y="2247900"/>
+            <a:ext cx="342900" cy="342900"/>
+          </a:xfrm>
+          <a:prstGeom xmlns:a="http://schemas.openxmlformats.org/drawingml/2006/main" prst="rect">
             <a:avLst/>
           </a:prstGeom>
-          <a:noFill xmlns:a="http://schemas.openxmlformats.org/drawingml/2006/main"/>
-          <a:ln xmlns:a="http://schemas.openxmlformats.org/drawingml/2006/main" w="19050">
-            <a:solidFill>
-              <a:srgbClr val="FFFFFF"/>
-            </a:solidFill>
-            <a:prstDash val="solid"/>
-          </a:ln>
-        </p:spPr>
-      </p:sp>
-      <p:sp>
-        <p:nvSpPr>
-          <p:cNvPr id="19" name="parallel-marker-dot-center-1">
-            <a:extLst xmlns:a="http://schemas.openxmlformats.org/drawingml/2006/main">
-              <a:ext uri="{FF2B5EF4-FFF2-40B4-BE49-F238E27FC236}">
-                <a16:creationId xmlns:a16="http://schemas.microsoft.com/office/drawing/2014/main" id="{CEB9A7DE-FCD1-41BB-9040-0DC6DAEC183D}"/>
-              </a:ext>
-            </a:extLst>
-          </p:cNvPr>
-          <p:cNvSpPr>
-            <a:spLocks xmlns:a="http://schemas.openxmlformats.org/drawingml/2006/main" noGrp="1"/>
-          </p:cNvSpPr>
-          <p:nvPr/>
-        </p:nvSpPr>
-        <p:spPr>
-          <a:xfrm xmlns:a="http://schemas.openxmlformats.org/drawingml/2006/main" rot="0">
-            <a:off x="4707731" y="2381250"/>
-            <a:ext cx="76200" cy="76200"/>
-          </a:xfrm>
-          <a:prstGeom xmlns:a="http://schemas.openxmlformats.org/drawingml/2006/main" prst="ellipse">
-            <a:avLst/>
-          </a:prstGeom>
-          <a:solidFill xmlns:a="http://schemas.openxmlformats.org/drawingml/2006/main">
-            <a:srgbClr val="FFFFFF"/>
-          </a:solidFill>
-          <a:ln xmlns:a="http://schemas.openxmlformats.org/drawingml/2006/main" w="0">
-            <a:noFill/>
-            <a:prstDash val="solid"/>
-          </a:ln>
-        </p:spPr>
-      </p:sp>
-      <p:sp>
-        <p:nvSpPr>
-          <p:cNvPr id="20" name="parallel-marker-dot-left-1">
-            <a:extLst xmlns:a="http://schemas.openxmlformats.org/drawingml/2006/main">
-              <a:ext uri="{FF2B5EF4-FFF2-40B4-BE49-F238E27FC236}">
-                <a16:creationId xmlns:a16="http://schemas.microsoft.com/office/drawing/2014/main" id="{FB74169B-32FD-4304-9B06-5C2D6D6A73A1}"/>
-              </a:ext>
-            </a:extLst>
-          </p:cNvPr>
-          <p:cNvSpPr>
-            <a:spLocks xmlns:a="http://schemas.openxmlformats.org/drawingml/2006/main" noGrp="1"/>
-          </p:cNvSpPr>
-          <p:nvPr/>
-        </p:nvSpPr>
-        <p:spPr>
-          <a:xfrm xmlns:a="http://schemas.openxmlformats.org/drawingml/2006/main" rot="0">
-            <a:off x="4536281" y="2381250"/>
-            <a:ext cx="57150" cy="57150"/>
-          </a:xfrm>
-          <a:prstGeom xmlns:a="http://schemas.openxmlformats.org/drawingml/2006/main" prst="ellipse">
-            <a:avLst/>
-          </a:prstGeom>
-          <a:solidFill xmlns:a="http://schemas.openxmlformats.org/drawingml/2006/main">
-            <a:srgbClr val="FFFFFF"/>
-          </a:solidFill>
-          <a:ln xmlns:a="http://schemas.openxmlformats.org/drawingml/2006/main" w="0">
-            <a:noFill/>
-            <a:prstDash val="solid"/>
-          </a:ln>
-        </p:spPr>
-      </p:sp>
-      <p:sp>
-        <p:nvSpPr>
-          <p:cNvPr id="21" name="parallel-marker-dot-right-1">
-            <a:extLst xmlns:a="http://schemas.openxmlformats.org/drawingml/2006/main">
-              <a:ext uri="{FF2B5EF4-FFF2-40B4-BE49-F238E27FC236}">
-                <a16:creationId xmlns:a16="http://schemas.microsoft.com/office/drawing/2014/main" id="{9B58C222-97A2-4502-8C96-BE76B42D0E39}"/>
-              </a:ext>
-            </a:extLst>
-          </p:cNvPr>
-          <p:cNvSpPr>
-            <a:spLocks xmlns:a="http://schemas.openxmlformats.org/drawingml/2006/main" noGrp="1"/>
-          </p:cNvSpPr>
-          <p:nvPr/>
-        </p:nvSpPr>
-        <p:spPr>
-          <a:xfrm xmlns:a="http://schemas.openxmlformats.org/drawingml/2006/main" rot="0">
-            <a:off x="4898231" y="2381250"/>
-            <a:ext cx="57150" cy="57150"/>
-          </a:xfrm>
-          <a:prstGeom xmlns:a="http://schemas.openxmlformats.org/drawingml/2006/main" prst="ellipse">
-            <a:avLst/>
-          </a:prstGeom>
-          <a:solidFill xmlns:a="http://schemas.openxmlformats.org/drawingml/2006/main">
-            <a:srgbClr val="FFFFFF"/>
-          </a:solidFill>
-          <a:ln xmlns:a="http://schemas.openxmlformats.org/drawingml/2006/main" w="0">
-            <a:noFill/>
-            <a:prstDash val="solid"/>
-          </a:ln>
-        </p:spPr>
-      </p:sp>
-      <p:sp>
-        <p:nvSpPr>
-          <p:cNvPr id="22" name="parallel-title-1">
-            <a:extLst xmlns:a="http://schemas.openxmlformats.org/drawingml/2006/main">
-              <a:ext uri="{FF2B5EF4-FFF2-40B4-BE49-F238E27FC236}">
-                <a16:creationId xmlns:a16="http://schemas.microsoft.com/office/drawing/2014/main" id="{4AB28CD6-82A7-40B6-8952-B748FAA32F30}"/>
-              </a:ext>
-            </a:extLst>
-          </p:cNvPr>
-          <p:cNvSpPr>
-            <a:spLocks xmlns:a="http://schemas.openxmlformats.org/drawingml/2006/main" noGrp="1"/>
-          </p:cNvSpPr>
-          <p:nvPr/>
-        </p:nvSpPr>
-        <p:spPr>
-          <a:xfrm xmlns:a="http://schemas.openxmlformats.org/drawingml/2006/main" rot="0">
-            <a:off x="3719513" y="3181350"/>
-            <a:ext cx="2052638" cy="342900"/>
+        </p:spPr>
+      </p:pic>
+      <p:sp>
+        <p:nvSpPr>
+          <p:cNvPr id="16" name="parallel-title-1">
+            <a:extLst xmlns:a="http://schemas.openxmlformats.org/drawingml/2006/main">
+              <a:ext uri="{FF2B5EF4-FFF2-40B4-BE49-F238E27FC236}">
+                <a16:creationId xmlns:a16="http://schemas.microsoft.com/office/drawing/2014/main" id="{7121E48F-5817-446C-9715-D5A9F805E242}"/>
+              </a:ext>
+            </a:extLst>
+          </p:cNvPr>
+          <p:cNvSpPr>
+            <a:spLocks xmlns:a="http://schemas.openxmlformats.org/drawingml/2006/main" noGrp="1"/>
+          </p:cNvSpPr>
+          <p:nvPr/>
+        </p:nvSpPr>
+        <p:spPr>
+          <a:xfrm xmlns:a="http://schemas.openxmlformats.org/drawingml/2006/main" rot="0">
+            <a:off x="3738563" y="3489569"/>
+            <a:ext cx="2014538" cy="333375"/>
           </a:xfrm>
           <a:prstGeom xmlns:a="http://schemas.openxmlformats.org/drawingml/2006/main" prst="rect">
             <a:avLst/>
@@ -1824,13 +1715,17 @@
           </a:ln>
         </p:spPr>
         <p:txBody>
-          <a:bodyPr xmlns:a="http://schemas.openxmlformats.org/drawingml/2006/main" lIns="0" tIns="0" rIns="0" bIns="0" anchor="ctr">
+          <a:bodyPr xmlns:a="http://schemas.openxmlformats.org/drawingml/2006/main" wrap="square" lIns="0" tIns="0" rIns="0" bIns="0" anchor="ctr">
             <a:noAutofit/>
           </a:bodyPr>
           <a:lstStyle xmlns:a="http://schemas.openxmlformats.org/drawingml/2006/main"/>
           <a:p xmlns:a="http://schemas.openxmlformats.org/drawingml/2006/main">
             <a:pPr algn="ctr">
-              <a:defRPr sz="1575" b="1" i="0">
+              <a:lnSpc>
+                <a:spcPct val="125000"/>
+              </a:lnSpc>
+              <a:buNone/>
+              <a:defRPr sz="2100" b="1" i="0">
                 <a:solidFill>
                   <a:srgbClr val="254B7C"/>
                 </a:solidFill>
@@ -1840,7 +1735,7 @@
               </a:defRPr>
             </a:pPr>
             <a:r>
-              <a:rPr sz="1575" b="1" i="0">
+              <a:rPr sz="2100" b="1" i="0">
                 <a:solidFill>
                   <a:srgbClr val="254B7C"/>
                 </a:solidFill>
@@ -1855,21 +1750,21 @@
       </p:sp>
       <p:sp>
         <p:nvSpPr>
-          <p:cNvPr id="23" name="parallel-rule-1">
-            <a:extLst xmlns:a="http://schemas.openxmlformats.org/drawingml/2006/main">
-              <a:ext uri="{FF2B5EF4-FFF2-40B4-BE49-F238E27FC236}">
-                <a16:creationId xmlns:a16="http://schemas.microsoft.com/office/drawing/2014/main" id="{9451EAD4-06A3-42BA-9022-29FFF8123ED1}"/>
-              </a:ext>
-            </a:extLst>
-          </p:cNvPr>
-          <p:cNvSpPr>
-            <a:spLocks xmlns:a="http://schemas.openxmlformats.org/drawingml/2006/main" noGrp="1"/>
-          </p:cNvSpPr>
-          <p:nvPr/>
-        </p:nvSpPr>
-        <p:spPr>
-          <a:xfrm xmlns:a="http://schemas.openxmlformats.org/drawingml/2006/main" rot="0">
-            <a:off x="4488656" y="3657600"/>
+          <p:cNvPr id="17" name="parallel-rule-1">
+            <a:extLst xmlns:a="http://schemas.openxmlformats.org/drawingml/2006/main">
+              <a:ext uri="{FF2B5EF4-FFF2-40B4-BE49-F238E27FC236}">
+                <a16:creationId xmlns:a16="http://schemas.microsoft.com/office/drawing/2014/main" id="{39369FAA-3F83-49F6-8555-0FACB62DAF24}"/>
+              </a:ext>
+            </a:extLst>
+          </p:cNvPr>
+          <p:cNvSpPr>
+            <a:spLocks xmlns:a="http://schemas.openxmlformats.org/drawingml/2006/main" noGrp="1"/>
+          </p:cNvSpPr>
+          <p:nvPr/>
+        </p:nvSpPr>
+        <p:spPr>
+          <a:xfrm xmlns:a="http://schemas.openxmlformats.org/drawingml/2006/main" rot="0">
+            <a:off x="4488656" y="3956294"/>
             <a:ext cx="514350" cy="38100"/>
           </a:xfrm>
           <a:prstGeom xmlns:a="http://schemas.openxmlformats.org/drawingml/2006/main" prst="roundRect">
@@ -1888,22 +1783,22 @@
       </p:sp>
       <p:sp>
         <p:nvSpPr>
-          <p:cNvPr id="24" name="parallel-body-1">
-            <a:extLst xmlns:a="http://schemas.openxmlformats.org/drawingml/2006/main">
-              <a:ext uri="{FF2B5EF4-FFF2-40B4-BE49-F238E27FC236}">
-                <a16:creationId xmlns:a16="http://schemas.microsoft.com/office/drawing/2014/main" id="{1B626907-CAB0-409B-BE87-2B3F758B831C}"/>
-              </a:ext>
-            </a:extLst>
-          </p:cNvPr>
-          <p:cNvSpPr>
-            <a:spLocks xmlns:a="http://schemas.openxmlformats.org/drawingml/2006/main" noGrp="1"/>
-          </p:cNvSpPr>
-          <p:nvPr/>
-        </p:nvSpPr>
-        <p:spPr>
-          <a:xfrm xmlns:a="http://schemas.openxmlformats.org/drawingml/2006/main" rot="0">
-            <a:off x="3776663" y="3962400"/>
-            <a:ext cx="1938338" cy="1104900"/>
+          <p:cNvPr id="18" name="parallel-body-1">
+            <a:extLst xmlns:a="http://schemas.openxmlformats.org/drawingml/2006/main">
+              <a:ext uri="{FF2B5EF4-FFF2-40B4-BE49-F238E27FC236}">
+                <a16:creationId xmlns:a16="http://schemas.microsoft.com/office/drawing/2014/main" id="{CAB7F5A5-FA27-4EC9-B3B6-A72F110906BA}"/>
+              </a:ext>
+            </a:extLst>
+          </p:cNvPr>
+          <p:cNvSpPr>
+            <a:spLocks xmlns:a="http://schemas.openxmlformats.org/drawingml/2006/main" noGrp="1"/>
+          </p:cNvSpPr>
+          <p:nvPr/>
+        </p:nvSpPr>
+        <p:spPr>
+          <a:xfrm xmlns:a="http://schemas.openxmlformats.org/drawingml/2006/main" rot="0">
+            <a:off x="3738563" y="4127744"/>
+            <a:ext cx="2014538" cy="669427"/>
           </a:xfrm>
           <a:prstGeom xmlns:a="http://schemas.openxmlformats.org/drawingml/2006/main" prst="rect">
             <a:avLst/>
@@ -1915,13 +1810,17 @@
           </a:ln>
         </p:spPr>
         <p:txBody>
-          <a:bodyPr xmlns:a="http://schemas.openxmlformats.org/drawingml/2006/main" lIns="0" tIns="0" rIns="0" bIns="0" anchor="ctr">
+          <a:bodyPr xmlns:a="http://schemas.openxmlformats.org/drawingml/2006/main" wrap="square" lIns="0" tIns="0" rIns="0" bIns="0" anchor="ctr">
             <a:noAutofit/>
           </a:bodyPr>
           <a:lstStyle xmlns:a="http://schemas.openxmlformats.org/drawingml/2006/main"/>
           <a:p xmlns:a="http://schemas.openxmlformats.org/drawingml/2006/main">
             <a:pPr algn="ctr">
-              <a:defRPr sz="1425" b="0" i="0">
+              <a:lnSpc>
+                <a:spcPct val="155000"/>
+              </a:lnSpc>
+              <a:buNone/>
+              <a:defRPr sz="1700" b="0" i="0">
                 <a:solidFill>
                   <a:srgbClr val="46566A"/>
                 </a:solidFill>
@@ -1931,7 +1830,7 @@
               </a:defRPr>
             </a:pPr>
             <a:r>
-              <a:rPr sz="1425" b="0" i="0">
+              <a:rPr sz="1700" b="0" i="0">
                 <a:solidFill>
                   <a:srgbClr val="46566A"/>
                 </a:solidFill>
@@ -1939,17 +1838,44 @@
                 <a:ea typeface="Microsoft YaHei"/>
                 <a:cs typeface="Microsoft YaHei"/>
               </a:rPr>
-              <a:t>围绕共同目标整合人员、平台与资源</a:t>
+              <a:t>围绕共同目标整合人</a:t>
+            </a:r>
+          </a:p>
+          <a:p xmlns:a="http://schemas.openxmlformats.org/drawingml/2006/main">
+            <a:pPr algn="ctr">
+              <a:lnSpc>
+                <a:spcPct val="155000"/>
+              </a:lnSpc>
+              <a:buNone/>
+              <a:defRPr sz="1700" b="0" i="0">
+                <a:solidFill>
+                  <a:srgbClr val="46566A"/>
+                </a:solidFill>
+                <a:latin typeface="Microsoft YaHei"/>
+                <a:ea typeface="Microsoft YaHei"/>
+                <a:cs typeface="Microsoft YaHei"/>
+              </a:defRPr>
+            </a:pPr>
+            <a:r>
+              <a:rPr sz="1700" b="0" i="0">
+                <a:solidFill>
+                  <a:srgbClr val="46566A"/>
+                </a:solidFill>
+                <a:latin typeface="Microsoft YaHei"/>
+                <a:ea typeface="Microsoft YaHei"/>
+                <a:cs typeface="Microsoft YaHei"/>
+              </a:rPr>
+              <a:t>员、平台与资源</a:t>
             </a:r>
           </a:p>
         </p:txBody>
       </p:sp>
       <p:sp>
         <p:nvSpPr>
-          <p:cNvPr id="25" name="parallel-card-underlay-2">
-            <a:extLst xmlns:a="http://schemas.openxmlformats.org/drawingml/2006/main">
-              <a:ext uri="{FF2B5EF4-FFF2-40B4-BE49-F238E27FC236}">
-                <a16:creationId xmlns:a16="http://schemas.microsoft.com/office/drawing/2014/main" id="{F34BA49C-FEB4-4BB5-B5E6-E7C8F7B29DB0}"/>
+          <p:cNvPr id="19" name="parallel-card-underlay-2">
+            <a:extLst xmlns:a="http://schemas.openxmlformats.org/drawingml/2006/main">
+              <a:ext uri="{FF2B5EF4-FFF2-40B4-BE49-F238E27FC236}">
+                <a16:creationId xmlns:a16="http://schemas.microsoft.com/office/drawing/2014/main" id="{77B2AAFF-7FC7-4A35-A606-F0C335591046}"/>
               </a:ext>
             </a:extLst>
           </p:cNvPr>
@@ -1965,7 +1891,7 @@
           </a:xfrm>
           <a:prstGeom xmlns:a="http://schemas.openxmlformats.org/drawingml/2006/main" prst="roundRect">
             <a:avLst>
-              <a:gd name="adj" fmla="val 4928"/>
+              <a:gd name="adj" fmla="val 10678"/>
             </a:avLst>
           </a:prstGeom>
           <a:solidFill xmlns:a="http://schemas.openxmlformats.org/drawingml/2006/main">
@@ -1981,10 +1907,10 @@
       </p:sp>
       <p:sp>
         <p:nvSpPr>
-          <p:cNvPr id="26" name="parallel-card-surface-2">
-            <a:extLst xmlns:a="http://schemas.openxmlformats.org/drawingml/2006/main">
-              <a:ext uri="{FF2B5EF4-FFF2-40B4-BE49-F238E27FC236}">
-                <a16:creationId xmlns:a16="http://schemas.microsoft.com/office/drawing/2014/main" id="{2D3AF5F3-AB91-4C99-8598-ED427CCA7F8D}"/>
+          <p:cNvPr id="20" name="parallel-card-surface-2">
+            <a:extLst xmlns:a="http://schemas.openxmlformats.org/drawingml/2006/main">
+              <a:ext uri="{FF2B5EF4-FFF2-40B4-BE49-F238E27FC236}">
+                <a16:creationId xmlns:a16="http://schemas.microsoft.com/office/drawing/2014/main" id="{46C3654F-1278-4184-A31C-407B6C3A984B}"/>
               </a:ext>
             </a:extLst>
           </p:cNvPr>
@@ -2000,7 +1926,7 @@
           </a:xfrm>
           <a:prstGeom xmlns:a="http://schemas.openxmlformats.org/drawingml/2006/main" prst="roundRect">
             <a:avLst>
-              <a:gd name="adj" fmla="val 4624"/>
+              <a:gd name="adj" fmla="val 10019"/>
             </a:avLst>
           </a:prstGeom>
           <a:solidFill xmlns:a="http://schemas.openxmlformats.org/drawingml/2006/main">
@@ -2016,16 +1942,16 @@
         <p:style>
           <a:lnRef xmlns:a="http://schemas.openxmlformats.org/drawingml/2006/main" idx="0"/>
           <a:fillRef xmlns:a="http://schemas.openxmlformats.org/drawingml/2006/main" idx="0"/>
-          <a:effectRef xmlns:a="http://schemas.openxmlformats.org/drawingml/2006/main" idx="4"/>
+          <a:effectRef xmlns:a="http://schemas.openxmlformats.org/drawingml/2006/main" idx="10"/>
           <a:fontRef xmlns:a="http://schemas.openxmlformats.org/drawingml/2006/main" idx="major"/>
         </p:style>
       </p:sp>
       <p:sp>
         <p:nvSpPr>
-          <p:cNvPr id="27" name="parallel-card-accent-2">
-            <a:extLst xmlns:a="http://schemas.openxmlformats.org/drawingml/2006/main">
-              <a:ext uri="{FF2B5EF4-FFF2-40B4-BE49-F238E27FC236}">
-                <a16:creationId xmlns:a16="http://schemas.microsoft.com/office/drawing/2014/main" id="{4E7986DF-3403-46E0-8B2B-82C69060C3C1}"/>
+          <p:cNvPr id="21" name="parallel-card-accent-2">
+            <a:extLst xmlns:a="http://schemas.openxmlformats.org/drawingml/2006/main">
+              <a:ext uri="{FF2B5EF4-FFF2-40B4-BE49-F238E27FC236}">
+                <a16:creationId xmlns:a16="http://schemas.microsoft.com/office/drawing/2014/main" id="{A188FEFC-B48D-4C21-9A65-90353A4ACD61}"/>
               </a:ext>
             </a:extLst>
           </p:cNvPr>
@@ -2055,10 +1981,10 @@
       </p:sp>
       <p:sp>
         <p:nvSpPr>
-          <p:cNvPr id="28" name="parallel-marker-halo-2">
-            <a:extLst xmlns:a="http://schemas.openxmlformats.org/drawingml/2006/main">
-              <a:ext uri="{FF2B5EF4-FFF2-40B4-BE49-F238E27FC236}">
-                <a16:creationId xmlns:a16="http://schemas.microsoft.com/office/drawing/2014/main" id="{60A23DA4-0663-40DC-8776-419F9047BB2E}"/>
+          <p:cNvPr id="22" name="parallel-marker-halo-2">
+            <a:extLst xmlns:a="http://schemas.openxmlformats.org/drawingml/2006/main">
+              <a:ext uri="{FF2B5EF4-FFF2-40B4-BE49-F238E27FC236}">
+                <a16:creationId xmlns:a16="http://schemas.microsoft.com/office/drawing/2014/main" id="{B41BB570-FDAD-42B8-968C-84C1B6F9BED5}"/>
               </a:ext>
             </a:extLst>
           </p:cNvPr>
@@ -2088,10 +2014,10 @@
       </p:sp>
       <p:sp>
         <p:nvSpPr>
-          <p:cNvPr id="29" name="parallel-marker-core-2">
-            <a:extLst xmlns:a="http://schemas.openxmlformats.org/drawingml/2006/main">
-              <a:ext uri="{FF2B5EF4-FFF2-40B4-BE49-F238E27FC236}">
-                <a16:creationId xmlns:a16="http://schemas.microsoft.com/office/drawing/2014/main" id="{B4007D8D-53A3-40C8-9752-4A28430750C3}"/>
+          <p:cNvPr id="23" name="parallel-marker-core-2">
+            <a:extLst xmlns:a="http://schemas.openxmlformats.org/drawingml/2006/main">
+              <a:ext uri="{FF2B5EF4-FFF2-40B4-BE49-F238E27FC236}">
+                <a16:creationId xmlns:a16="http://schemas.microsoft.com/office/drawing/2014/main" id="{47F10D69-54E7-43ED-A69B-B0C32882AC76}"/>
               </a:ext>
             </a:extLst>
           </p:cNvPr>
@@ -2116,149 +2042,59 @@
             <a:prstDash val="solid"/>
           </a:ln>
         </p:spPr>
-      </p:sp>
-      <p:sp>
-        <p:nvSpPr>
-          <p:cNvPr id="30" name="parallel-marker-orbit-2">
-            <a:extLst xmlns:a="http://schemas.openxmlformats.org/drawingml/2006/main">
-              <a:ext uri="{FF2B5EF4-FFF2-40B4-BE49-F238E27FC236}">
-                <a16:creationId xmlns:a16="http://schemas.microsoft.com/office/drawing/2014/main" id="{6AAA9D62-A809-4EC3-B03E-B8C89346EADF}"/>
-              </a:ext>
-            </a:extLst>
-          </p:cNvPr>
-          <p:cNvSpPr>
-            <a:spLocks xmlns:a="http://schemas.openxmlformats.org/drawingml/2006/main" noGrp="1"/>
-          </p:cNvSpPr>
-          <p:nvPr/>
-        </p:nvSpPr>
-        <p:spPr>
-          <a:xfrm xmlns:a="http://schemas.openxmlformats.org/drawingml/2006/main" rot="0">
-            <a:off x="7246144" y="2219325"/>
-            <a:ext cx="400050" cy="400050"/>
-          </a:xfrm>
-          <a:prstGeom xmlns:a="http://schemas.openxmlformats.org/drawingml/2006/main" prst="ellipse">
+        <p:style>
+          <a:lnRef xmlns:a="http://schemas.openxmlformats.org/drawingml/2006/main" idx="0"/>
+          <a:fillRef xmlns:a="http://schemas.openxmlformats.org/drawingml/2006/main" idx="0"/>
+          <a:effectRef xmlns:a="http://schemas.openxmlformats.org/drawingml/2006/main" idx="11"/>
+          <a:fontRef xmlns:a="http://schemas.openxmlformats.org/drawingml/2006/main" idx="major"/>
+        </p:style>
+      </p:sp>
+      <p:pic>
+        <p:nvPicPr>
+          <p:cNvPr id="60" name=""/>
+          <p:cNvPicPr>
+            <a:picLocks xmlns:a="http://schemas.openxmlformats.org/drawingml/2006/main" noChangeAspect="1"/>
+          </p:cNvPicPr>
+          <p:nvPr/>
+        </p:nvPicPr>
+        <p:blipFill>
+          <a:blip xmlns:r="http://schemas.openxmlformats.org/officeDocument/2006/relationships" xmlns:a="http://schemas.openxmlformats.org/drawingml/2006/main" r:embed="R9e7c624f57bb481b">
+            <a:extLst>
+              <a:ext uri="{96DAC541-7B7A-43D3-8B79-37D633B846F1}">
+                <asvg:svgBlip xmlns:asvg="http://schemas.microsoft.com/office/drawing/2016/SVG/main" r:embed="R3317043aad7d4b0e"/>
+              </a:ext>
+            </a:extLst>
+          </a:blip>
+          <a:stretch xmlns:a="http://schemas.openxmlformats.org/drawingml/2006/main"/>
+        </p:blipFill>
+        <p:spPr>
+          <a:xfrm xmlns:a="http://schemas.openxmlformats.org/drawingml/2006/main">
+            <a:off x="7274719" y="2247900"/>
+            <a:ext cx="342900" cy="342900"/>
+          </a:xfrm>
+          <a:prstGeom xmlns:a="http://schemas.openxmlformats.org/drawingml/2006/main" prst="rect">
             <a:avLst/>
           </a:prstGeom>
-          <a:noFill xmlns:a="http://schemas.openxmlformats.org/drawingml/2006/main"/>
-          <a:ln xmlns:a="http://schemas.openxmlformats.org/drawingml/2006/main" w="19050">
-            <a:solidFill>
-              <a:srgbClr val="FFFFFF"/>
-            </a:solidFill>
-            <a:prstDash val="solid"/>
-          </a:ln>
-        </p:spPr>
-      </p:sp>
-      <p:sp>
-        <p:nvSpPr>
-          <p:cNvPr id="31" name="parallel-marker-dot-center-2">
-            <a:extLst xmlns:a="http://schemas.openxmlformats.org/drawingml/2006/main">
-              <a:ext uri="{FF2B5EF4-FFF2-40B4-BE49-F238E27FC236}">
-                <a16:creationId xmlns:a16="http://schemas.microsoft.com/office/drawing/2014/main" id="{F24A3AFE-E4AC-47C4-A8E9-6055D11EFA7A}"/>
-              </a:ext>
-            </a:extLst>
-          </p:cNvPr>
-          <p:cNvSpPr>
-            <a:spLocks xmlns:a="http://schemas.openxmlformats.org/drawingml/2006/main" noGrp="1"/>
-          </p:cNvSpPr>
-          <p:nvPr/>
-        </p:nvSpPr>
-        <p:spPr>
-          <a:xfrm xmlns:a="http://schemas.openxmlformats.org/drawingml/2006/main" rot="0">
-            <a:off x="7408069" y="2381250"/>
-            <a:ext cx="76200" cy="76200"/>
-          </a:xfrm>
-          <a:prstGeom xmlns:a="http://schemas.openxmlformats.org/drawingml/2006/main" prst="ellipse">
-            <a:avLst/>
-          </a:prstGeom>
-          <a:solidFill xmlns:a="http://schemas.openxmlformats.org/drawingml/2006/main">
-            <a:srgbClr val="FFFFFF"/>
-          </a:solidFill>
-          <a:ln xmlns:a="http://schemas.openxmlformats.org/drawingml/2006/main" w="0">
-            <a:noFill/>
-            <a:prstDash val="solid"/>
-          </a:ln>
-        </p:spPr>
-      </p:sp>
-      <p:sp>
-        <p:nvSpPr>
-          <p:cNvPr id="32" name="parallel-marker-dot-left-2">
-            <a:extLst xmlns:a="http://schemas.openxmlformats.org/drawingml/2006/main">
-              <a:ext uri="{FF2B5EF4-FFF2-40B4-BE49-F238E27FC236}">
-                <a16:creationId xmlns:a16="http://schemas.microsoft.com/office/drawing/2014/main" id="{C0B86B65-EE0E-417A-94FC-D3C1F1F377C2}"/>
-              </a:ext>
-            </a:extLst>
-          </p:cNvPr>
-          <p:cNvSpPr>
-            <a:spLocks xmlns:a="http://schemas.openxmlformats.org/drawingml/2006/main" noGrp="1"/>
-          </p:cNvSpPr>
-          <p:nvPr/>
-        </p:nvSpPr>
-        <p:spPr>
-          <a:xfrm xmlns:a="http://schemas.openxmlformats.org/drawingml/2006/main" rot="0">
-            <a:off x="7236619" y="2381250"/>
-            <a:ext cx="57150" cy="57150"/>
-          </a:xfrm>
-          <a:prstGeom xmlns:a="http://schemas.openxmlformats.org/drawingml/2006/main" prst="ellipse">
-            <a:avLst/>
-          </a:prstGeom>
-          <a:solidFill xmlns:a="http://schemas.openxmlformats.org/drawingml/2006/main">
-            <a:srgbClr val="FFFFFF"/>
-          </a:solidFill>
-          <a:ln xmlns:a="http://schemas.openxmlformats.org/drawingml/2006/main" w="0">
-            <a:noFill/>
-            <a:prstDash val="solid"/>
-          </a:ln>
-        </p:spPr>
-      </p:sp>
-      <p:sp>
-        <p:nvSpPr>
-          <p:cNvPr id="33" name="parallel-marker-dot-right-2">
-            <a:extLst xmlns:a="http://schemas.openxmlformats.org/drawingml/2006/main">
-              <a:ext uri="{FF2B5EF4-FFF2-40B4-BE49-F238E27FC236}">
-                <a16:creationId xmlns:a16="http://schemas.microsoft.com/office/drawing/2014/main" id="{A868807D-C252-41C1-A87A-3D98E2542082}"/>
-              </a:ext>
-            </a:extLst>
-          </p:cNvPr>
-          <p:cNvSpPr>
-            <a:spLocks xmlns:a="http://schemas.openxmlformats.org/drawingml/2006/main" noGrp="1"/>
-          </p:cNvSpPr>
-          <p:nvPr/>
-        </p:nvSpPr>
-        <p:spPr>
-          <a:xfrm xmlns:a="http://schemas.openxmlformats.org/drawingml/2006/main" rot="0">
-            <a:off x="7598569" y="2381250"/>
-            <a:ext cx="57150" cy="57150"/>
-          </a:xfrm>
-          <a:prstGeom xmlns:a="http://schemas.openxmlformats.org/drawingml/2006/main" prst="ellipse">
-            <a:avLst/>
-          </a:prstGeom>
-          <a:solidFill xmlns:a="http://schemas.openxmlformats.org/drawingml/2006/main">
-            <a:srgbClr val="FFFFFF"/>
-          </a:solidFill>
-          <a:ln xmlns:a="http://schemas.openxmlformats.org/drawingml/2006/main" w="0">
-            <a:noFill/>
-            <a:prstDash val="solid"/>
-          </a:ln>
-        </p:spPr>
-      </p:sp>
-      <p:sp>
-        <p:nvSpPr>
-          <p:cNvPr id="34" name="parallel-title-2">
-            <a:extLst xmlns:a="http://schemas.openxmlformats.org/drawingml/2006/main">
-              <a:ext uri="{FF2B5EF4-FFF2-40B4-BE49-F238E27FC236}">
-                <a16:creationId xmlns:a16="http://schemas.microsoft.com/office/drawing/2014/main" id="{5EB2A58F-F31E-4388-8603-148504544581}"/>
-              </a:ext>
-            </a:extLst>
-          </p:cNvPr>
-          <p:cNvSpPr>
-            <a:spLocks xmlns:a="http://schemas.openxmlformats.org/drawingml/2006/main" noGrp="1"/>
-          </p:cNvSpPr>
-          <p:nvPr/>
-        </p:nvSpPr>
-        <p:spPr>
-          <a:xfrm xmlns:a="http://schemas.openxmlformats.org/drawingml/2006/main" rot="0">
-            <a:off x="6419850" y="3181350"/>
-            <a:ext cx="2052638" cy="342900"/>
+        </p:spPr>
+      </p:pic>
+      <p:sp>
+        <p:nvSpPr>
+          <p:cNvPr id="25" name="parallel-title-2">
+            <a:extLst xmlns:a="http://schemas.openxmlformats.org/drawingml/2006/main">
+              <a:ext uri="{FF2B5EF4-FFF2-40B4-BE49-F238E27FC236}">
+                <a16:creationId xmlns:a16="http://schemas.microsoft.com/office/drawing/2014/main" id="{8BDC0197-A22B-4DE3-843F-0EA102AA36C6}"/>
+              </a:ext>
+            </a:extLst>
+          </p:cNvPr>
+          <p:cNvSpPr>
+            <a:spLocks xmlns:a="http://schemas.openxmlformats.org/drawingml/2006/main" noGrp="1"/>
+          </p:cNvSpPr>
+          <p:nvPr/>
+        </p:nvSpPr>
+        <p:spPr>
+          <a:xfrm xmlns:a="http://schemas.openxmlformats.org/drawingml/2006/main" rot="0">
+            <a:off x="6438900" y="3489569"/>
+            <a:ext cx="2014538" cy="333375"/>
           </a:xfrm>
           <a:prstGeom xmlns:a="http://schemas.openxmlformats.org/drawingml/2006/main" prst="rect">
             <a:avLst/>
@@ -2270,13 +2106,17 @@
           </a:ln>
         </p:spPr>
         <p:txBody>
-          <a:bodyPr xmlns:a="http://schemas.openxmlformats.org/drawingml/2006/main" lIns="0" tIns="0" rIns="0" bIns="0" anchor="ctr">
+          <a:bodyPr xmlns:a="http://schemas.openxmlformats.org/drawingml/2006/main" wrap="square" lIns="0" tIns="0" rIns="0" bIns="0" anchor="ctr">
             <a:noAutofit/>
           </a:bodyPr>
           <a:lstStyle xmlns:a="http://schemas.openxmlformats.org/drawingml/2006/main"/>
           <a:p xmlns:a="http://schemas.openxmlformats.org/drawingml/2006/main">
             <a:pPr algn="ctr">
-              <a:defRPr sz="1575" b="1" i="0">
+              <a:lnSpc>
+                <a:spcPct val="125000"/>
+              </a:lnSpc>
+              <a:buNone/>
+              <a:defRPr sz="2100" b="1" i="0">
                 <a:solidFill>
                   <a:srgbClr val="254B7C"/>
                 </a:solidFill>
@@ -2286,7 +2126,7 @@
               </a:defRPr>
             </a:pPr>
             <a:r>
-              <a:rPr sz="1575" b="1" i="0">
+              <a:rPr sz="2100" b="1" i="0">
                 <a:solidFill>
                   <a:srgbClr val="254B7C"/>
                 </a:solidFill>
@@ -2301,21 +2141,21 @@
       </p:sp>
       <p:sp>
         <p:nvSpPr>
-          <p:cNvPr id="35" name="parallel-rule-2">
-            <a:extLst xmlns:a="http://schemas.openxmlformats.org/drawingml/2006/main">
-              <a:ext uri="{FF2B5EF4-FFF2-40B4-BE49-F238E27FC236}">
-                <a16:creationId xmlns:a16="http://schemas.microsoft.com/office/drawing/2014/main" id="{A9139181-9FE6-4881-8E7D-236FCB7A07BF}"/>
-              </a:ext>
-            </a:extLst>
-          </p:cNvPr>
-          <p:cNvSpPr>
-            <a:spLocks xmlns:a="http://schemas.openxmlformats.org/drawingml/2006/main" noGrp="1"/>
-          </p:cNvSpPr>
-          <p:nvPr/>
-        </p:nvSpPr>
-        <p:spPr>
-          <a:xfrm xmlns:a="http://schemas.openxmlformats.org/drawingml/2006/main" rot="0">
-            <a:off x="7188994" y="3657600"/>
+          <p:cNvPr id="26" name="parallel-rule-2">
+            <a:extLst xmlns:a="http://schemas.openxmlformats.org/drawingml/2006/main">
+              <a:ext uri="{FF2B5EF4-FFF2-40B4-BE49-F238E27FC236}">
+                <a16:creationId xmlns:a16="http://schemas.microsoft.com/office/drawing/2014/main" id="{A90BA6DF-1B4B-425E-A3B5-FE69A17D92A1}"/>
+              </a:ext>
+            </a:extLst>
+          </p:cNvPr>
+          <p:cNvSpPr>
+            <a:spLocks xmlns:a="http://schemas.openxmlformats.org/drawingml/2006/main" noGrp="1"/>
+          </p:cNvSpPr>
+          <p:nvPr/>
+        </p:nvSpPr>
+        <p:spPr>
+          <a:xfrm xmlns:a="http://schemas.openxmlformats.org/drawingml/2006/main" rot="0">
+            <a:off x="7188994" y="3956294"/>
             <a:ext cx="514350" cy="38100"/>
           </a:xfrm>
           <a:prstGeom xmlns:a="http://schemas.openxmlformats.org/drawingml/2006/main" prst="roundRect">
@@ -2334,22 +2174,22 @@
       </p:sp>
       <p:sp>
         <p:nvSpPr>
-          <p:cNvPr id="36" name="parallel-body-2">
-            <a:extLst xmlns:a="http://schemas.openxmlformats.org/drawingml/2006/main">
-              <a:ext uri="{FF2B5EF4-FFF2-40B4-BE49-F238E27FC236}">
-                <a16:creationId xmlns:a16="http://schemas.microsoft.com/office/drawing/2014/main" id="{8A18ADD5-1233-4C4D-ACE9-273503EAE62B}"/>
-              </a:ext>
-            </a:extLst>
-          </p:cNvPr>
-          <p:cNvSpPr>
-            <a:spLocks xmlns:a="http://schemas.openxmlformats.org/drawingml/2006/main" noGrp="1"/>
-          </p:cNvSpPr>
-          <p:nvPr/>
-        </p:nvSpPr>
-        <p:spPr>
-          <a:xfrm xmlns:a="http://schemas.openxmlformats.org/drawingml/2006/main" rot="0">
-            <a:off x="6477000" y="3962400"/>
-            <a:ext cx="1938338" cy="1104900"/>
+          <p:cNvPr id="27" name="parallel-body-2">
+            <a:extLst xmlns:a="http://schemas.openxmlformats.org/drawingml/2006/main">
+              <a:ext uri="{FF2B5EF4-FFF2-40B4-BE49-F238E27FC236}">
+                <a16:creationId xmlns:a16="http://schemas.microsoft.com/office/drawing/2014/main" id="{1E8C39B2-6DB1-43B2-9AC6-858979A0ABF2}"/>
+              </a:ext>
+            </a:extLst>
+          </p:cNvPr>
+          <p:cNvSpPr>
+            <a:spLocks xmlns:a="http://schemas.openxmlformats.org/drawingml/2006/main" noGrp="1"/>
+          </p:cNvSpPr>
+          <p:nvPr/>
+        </p:nvSpPr>
+        <p:spPr>
+          <a:xfrm xmlns:a="http://schemas.openxmlformats.org/drawingml/2006/main" rot="0">
+            <a:off x="6438900" y="4127744"/>
+            <a:ext cx="2014538" cy="669427"/>
           </a:xfrm>
           <a:prstGeom xmlns:a="http://schemas.openxmlformats.org/drawingml/2006/main" prst="rect">
             <a:avLst/>
@@ -2361,13 +2201,17 @@
           </a:ln>
         </p:spPr>
         <p:txBody>
-          <a:bodyPr xmlns:a="http://schemas.openxmlformats.org/drawingml/2006/main" lIns="0" tIns="0" rIns="0" bIns="0" anchor="ctr">
+          <a:bodyPr xmlns:a="http://schemas.openxmlformats.org/drawingml/2006/main" wrap="square" lIns="0" tIns="0" rIns="0" bIns="0" anchor="ctr">
             <a:noAutofit/>
           </a:bodyPr>
           <a:lstStyle xmlns:a="http://schemas.openxmlformats.org/drawingml/2006/main"/>
           <a:p xmlns:a="http://schemas.openxmlformats.org/drawingml/2006/main">
             <a:pPr algn="ctr">
-              <a:defRPr sz="1425" b="0" i="0">
+              <a:lnSpc>
+                <a:spcPct val="155000"/>
+              </a:lnSpc>
+              <a:buNone/>
+              <a:defRPr sz="1700" b="0" i="0">
                 <a:solidFill>
                   <a:srgbClr val="46566A"/>
                 </a:solidFill>
@@ -2377,7 +2221,7 @@
               </a:defRPr>
             </a:pPr>
             <a:r>
-              <a:rPr sz="1425" b="0" i="0">
+              <a:rPr sz="1700" b="0" i="0">
                 <a:solidFill>
                   <a:srgbClr val="46566A"/>
                 </a:solidFill>
@@ -2385,17 +2229,44 @@
                 <a:ea typeface="Microsoft YaHei"/>
                 <a:cs typeface="Microsoft YaHei"/>
               </a:rPr>
-              <a:t>从真实约束中提出新的思路与解决路径</a:t>
+              <a:t>从真实约束中提出新</a:t>
+            </a:r>
+          </a:p>
+          <a:p xmlns:a="http://schemas.openxmlformats.org/drawingml/2006/main">
+            <a:pPr algn="ctr">
+              <a:lnSpc>
+                <a:spcPct val="155000"/>
+              </a:lnSpc>
+              <a:buNone/>
+              <a:defRPr sz="1700" b="0" i="0">
+                <a:solidFill>
+                  <a:srgbClr val="46566A"/>
+                </a:solidFill>
+                <a:latin typeface="Microsoft YaHei"/>
+                <a:ea typeface="Microsoft YaHei"/>
+                <a:cs typeface="Microsoft YaHei"/>
+              </a:defRPr>
+            </a:pPr>
+            <a:r>
+              <a:rPr sz="1700" b="0" i="0">
+                <a:solidFill>
+                  <a:srgbClr val="46566A"/>
+                </a:solidFill>
+                <a:latin typeface="Microsoft YaHei"/>
+                <a:ea typeface="Microsoft YaHei"/>
+                <a:cs typeface="Microsoft YaHei"/>
+              </a:rPr>
+              <a:t>的思路与解决路径</a:t>
             </a:r>
           </a:p>
         </p:txBody>
       </p:sp>
       <p:sp>
         <p:nvSpPr>
-          <p:cNvPr id="37" name="parallel-card-underlay-3">
-            <a:extLst xmlns:a="http://schemas.openxmlformats.org/drawingml/2006/main">
-              <a:ext uri="{FF2B5EF4-FFF2-40B4-BE49-F238E27FC236}">
-                <a16:creationId xmlns:a16="http://schemas.microsoft.com/office/drawing/2014/main" id="{30236667-DD83-43DF-9CE1-93E8B9F89871}"/>
+          <p:cNvPr id="28" name="parallel-card-underlay-3">
+            <a:extLst xmlns:a="http://schemas.openxmlformats.org/drawingml/2006/main">
+              <a:ext uri="{FF2B5EF4-FFF2-40B4-BE49-F238E27FC236}">
+                <a16:creationId xmlns:a16="http://schemas.microsoft.com/office/drawing/2014/main" id="{6B9D9073-C0A7-4C7F-9AF9-418969455DA6}"/>
               </a:ext>
             </a:extLst>
           </p:cNvPr>
@@ -2411,7 +2282,7 @@
           </a:xfrm>
           <a:prstGeom xmlns:a="http://schemas.openxmlformats.org/drawingml/2006/main" prst="roundRect">
             <a:avLst>
-              <a:gd name="adj" fmla="val 4928"/>
+              <a:gd name="adj" fmla="val 10678"/>
             </a:avLst>
           </a:prstGeom>
           <a:solidFill xmlns:a="http://schemas.openxmlformats.org/drawingml/2006/main">
@@ -2427,10 +2298,10 @@
       </p:sp>
       <p:sp>
         <p:nvSpPr>
-          <p:cNvPr id="38" name="parallel-card-surface-3">
-            <a:extLst xmlns:a="http://schemas.openxmlformats.org/drawingml/2006/main">
-              <a:ext uri="{FF2B5EF4-FFF2-40B4-BE49-F238E27FC236}">
-                <a16:creationId xmlns:a16="http://schemas.microsoft.com/office/drawing/2014/main" id="{90CC77C9-8ED4-405C-AEAE-5DDCC3C45E6C}"/>
+          <p:cNvPr id="29" name="parallel-card-surface-3">
+            <a:extLst xmlns:a="http://schemas.openxmlformats.org/drawingml/2006/main">
+              <a:ext uri="{FF2B5EF4-FFF2-40B4-BE49-F238E27FC236}">
+                <a16:creationId xmlns:a16="http://schemas.microsoft.com/office/drawing/2014/main" id="{1C22E1A0-D567-453E-9786-157832D05C1B}"/>
               </a:ext>
             </a:extLst>
           </p:cNvPr>
@@ -2446,7 +2317,7 @@
           </a:xfrm>
           <a:prstGeom xmlns:a="http://schemas.openxmlformats.org/drawingml/2006/main" prst="roundRect">
             <a:avLst>
-              <a:gd name="adj" fmla="val 4624"/>
+              <a:gd name="adj" fmla="val 10019"/>
             </a:avLst>
           </a:prstGeom>
           <a:solidFill xmlns:a="http://schemas.openxmlformats.org/drawingml/2006/main">
@@ -2462,16 +2333,16 @@
         <p:style>
           <a:lnRef xmlns:a="http://schemas.openxmlformats.org/drawingml/2006/main" idx="0"/>
           <a:fillRef xmlns:a="http://schemas.openxmlformats.org/drawingml/2006/main" idx="0"/>
-          <a:effectRef xmlns:a="http://schemas.openxmlformats.org/drawingml/2006/main" idx="4"/>
+          <a:effectRef xmlns:a="http://schemas.openxmlformats.org/drawingml/2006/main" idx="10"/>
           <a:fontRef xmlns:a="http://schemas.openxmlformats.org/drawingml/2006/main" idx="major"/>
         </p:style>
       </p:sp>
       <p:sp>
         <p:nvSpPr>
-          <p:cNvPr id="39" name="parallel-card-accent-3">
-            <a:extLst xmlns:a="http://schemas.openxmlformats.org/drawingml/2006/main">
-              <a:ext uri="{FF2B5EF4-FFF2-40B4-BE49-F238E27FC236}">
-                <a16:creationId xmlns:a16="http://schemas.microsoft.com/office/drawing/2014/main" id="{7F49AF26-2623-4A1A-9DF5-A334D53AB9D8}"/>
+          <p:cNvPr id="30" name="parallel-card-accent-3">
+            <a:extLst xmlns:a="http://schemas.openxmlformats.org/drawingml/2006/main">
+              <a:ext uri="{FF2B5EF4-FFF2-40B4-BE49-F238E27FC236}">
+                <a16:creationId xmlns:a16="http://schemas.microsoft.com/office/drawing/2014/main" id="{E0C39EB5-3D3E-4C1D-8C50-60F5F5E7517D}"/>
               </a:ext>
             </a:extLst>
           </p:cNvPr>
@@ -2501,10 +2372,10 @@
       </p:sp>
       <p:sp>
         <p:nvSpPr>
-          <p:cNvPr id="40" name="parallel-marker-halo-3">
-            <a:extLst xmlns:a="http://schemas.openxmlformats.org/drawingml/2006/main">
-              <a:ext uri="{FF2B5EF4-FFF2-40B4-BE49-F238E27FC236}">
-                <a16:creationId xmlns:a16="http://schemas.microsoft.com/office/drawing/2014/main" id="{FB3AD05D-AF3B-416F-8E74-5A719D439D35}"/>
+          <p:cNvPr id="31" name="parallel-marker-halo-3">
+            <a:extLst xmlns:a="http://schemas.openxmlformats.org/drawingml/2006/main">
+              <a:ext uri="{FF2B5EF4-FFF2-40B4-BE49-F238E27FC236}">
+                <a16:creationId xmlns:a16="http://schemas.microsoft.com/office/drawing/2014/main" id="{D6E5DCDC-BA44-41C9-8733-6F40D59038C8}"/>
               </a:ext>
             </a:extLst>
           </p:cNvPr>
@@ -2534,10 +2405,10 @@
       </p:sp>
       <p:sp>
         <p:nvSpPr>
-          <p:cNvPr id="41" name="parallel-marker-core-3">
-            <a:extLst xmlns:a="http://schemas.openxmlformats.org/drawingml/2006/main">
-              <a:ext uri="{FF2B5EF4-FFF2-40B4-BE49-F238E27FC236}">
-                <a16:creationId xmlns:a16="http://schemas.microsoft.com/office/drawing/2014/main" id="{FED268F0-6528-4C18-AD5E-13DE156B955C}"/>
+          <p:cNvPr id="32" name="parallel-marker-core-3">
+            <a:extLst xmlns:a="http://schemas.openxmlformats.org/drawingml/2006/main">
+              <a:ext uri="{FF2B5EF4-FFF2-40B4-BE49-F238E27FC236}">
+                <a16:creationId xmlns:a16="http://schemas.microsoft.com/office/drawing/2014/main" id="{D8EF22C8-B531-4BBE-93A4-2B1ADDB7FE22}"/>
               </a:ext>
             </a:extLst>
           </p:cNvPr>
@@ -2562,149 +2433,59 @@
             <a:prstDash val="solid"/>
           </a:ln>
         </p:spPr>
-      </p:sp>
-      <p:sp>
-        <p:nvSpPr>
-          <p:cNvPr id="42" name="parallel-marker-orbit-3">
-            <a:extLst xmlns:a="http://schemas.openxmlformats.org/drawingml/2006/main">
-              <a:ext uri="{FF2B5EF4-FFF2-40B4-BE49-F238E27FC236}">
-                <a16:creationId xmlns:a16="http://schemas.microsoft.com/office/drawing/2014/main" id="{B990A832-F5C2-4EEB-AACF-B62BD33433DA}"/>
-              </a:ext>
-            </a:extLst>
-          </p:cNvPr>
-          <p:cNvSpPr>
-            <a:spLocks xmlns:a="http://schemas.openxmlformats.org/drawingml/2006/main" noGrp="1"/>
-          </p:cNvSpPr>
-          <p:nvPr/>
-        </p:nvSpPr>
-        <p:spPr>
-          <a:xfrm xmlns:a="http://schemas.openxmlformats.org/drawingml/2006/main" rot="0">
-            <a:off x="9946481" y="2219325"/>
-            <a:ext cx="400050" cy="400050"/>
-          </a:xfrm>
-          <a:prstGeom xmlns:a="http://schemas.openxmlformats.org/drawingml/2006/main" prst="ellipse">
+        <p:style>
+          <a:lnRef xmlns:a="http://schemas.openxmlformats.org/drawingml/2006/main" idx="0"/>
+          <a:fillRef xmlns:a="http://schemas.openxmlformats.org/drawingml/2006/main" idx="0"/>
+          <a:effectRef xmlns:a="http://schemas.openxmlformats.org/drawingml/2006/main" idx="11"/>
+          <a:fontRef xmlns:a="http://schemas.openxmlformats.org/drawingml/2006/main" idx="major"/>
+        </p:style>
+      </p:sp>
+      <p:pic>
+        <p:nvPicPr>
+          <p:cNvPr id="69" name=""/>
+          <p:cNvPicPr>
+            <a:picLocks xmlns:a="http://schemas.openxmlformats.org/drawingml/2006/main" noChangeAspect="1"/>
+          </p:cNvPicPr>
+          <p:nvPr/>
+        </p:nvPicPr>
+        <p:blipFill>
+          <a:blip xmlns:r="http://schemas.openxmlformats.org/officeDocument/2006/relationships" xmlns:a="http://schemas.openxmlformats.org/drawingml/2006/main" r:embed="Rcd7465fe1f014511">
+            <a:extLst>
+              <a:ext uri="{96DAC541-7B7A-43D3-8B79-37D633B846F1}">
+                <asvg:svgBlip xmlns:asvg="http://schemas.microsoft.com/office/drawing/2016/SVG/main" r:embed="R853e6bde174d4267"/>
+              </a:ext>
+            </a:extLst>
+          </a:blip>
+          <a:stretch xmlns:a="http://schemas.openxmlformats.org/drawingml/2006/main"/>
+        </p:blipFill>
+        <p:spPr>
+          <a:xfrm xmlns:a="http://schemas.openxmlformats.org/drawingml/2006/main">
+            <a:off x="9975056" y="2247900"/>
+            <a:ext cx="342900" cy="342900"/>
+          </a:xfrm>
+          <a:prstGeom xmlns:a="http://schemas.openxmlformats.org/drawingml/2006/main" prst="rect">
             <a:avLst/>
           </a:prstGeom>
-          <a:noFill xmlns:a="http://schemas.openxmlformats.org/drawingml/2006/main"/>
-          <a:ln xmlns:a="http://schemas.openxmlformats.org/drawingml/2006/main" w="19050">
-            <a:solidFill>
-              <a:srgbClr val="FFFFFF"/>
-            </a:solidFill>
-            <a:prstDash val="solid"/>
-          </a:ln>
-        </p:spPr>
-      </p:sp>
-      <p:sp>
-        <p:nvSpPr>
-          <p:cNvPr id="43" name="parallel-marker-dot-center-3">
-            <a:extLst xmlns:a="http://schemas.openxmlformats.org/drawingml/2006/main">
-              <a:ext uri="{FF2B5EF4-FFF2-40B4-BE49-F238E27FC236}">
-                <a16:creationId xmlns:a16="http://schemas.microsoft.com/office/drawing/2014/main" id="{0D3F81E3-C2A7-4E24-B75B-53F9E134B47B}"/>
-              </a:ext>
-            </a:extLst>
-          </p:cNvPr>
-          <p:cNvSpPr>
-            <a:spLocks xmlns:a="http://schemas.openxmlformats.org/drawingml/2006/main" noGrp="1"/>
-          </p:cNvSpPr>
-          <p:nvPr/>
-        </p:nvSpPr>
-        <p:spPr>
-          <a:xfrm xmlns:a="http://schemas.openxmlformats.org/drawingml/2006/main" rot="0">
-            <a:off x="10108406" y="2381250"/>
-            <a:ext cx="76200" cy="76200"/>
-          </a:xfrm>
-          <a:prstGeom xmlns:a="http://schemas.openxmlformats.org/drawingml/2006/main" prst="ellipse">
-            <a:avLst/>
-          </a:prstGeom>
-          <a:solidFill xmlns:a="http://schemas.openxmlformats.org/drawingml/2006/main">
-            <a:srgbClr val="FFFFFF"/>
-          </a:solidFill>
-          <a:ln xmlns:a="http://schemas.openxmlformats.org/drawingml/2006/main" w="0">
-            <a:noFill/>
-            <a:prstDash val="solid"/>
-          </a:ln>
-        </p:spPr>
-      </p:sp>
-      <p:sp>
-        <p:nvSpPr>
-          <p:cNvPr id="44" name="parallel-marker-dot-left-3">
-            <a:extLst xmlns:a="http://schemas.openxmlformats.org/drawingml/2006/main">
-              <a:ext uri="{FF2B5EF4-FFF2-40B4-BE49-F238E27FC236}">
-                <a16:creationId xmlns:a16="http://schemas.microsoft.com/office/drawing/2014/main" id="{00D81326-7695-4CA7-95F1-50E20268D375}"/>
-              </a:ext>
-            </a:extLst>
-          </p:cNvPr>
-          <p:cNvSpPr>
-            <a:spLocks xmlns:a="http://schemas.openxmlformats.org/drawingml/2006/main" noGrp="1"/>
-          </p:cNvSpPr>
-          <p:nvPr/>
-        </p:nvSpPr>
-        <p:spPr>
-          <a:xfrm xmlns:a="http://schemas.openxmlformats.org/drawingml/2006/main" rot="0">
-            <a:off x="9936956" y="2381250"/>
-            <a:ext cx="57150" cy="57150"/>
-          </a:xfrm>
-          <a:prstGeom xmlns:a="http://schemas.openxmlformats.org/drawingml/2006/main" prst="ellipse">
-            <a:avLst/>
-          </a:prstGeom>
-          <a:solidFill xmlns:a="http://schemas.openxmlformats.org/drawingml/2006/main">
-            <a:srgbClr val="FFFFFF"/>
-          </a:solidFill>
-          <a:ln xmlns:a="http://schemas.openxmlformats.org/drawingml/2006/main" w="0">
-            <a:noFill/>
-            <a:prstDash val="solid"/>
-          </a:ln>
-        </p:spPr>
-      </p:sp>
-      <p:sp>
-        <p:nvSpPr>
-          <p:cNvPr id="45" name="parallel-marker-dot-right-3">
-            <a:extLst xmlns:a="http://schemas.openxmlformats.org/drawingml/2006/main">
-              <a:ext uri="{FF2B5EF4-FFF2-40B4-BE49-F238E27FC236}">
-                <a16:creationId xmlns:a16="http://schemas.microsoft.com/office/drawing/2014/main" id="{E726C8BB-37A1-492E-ADE4-FE92D39483C0}"/>
-              </a:ext>
-            </a:extLst>
-          </p:cNvPr>
-          <p:cNvSpPr>
-            <a:spLocks xmlns:a="http://schemas.openxmlformats.org/drawingml/2006/main" noGrp="1"/>
-          </p:cNvSpPr>
-          <p:nvPr/>
-        </p:nvSpPr>
-        <p:spPr>
-          <a:xfrm xmlns:a="http://schemas.openxmlformats.org/drawingml/2006/main" rot="0">
-            <a:off x="10298906" y="2381250"/>
-            <a:ext cx="57150" cy="57150"/>
-          </a:xfrm>
-          <a:prstGeom xmlns:a="http://schemas.openxmlformats.org/drawingml/2006/main" prst="ellipse">
-            <a:avLst/>
-          </a:prstGeom>
-          <a:solidFill xmlns:a="http://schemas.openxmlformats.org/drawingml/2006/main">
-            <a:srgbClr val="FFFFFF"/>
-          </a:solidFill>
-          <a:ln xmlns:a="http://schemas.openxmlformats.org/drawingml/2006/main" w="0">
-            <a:noFill/>
-            <a:prstDash val="solid"/>
-          </a:ln>
-        </p:spPr>
-      </p:sp>
-      <p:sp>
-        <p:nvSpPr>
-          <p:cNvPr id="46" name="parallel-title-3">
-            <a:extLst xmlns:a="http://schemas.openxmlformats.org/drawingml/2006/main">
-              <a:ext uri="{FF2B5EF4-FFF2-40B4-BE49-F238E27FC236}">
-                <a16:creationId xmlns:a16="http://schemas.microsoft.com/office/drawing/2014/main" id="{A68537A5-F4B9-43B5-868D-68B94408500D}"/>
-              </a:ext>
-            </a:extLst>
-          </p:cNvPr>
-          <p:cNvSpPr>
-            <a:spLocks xmlns:a="http://schemas.openxmlformats.org/drawingml/2006/main" noGrp="1"/>
-          </p:cNvSpPr>
-          <p:nvPr/>
-        </p:nvSpPr>
-        <p:spPr>
-          <a:xfrm xmlns:a="http://schemas.openxmlformats.org/drawingml/2006/main" rot="0">
-            <a:off x="9120188" y="3181350"/>
-            <a:ext cx="2052638" cy="342900"/>
+        </p:spPr>
+      </p:pic>
+      <p:sp>
+        <p:nvSpPr>
+          <p:cNvPr id="34" name="parallel-title-3">
+            <a:extLst xmlns:a="http://schemas.openxmlformats.org/drawingml/2006/main">
+              <a:ext uri="{FF2B5EF4-FFF2-40B4-BE49-F238E27FC236}">
+                <a16:creationId xmlns:a16="http://schemas.microsoft.com/office/drawing/2014/main" id="{1C7EC433-D1BF-4FE4-9866-0084C6D03364}"/>
+              </a:ext>
+            </a:extLst>
+          </p:cNvPr>
+          <p:cNvSpPr>
+            <a:spLocks xmlns:a="http://schemas.openxmlformats.org/drawingml/2006/main" noGrp="1"/>
+          </p:cNvSpPr>
+          <p:nvPr/>
+        </p:nvSpPr>
+        <p:spPr>
+          <a:xfrm xmlns:a="http://schemas.openxmlformats.org/drawingml/2006/main" rot="0">
+            <a:off x="9139238" y="3489569"/>
+            <a:ext cx="2014538" cy="333375"/>
           </a:xfrm>
           <a:prstGeom xmlns:a="http://schemas.openxmlformats.org/drawingml/2006/main" prst="rect">
             <a:avLst/>
@@ -2716,13 +2497,17 @@
           </a:ln>
         </p:spPr>
         <p:txBody>
-          <a:bodyPr xmlns:a="http://schemas.openxmlformats.org/drawingml/2006/main" lIns="0" tIns="0" rIns="0" bIns="0" anchor="ctr">
+          <a:bodyPr xmlns:a="http://schemas.openxmlformats.org/drawingml/2006/main" wrap="square" lIns="0" tIns="0" rIns="0" bIns="0" anchor="ctr">
             <a:noAutofit/>
           </a:bodyPr>
           <a:lstStyle xmlns:a="http://schemas.openxmlformats.org/drawingml/2006/main"/>
           <a:p xmlns:a="http://schemas.openxmlformats.org/drawingml/2006/main">
             <a:pPr algn="ctr">
-              <a:defRPr sz="1575" b="1" i="0">
+              <a:lnSpc>
+                <a:spcPct val="125000"/>
+              </a:lnSpc>
+              <a:buNone/>
+              <a:defRPr sz="2100" b="1" i="0">
                 <a:solidFill>
                   <a:srgbClr val="254B7C"/>
                 </a:solidFill>
@@ -2732,7 +2517,7 @@
               </a:defRPr>
             </a:pPr>
             <a:r>
-              <a:rPr sz="1575" b="1" i="0">
+              <a:rPr sz="2100" b="1" i="0">
                 <a:solidFill>
                   <a:srgbClr val="254B7C"/>
                 </a:solidFill>
@@ -2747,21 +2532,21 @@
       </p:sp>
       <p:sp>
         <p:nvSpPr>
-          <p:cNvPr id="47" name="parallel-rule-3">
-            <a:extLst xmlns:a="http://schemas.openxmlformats.org/drawingml/2006/main">
-              <a:ext uri="{FF2B5EF4-FFF2-40B4-BE49-F238E27FC236}">
-                <a16:creationId xmlns:a16="http://schemas.microsoft.com/office/drawing/2014/main" id="{E0C0B441-6A7D-4DF4-86EA-77CA69377E1E}"/>
-              </a:ext>
-            </a:extLst>
-          </p:cNvPr>
-          <p:cNvSpPr>
-            <a:spLocks xmlns:a="http://schemas.openxmlformats.org/drawingml/2006/main" noGrp="1"/>
-          </p:cNvSpPr>
-          <p:nvPr/>
-        </p:nvSpPr>
-        <p:spPr>
-          <a:xfrm xmlns:a="http://schemas.openxmlformats.org/drawingml/2006/main" rot="0">
-            <a:off x="9889331" y="3657600"/>
+          <p:cNvPr id="35" name="parallel-rule-3">
+            <a:extLst xmlns:a="http://schemas.openxmlformats.org/drawingml/2006/main">
+              <a:ext uri="{FF2B5EF4-FFF2-40B4-BE49-F238E27FC236}">
+                <a16:creationId xmlns:a16="http://schemas.microsoft.com/office/drawing/2014/main" id="{637F4CD2-D98D-45AC-AF5A-AEBE028CCFBA}"/>
+              </a:ext>
+            </a:extLst>
+          </p:cNvPr>
+          <p:cNvSpPr>
+            <a:spLocks xmlns:a="http://schemas.openxmlformats.org/drawingml/2006/main" noGrp="1"/>
+          </p:cNvSpPr>
+          <p:nvPr/>
+        </p:nvSpPr>
+        <p:spPr>
+          <a:xfrm xmlns:a="http://schemas.openxmlformats.org/drawingml/2006/main" rot="0">
+            <a:off x="9889331" y="3956294"/>
             <a:ext cx="514350" cy="38100"/>
           </a:xfrm>
           <a:prstGeom xmlns:a="http://schemas.openxmlformats.org/drawingml/2006/main" prst="roundRect">
@@ -2780,22 +2565,22 @@
       </p:sp>
       <p:sp>
         <p:nvSpPr>
-          <p:cNvPr id="48" name="parallel-body-3">
-            <a:extLst xmlns:a="http://schemas.openxmlformats.org/drawingml/2006/main">
-              <a:ext uri="{FF2B5EF4-FFF2-40B4-BE49-F238E27FC236}">
-                <a16:creationId xmlns:a16="http://schemas.microsoft.com/office/drawing/2014/main" id="{CCCB57AB-8492-4116-9CF6-EF5A285556AF}"/>
-              </a:ext>
-            </a:extLst>
-          </p:cNvPr>
-          <p:cNvSpPr>
-            <a:spLocks xmlns:a="http://schemas.openxmlformats.org/drawingml/2006/main" noGrp="1"/>
-          </p:cNvSpPr>
-          <p:nvPr/>
-        </p:nvSpPr>
-        <p:spPr>
-          <a:xfrm xmlns:a="http://schemas.openxmlformats.org/drawingml/2006/main" rot="0">
-            <a:off x="9177338" y="3962400"/>
-            <a:ext cx="1938338" cy="1104900"/>
+          <p:cNvPr id="36" name="parallel-body-3">
+            <a:extLst xmlns:a="http://schemas.openxmlformats.org/drawingml/2006/main">
+              <a:ext uri="{FF2B5EF4-FFF2-40B4-BE49-F238E27FC236}">
+                <a16:creationId xmlns:a16="http://schemas.microsoft.com/office/drawing/2014/main" id="{2129B6F3-F7EA-42A3-91B2-BADD4FBE99E2}"/>
+              </a:ext>
+            </a:extLst>
+          </p:cNvPr>
+          <p:cNvSpPr>
+            <a:spLocks xmlns:a="http://schemas.openxmlformats.org/drawingml/2006/main" noGrp="1"/>
+          </p:cNvSpPr>
+          <p:nvPr/>
+        </p:nvSpPr>
+        <p:spPr>
+          <a:xfrm xmlns:a="http://schemas.openxmlformats.org/drawingml/2006/main" rot="0">
+            <a:off x="9139238" y="4127744"/>
+            <a:ext cx="2014538" cy="669427"/>
           </a:xfrm>
           <a:prstGeom xmlns:a="http://schemas.openxmlformats.org/drawingml/2006/main" prst="rect">
             <a:avLst/>
@@ -2807,13 +2592,17 @@
           </a:ln>
         </p:spPr>
         <p:txBody>
-          <a:bodyPr xmlns:a="http://schemas.openxmlformats.org/drawingml/2006/main" lIns="0" tIns="0" rIns="0" bIns="0" anchor="ctr">
+          <a:bodyPr xmlns:a="http://schemas.openxmlformats.org/drawingml/2006/main" wrap="square" lIns="0" tIns="0" rIns="0" bIns="0" anchor="ctr">
             <a:noAutofit/>
           </a:bodyPr>
           <a:lstStyle xmlns:a="http://schemas.openxmlformats.org/drawingml/2006/main"/>
           <a:p xmlns:a="http://schemas.openxmlformats.org/drawingml/2006/main">
             <a:pPr algn="ctr">
-              <a:defRPr sz="1425" b="0" i="0">
+              <a:lnSpc>
+                <a:spcPct val="155000"/>
+              </a:lnSpc>
+              <a:buNone/>
+              <a:defRPr sz="1700" b="0" i="0">
                 <a:solidFill>
                   <a:srgbClr val="46566A"/>
                 </a:solidFill>
@@ -2823,7 +2612,7 @@
               </a:defRPr>
             </a:pPr>
             <a:r>
-              <a:rPr sz="1425" b="0" i="0">
+              <a:rPr sz="1700" b="0" i="0">
                 <a:solidFill>
                   <a:srgbClr val="46566A"/>
                 </a:solidFill>
@@ -2831,7 +2620,34 @@
                 <a:ea typeface="Microsoft YaHei"/>
                 <a:cs typeface="Microsoft YaHei"/>
               </a:rPr>
-              <a:t>把明确方案稳定转化为可交付的结果</a:t>
+              <a:t>把明确方案稳定转化</a:t>
+            </a:r>
+          </a:p>
+          <a:p xmlns:a="http://schemas.openxmlformats.org/drawingml/2006/main">
+            <a:pPr algn="ctr">
+              <a:lnSpc>
+                <a:spcPct val="155000"/>
+              </a:lnSpc>
+              <a:buNone/>
+              <a:defRPr sz="1700" b="0" i="0">
+                <a:solidFill>
+                  <a:srgbClr val="46566A"/>
+                </a:solidFill>
+                <a:latin typeface="Microsoft YaHei"/>
+                <a:ea typeface="Microsoft YaHei"/>
+                <a:cs typeface="Microsoft YaHei"/>
+              </a:defRPr>
+            </a:pPr>
+            <a:r>
+              <a:rPr sz="1700" b="0" i="0">
+                <a:solidFill>
+                  <a:srgbClr val="46566A"/>
+                </a:solidFill>
+                <a:latin typeface="Microsoft YaHei"/>
+                <a:ea typeface="Microsoft YaHei"/>
+                <a:cs typeface="Microsoft YaHei"/>
+              </a:rPr>
+              <a:t>为可交付的结果</a:t>
             </a:r>
           </a:p>
         </p:txBody>
@@ -2839,7 +2655,7 @@
     </p:spTree>
     <p:extLst>
       <p:ext uri="{BB962C8B-B14F-4D97-AF65-F5344CB8AC3E}">
-        <p14:creationId xmlns:p14="http://schemas.microsoft.com/office/powerpoint/2010/main" val="1629410467"/>
+        <p14:creationId xmlns:p14="http://schemas.microsoft.com/office/powerpoint/2010/main" val="1102669557"/>
       </p:ext>
     </p:extLst>
   </p:cSld>
@@ -3047,6 +2863,24 @@
             </a:outerShdw>
           </a:effectLst>
         </a:effectStyle>
+        <a:effectStyle>
+          <a:effectLst>
+            <a:outerShdw blurRad="247650" dist="114300" dir="5400000">
+              <a:srgbClr val="1F487E">
+                <a:alpha val="12000"/>
+              </a:srgbClr>
+            </a:outerShdw>
+          </a:effectLst>
+        </a:effectStyle>
+        <a:effectStyle>
+          <a:effectLst>
+            <a:outerShdw blurRad="171450" dist="76200" dir="5400000">
+              <a:srgbClr val="2F5EA8">
+                <a:alpha val="24000"/>
+              </a:srgbClr>
+            </a:outerShdw>
+          </a:effectLst>
+        </a:effectStyle>
       </a:effectStyleLst>
       <a:bgFillStyleLst>
         <a:solidFill>

--- a/assets/结构图/等权并列卡片-001/example.pptx
+++ b/assets/结构图/等权并列卡片-001/example.pptx
@@ -2,13 +2,13 @@
 <file path=ppt/presentation.xml><?xml version="1.0" encoding="utf-8"?>
 <p:presentation xmlns:p="http://schemas.openxmlformats.org/presentationml/2006/main">
   <p:sldMasterIdLst>
-    <p:sldMasterId xmlns:r="http://schemas.openxmlformats.org/officeDocument/2006/relationships" id="2147483648" r:id="R065d53fb67ac45f3"/>
+    <p:sldMasterId xmlns:r="http://schemas.openxmlformats.org/officeDocument/2006/relationships" id="2147483648" r:id="Rb10ee6ffef3a4891"/>
   </p:sldMasterIdLst>
   <p:notesMasterIdLst>
-    <p:notesMasterId xmlns:r="http://schemas.openxmlformats.org/officeDocument/2006/relationships" r:id="R9b7ea4260f1946ed"/>
+    <p:notesMasterId xmlns:r="http://schemas.openxmlformats.org/officeDocument/2006/relationships" r:id="R0c44a4f31d5b4ac0"/>
   </p:notesMasterIdLst>
   <p:sldIdLst>
-    <p:sldId xmlns:r="http://schemas.openxmlformats.org/officeDocument/2006/relationships" id="256" r:id="R5c807773d9234439"/>
+    <p:sldId xmlns:r="http://schemas.openxmlformats.org/officeDocument/2006/relationships" id="256" r:id="R596b03cc362942f1"/>
   </p:sldIdLst>
   <p:sldSz cx="12192000" cy="6858000"/>
   <p:notesSz cx="6858000" cy="9144000"/>
@@ -524,7 +524,7 @@
   </p:cSld>
   <p:clrMap bg1="lt1" tx1="dk1" bg2="lt2" tx2="dk2" accent1="accent1" accent2="accent2" accent3="accent3" accent4="accent4" accent5="accent5" accent6="accent6" hlink="hlink" folHlink="folHlink"/>
   <p:sldLayoutIdLst>
-    <p:sldLayoutId xmlns:r="http://schemas.openxmlformats.org/officeDocument/2006/relationships" id="2147483649" r:id="Rb325eea0ef944269"/>
+    <p:sldLayoutId xmlns:r="http://schemas.openxmlformats.org/officeDocument/2006/relationships" id="2147483649" r:id="R1734e69a602a4b6a"/>
   </p:sldLayoutIdLst>
   <p:txStyles>
     <p:titleStyle>
@@ -1093,7 +1093,7 @@
           <p:cNvPr id="37" name="parallel-card-underlay-0">
             <a:extLst xmlns:a="http://schemas.openxmlformats.org/drawingml/2006/main">
               <a:ext uri="{FF2B5EF4-FFF2-40B4-BE49-F238E27FC236}">
-                <a16:creationId xmlns:a16="http://schemas.microsoft.com/office/drawing/2014/main" id="{DCD56AF2-8DF9-4821-83DB-488E7D0C852F}"/>
+                <a16:creationId xmlns:a16="http://schemas.microsoft.com/office/drawing/2014/main" id="{E2DEFCA3-E76A-4FC2-A748-771E73F94180}"/>
               </a:ext>
             </a:extLst>
           </p:cNvPr>
@@ -1128,7 +1128,7 @@
           <p:cNvPr id="2" name="parallel-card-surface-0">
             <a:extLst xmlns:a="http://schemas.openxmlformats.org/drawingml/2006/main">
               <a:ext uri="{FF2B5EF4-FFF2-40B4-BE49-F238E27FC236}">
-                <a16:creationId xmlns:a16="http://schemas.microsoft.com/office/drawing/2014/main" id="{995AB3FD-86FB-4187-84AF-268B4F25B4B6}"/>
+                <a16:creationId xmlns:a16="http://schemas.microsoft.com/office/drawing/2014/main" id="{9E535A36-7025-48BB-9A48-D7FF0992F1AF}"/>
               </a:ext>
             </a:extLst>
           </p:cNvPr>
@@ -1169,7 +1169,7 @@
           <p:cNvPr id="3" name="parallel-card-accent-0">
             <a:extLst xmlns:a="http://schemas.openxmlformats.org/drawingml/2006/main">
               <a:ext uri="{FF2B5EF4-FFF2-40B4-BE49-F238E27FC236}">
-                <a16:creationId xmlns:a16="http://schemas.microsoft.com/office/drawing/2014/main" id="{6873FEAA-7A3C-4CF5-B799-B00DB450736C}"/>
+                <a16:creationId xmlns:a16="http://schemas.microsoft.com/office/drawing/2014/main" id="{C232F7E6-ED98-44E0-B4F8-C2D6D9D388E8}"/>
               </a:ext>
             </a:extLst>
           </p:cNvPr>
@@ -1202,7 +1202,7 @@
           <p:cNvPr id="4" name="parallel-marker-halo-0">
             <a:extLst xmlns:a="http://schemas.openxmlformats.org/drawingml/2006/main">
               <a:ext uri="{FF2B5EF4-FFF2-40B4-BE49-F238E27FC236}">
-                <a16:creationId xmlns:a16="http://schemas.microsoft.com/office/drawing/2014/main" id="{A89E3D7C-9727-4E31-B2F7-6C0FF20AB29D}"/>
+                <a16:creationId xmlns:a16="http://schemas.microsoft.com/office/drawing/2014/main" id="{7534F736-1E7D-43B2-9E7F-63B458A81824}"/>
               </a:ext>
             </a:extLst>
           </p:cNvPr>
@@ -1235,7 +1235,7 @@
           <p:cNvPr id="5" name="parallel-marker-core-0">
             <a:extLst xmlns:a="http://schemas.openxmlformats.org/drawingml/2006/main">
               <a:ext uri="{FF2B5EF4-FFF2-40B4-BE49-F238E27FC236}">
-                <a16:creationId xmlns:a16="http://schemas.microsoft.com/office/drawing/2014/main" id="{74A61A25-9949-4083-83A6-EEE98DBB1CE4}"/>
+                <a16:creationId xmlns:a16="http://schemas.microsoft.com/office/drawing/2014/main" id="{C34965EF-A07A-4DAE-B82F-3F3E64169AC3}"/>
               </a:ext>
             </a:extLst>
           </p:cNvPr>
@@ -1276,10 +1276,10 @@
           <p:nvPr/>
         </p:nvPicPr>
         <p:blipFill>
-          <a:blip xmlns:r="http://schemas.openxmlformats.org/officeDocument/2006/relationships" xmlns:a="http://schemas.openxmlformats.org/drawingml/2006/main" r:embed="Ree74caf074c24747">
+          <a:blip xmlns:r="http://schemas.openxmlformats.org/officeDocument/2006/relationships" xmlns:a="http://schemas.openxmlformats.org/drawingml/2006/main" r:embed="Rf6786ce4211c487f">
             <a:extLst>
               <a:ext uri="{96DAC541-7B7A-43D3-8B79-37D633B846F1}">
-                <asvg:svgBlip xmlns:asvg="http://schemas.microsoft.com/office/drawing/2016/SVG/main" r:embed="R9144ba218e094b0d"/>
+                <asvg:svgBlip xmlns:asvg="http://schemas.microsoft.com/office/drawing/2016/SVG/main" r:embed="Rded10df445574cb6"/>
               </a:ext>
             </a:extLst>
           </a:blip>
@@ -1300,18 +1300,18 @@
           <p:cNvPr id="7" name="parallel-title-0">
             <a:extLst xmlns:a="http://schemas.openxmlformats.org/drawingml/2006/main">
               <a:ext uri="{FF2B5EF4-FFF2-40B4-BE49-F238E27FC236}">
-                <a16:creationId xmlns:a16="http://schemas.microsoft.com/office/drawing/2014/main" id="{A87828D4-00EE-4E6F-AAD8-22F0BD78796B}"/>
-              </a:ext>
-            </a:extLst>
-          </p:cNvPr>
-          <p:cNvSpPr>
-            <a:spLocks xmlns:a="http://schemas.openxmlformats.org/drawingml/2006/main" noGrp="1"/>
-          </p:cNvSpPr>
-          <p:nvPr/>
-        </p:nvSpPr>
-        <p:spPr>
-          <a:xfrm xmlns:a="http://schemas.openxmlformats.org/drawingml/2006/main" rot="0">
-            <a:off x="1038225" y="3489569"/>
+                <a16:creationId xmlns:a16="http://schemas.microsoft.com/office/drawing/2014/main" id="{A27D157C-A609-4985-B938-398A43769852}"/>
+              </a:ext>
+            </a:extLst>
+          </p:cNvPr>
+          <p:cNvSpPr>
+            <a:spLocks xmlns:a="http://schemas.openxmlformats.org/drawingml/2006/main" noGrp="1"/>
+          </p:cNvSpPr>
+          <p:nvPr/>
+        </p:nvSpPr>
+        <p:spPr>
+          <a:xfrm xmlns:a="http://schemas.openxmlformats.org/drawingml/2006/main" rot="0">
+            <a:off x="1038225" y="3214688"/>
             <a:ext cx="2014538" cy="333375"/>
           </a:xfrm>
           <a:prstGeom xmlns:a="http://schemas.openxmlformats.org/drawingml/2006/main" prst="rect">
@@ -1324,7 +1324,7 @@
           </a:ln>
         </p:spPr>
         <p:txBody>
-          <a:bodyPr xmlns:a="http://schemas.openxmlformats.org/drawingml/2006/main" wrap="square" lIns="0" tIns="0" rIns="0" bIns="0" anchor="ctr">
+          <a:bodyPr xmlns:a="http://schemas.openxmlformats.org/drawingml/2006/main" wrap="none" lIns="0" tIns="0" rIns="0" bIns="0" anchor="ctr">
             <a:noAutofit/>
           </a:bodyPr>
           <a:lstStyle xmlns:a="http://schemas.openxmlformats.org/drawingml/2006/main"/>
@@ -1362,18 +1362,18 @@
           <p:cNvPr id="8" name="parallel-rule-0">
             <a:extLst xmlns:a="http://schemas.openxmlformats.org/drawingml/2006/main">
               <a:ext uri="{FF2B5EF4-FFF2-40B4-BE49-F238E27FC236}">
-                <a16:creationId xmlns:a16="http://schemas.microsoft.com/office/drawing/2014/main" id="{71C3B70C-C65A-4DCD-9E74-8B026C254E0B}"/>
-              </a:ext>
-            </a:extLst>
-          </p:cNvPr>
-          <p:cNvSpPr>
-            <a:spLocks xmlns:a="http://schemas.openxmlformats.org/drawingml/2006/main" noGrp="1"/>
-          </p:cNvSpPr>
-          <p:nvPr/>
-        </p:nvSpPr>
-        <p:spPr>
-          <a:xfrm xmlns:a="http://schemas.openxmlformats.org/drawingml/2006/main" rot="0">
-            <a:off x="1788319" y="3956294"/>
+                <a16:creationId xmlns:a16="http://schemas.microsoft.com/office/drawing/2014/main" id="{687CA6D6-A122-44BE-82A7-AEF6D56B3823}"/>
+              </a:ext>
+            </a:extLst>
+          </p:cNvPr>
+          <p:cNvSpPr>
+            <a:spLocks xmlns:a="http://schemas.openxmlformats.org/drawingml/2006/main" noGrp="1"/>
+          </p:cNvSpPr>
+          <p:nvPr/>
+        </p:nvSpPr>
+        <p:spPr>
+          <a:xfrm xmlns:a="http://schemas.openxmlformats.org/drawingml/2006/main" rot="0">
+            <a:off x="1788319" y="3771900"/>
             <a:ext cx="514350" cy="38100"/>
           </a:xfrm>
           <a:prstGeom xmlns:a="http://schemas.openxmlformats.org/drawingml/2006/main" prst="roundRect">
@@ -1395,19 +1395,19 @@
           <p:cNvPr id="9" name="parallel-body-0">
             <a:extLst xmlns:a="http://schemas.openxmlformats.org/drawingml/2006/main">
               <a:ext uri="{FF2B5EF4-FFF2-40B4-BE49-F238E27FC236}">
-                <a16:creationId xmlns:a16="http://schemas.microsoft.com/office/drawing/2014/main" id="{17D54E66-F13A-4D97-8D2F-5CFEC4E12A8D}"/>
-              </a:ext>
-            </a:extLst>
-          </p:cNvPr>
-          <p:cNvSpPr>
-            <a:spLocks xmlns:a="http://schemas.openxmlformats.org/drawingml/2006/main" noGrp="1"/>
-          </p:cNvSpPr>
-          <p:nvPr/>
-        </p:nvSpPr>
-        <p:spPr>
-          <a:xfrm xmlns:a="http://schemas.openxmlformats.org/drawingml/2006/main" rot="0">
-            <a:off x="1038225" y="4127744"/>
-            <a:ext cx="2014538" cy="669427"/>
+                <a16:creationId xmlns:a16="http://schemas.microsoft.com/office/drawing/2014/main" id="{C1EB5658-87C1-4C39-8040-129DCE5BFE58}"/>
+              </a:ext>
+            </a:extLst>
+          </p:cNvPr>
+          <p:cNvSpPr>
+            <a:spLocks xmlns:a="http://schemas.openxmlformats.org/drawingml/2006/main" noGrp="1"/>
+          </p:cNvSpPr>
+          <p:nvPr/>
+        </p:nvSpPr>
+        <p:spPr>
+          <a:xfrm xmlns:a="http://schemas.openxmlformats.org/drawingml/2006/main" rot="0">
+            <a:off x="1038225" y="4238625"/>
+            <a:ext cx="2014538" cy="647700"/>
           </a:xfrm>
           <a:prstGeom xmlns:a="http://schemas.openxmlformats.org/drawingml/2006/main" prst="rect">
             <a:avLst/>
@@ -1426,7 +1426,7 @@
           <a:p xmlns:a="http://schemas.openxmlformats.org/drawingml/2006/main">
             <a:pPr algn="ctr">
               <a:lnSpc>
-                <a:spcPct val="155000"/>
+                <a:spcPct val="150000"/>
               </a:lnSpc>
               <a:buNone/>
               <a:defRPr sz="1700" b="0" i="0">
@@ -1453,7 +1453,7 @@
           <a:p xmlns:a="http://schemas.openxmlformats.org/drawingml/2006/main">
             <a:pPr algn="ctr">
               <a:lnSpc>
-                <a:spcPct val="155000"/>
+                <a:spcPct val="150000"/>
               </a:lnSpc>
               <a:buNone/>
               <a:defRPr sz="1700" b="0" i="0">
@@ -1484,7 +1484,7 @@
           <p:cNvPr id="10" name="parallel-card-underlay-1">
             <a:extLst xmlns:a="http://schemas.openxmlformats.org/drawingml/2006/main">
               <a:ext uri="{FF2B5EF4-FFF2-40B4-BE49-F238E27FC236}">
-                <a16:creationId xmlns:a16="http://schemas.microsoft.com/office/drawing/2014/main" id="{535D8097-5C52-4DFD-8FC9-DF9562D85373}"/>
+                <a16:creationId xmlns:a16="http://schemas.microsoft.com/office/drawing/2014/main" id="{698499D2-01BD-4E3D-B776-0F3042012B12}"/>
               </a:ext>
             </a:extLst>
           </p:cNvPr>
@@ -1519,7 +1519,7 @@
           <p:cNvPr id="11" name="parallel-card-surface-1">
             <a:extLst xmlns:a="http://schemas.openxmlformats.org/drawingml/2006/main">
               <a:ext uri="{FF2B5EF4-FFF2-40B4-BE49-F238E27FC236}">
-                <a16:creationId xmlns:a16="http://schemas.microsoft.com/office/drawing/2014/main" id="{D194674C-7338-478F-B175-E77570890F86}"/>
+                <a16:creationId xmlns:a16="http://schemas.microsoft.com/office/drawing/2014/main" id="{FE1615FC-7FFD-4D7F-AB81-A67296322293}"/>
               </a:ext>
             </a:extLst>
           </p:cNvPr>
@@ -1560,7 +1560,7 @@
           <p:cNvPr id="12" name="parallel-card-accent-1">
             <a:extLst xmlns:a="http://schemas.openxmlformats.org/drawingml/2006/main">
               <a:ext uri="{FF2B5EF4-FFF2-40B4-BE49-F238E27FC236}">
-                <a16:creationId xmlns:a16="http://schemas.microsoft.com/office/drawing/2014/main" id="{B8E229AA-8808-490B-91A0-2802DBF8F31F}"/>
+                <a16:creationId xmlns:a16="http://schemas.microsoft.com/office/drawing/2014/main" id="{B6C6DAE7-155E-42EE-B3FE-7A7B1330BE9A}"/>
               </a:ext>
             </a:extLst>
           </p:cNvPr>
@@ -1593,7 +1593,7 @@
           <p:cNvPr id="13" name="parallel-marker-halo-1">
             <a:extLst xmlns:a="http://schemas.openxmlformats.org/drawingml/2006/main">
               <a:ext uri="{FF2B5EF4-FFF2-40B4-BE49-F238E27FC236}">
-                <a16:creationId xmlns:a16="http://schemas.microsoft.com/office/drawing/2014/main" id="{BD94ACCF-8DBE-4CE2-8D49-8716A76CB374}"/>
+                <a16:creationId xmlns:a16="http://schemas.microsoft.com/office/drawing/2014/main" id="{90C95DA0-583E-4E91-85CC-52D73F890D71}"/>
               </a:ext>
             </a:extLst>
           </p:cNvPr>
@@ -1626,7 +1626,7 @@
           <p:cNvPr id="14" name="parallel-marker-core-1">
             <a:extLst xmlns:a="http://schemas.openxmlformats.org/drawingml/2006/main">
               <a:ext uri="{FF2B5EF4-FFF2-40B4-BE49-F238E27FC236}">
-                <a16:creationId xmlns:a16="http://schemas.microsoft.com/office/drawing/2014/main" id="{9B273BC6-AD24-4016-90BC-796F9ADB12C8}"/>
+                <a16:creationId xmlns:a16="http://schemas.microsoft.com/office/drawing/2014/main" id="{73709FE2-3D91-4DCA-B014-F062E6361974}"/>
               </a:ext>
             </a:extLst>
           </p:cNvPr>
@@ -1667,10 +1667,10 @@
           <p:nvPr/>
         </p:nvPicPr>
         <p:blipFill>
-          <a:blip xmlns:r="http://schemas.openxmlformats.org/officeDocument/2006/relationships" xmlns:a="http://schemas.openxmlformats.org/drawingml/2006/main" r:embed="R2f69c9ee7df54401">
+          <a:blip xmlns:r="http://schemas.openxmlformats.org/officeDocument/2006/relationships" xmlns:a="http://schemas.openxmlformats.org/drawingml/2006/main" r:embed="Rbe02ad2951de4a87">
             <a:extLst>
               <a:ext uri="{96DAC541-7B7A-43D3-8B79-37D633B846F1}">
-                <asvg:svgBlip xmlns:asvg="http://schemas.microsoft.com/office/drawing/2016/SVG/main" r:embed="R3ff09c57427f4f41"/>
+                <asvg:svgBlip xmlns:asvg="http://schemas.microsoft.com/office/drawing/2016/SVG/main" r:embed="Rb6b78103d1e64f26"/>
               </a:ext>
             </a:extLst>
           </a:blip>
@@ -1691,18 +1691,18 @@
           <p:cNvPr id="16" name="parallel-title-1">
             <a:extLst xmlns:a="http://schemas.openxmlformats.org/drawingml/2006/main">
               <a:ext uri="{FF2B5EF4-FFF2-40B4-BE49-F238E27FC236}">
-                <a16:creationId xmlns:a16="http://schemas.microsoft.com/office/drawing/2014/main" id="{7121E48F-5817-446C-9715-D5A9F805E242}"/>
-              </a:ext>
-            </a:extLst>
-          </p:cNvPr>
-          <p:cNvSpPr>
-            <a:spLocks xmlns:a="http://schemas.openxmlformats.org/drawingml/2006/main" noGrp="1"/>
-          </p:cNvSpPr>
-          <p:nvPr/>
-        </p:nvSpPr>
-        <p:spPr>
-          <a:xfrm xmlns:a="http://schemas.openxmlformats.org/drawingml/2006/main" rot="0">
-            <a:off x="3738563" y="3489569"/>
+                <a16:creationId xmlns:a16="http://schemas.microsoft.com/office/drawing/2014/main" id="{EB91ECFE-3DDF-4E5E-9FCD-3AD72E31AA63}"/>
+              </a:ext>
+            </a:extLst>
+          </p:cNvPr>
+          <p:cNvSpPr>
+            <a:spLocks xmlns:a="http://schemas.openxmlformats.org/drawingml/2006/main" noGrp="1"/>
+          </p:cNvSpPr>
+          <p:nvPr/>
+        </p:nvSpPr>
+        <p:spPr>
+          <a:xfrm xmlns:a="http://schemas.openxmlformats.org/drawingml/2006/main" rot="0">
+            <a:off x="3738563" y="3214688"/>
             <a:ext cx="2014538" cy="333375"/>
           </a:xfrm>
           <a:prstGeom xmlns:a="http://schemas.openxmlformats.org/drawingml/2006/main" prst="rect">
@@ -1715,7 +1715,7 @@
           </a:ln>
         </p:spPr>
         <p:txBody>
-          <a:bodyPr xmlns:a="http://schemas.openxmlformats.org/drawingml/2006/main" wrap="square" lIns="0" tIns="0" rIns="0" bIns="0" anchor="ctr">
+          <a:bodyPr xmlns:a="http://schemas.openxmlformats.org/drawingml/2006/main" wrap="none" lIns="0" tIns="0" rIns="0" bIns="0" anchor="ctr">
             <a:noAutofit/>
           </a:bodyPr>
           <a:lstStyle xmlns:a="http://schemas.openxmlformats.org/drawingml/2006/main"/>
@@ -1753,18 +1753,18 @@
           <p:cNvPr id="17" name="parallel-rule-1">
             <a:extLst xmlns:a="http://schemas.openxmlformats.org/drawingml/2006/main">
               <a:ext uri="{FF2B5EF4-FFF2-40B4-BE49-F238E27FC236}">
-                <a16:creationId xmlns:a16="http://schemas.microsoft.com/office/drawing/2014/main" id="{39369FAA-3F83-49F6-8555-0FACB62DAF24}"/>
-              </a:ext>
-            </a:extLst>
-          </p:cNvPr>
-          <p:cNvSpPr>
-            <a:spLocks xmlns:a="http://schemas.openxmlformats.org/drawingml/2006/main" noGrp="1"/>
-          </p:cNvSpPr>
-          <p:nvPr/>
-        </p:nvSpPr>
-        <p:spPr>
-          <a:xfrm xmlns:a="http://schemas.openxmlformats.org/drawingml/2006/main" rot="0">
-            <a:off x="4488656" y="3956294"/>
+                <a16:creationId xmlns:a16="http://schemas.microsoft.com/office/drawing/2014/main" id="{790BAE4A-0E95-4293-8725-41E2E29E4D1C}"/>
+              </a:ext>
+            </a:extLst>
+          </p:cNvPr>
+          <p:cNvSpPr>
+            <a:spLocks xmlns:a="http://schemas.openxmlformats.org/drawingml/2006/main" noGrp="1"/>
+          </p:cNvSpPr>
+          <p:nvPr/>
+        </p:nvSpPr>
+        <p:spPr>
+          <a:xfrm xmlns:a="http://schemas.openxmlformats.org/drawingml/2006/main" rot="0">
+            <a:off x="4488656" y="3771900"/>
             <a:ext cx="514350" cy="38100"/>
           </a:xfrm>
           <a:prstGeom xmlns:a="http://schemas.openxmlformats.org/drawingml/2006/main" prst="roundRect">
@@ -1786,19 +1786,19 @@
           <p:cNvPr id="18" name="parallel-body-1">
             <a:extLst xmlns:a="http://schemas.openxmlformats.org/drawingml/2006/main">
               <a:ext uri="{FF2B5EF4-FFF2-40B4-BE49-F238E27FC236}">
-                <a16:creationId xmlns:a16="http://schemas.microsoft.com/office/drawing/2014/main" id="{CAB7F5A5-FA27-4EC9-B3B6-A72F110906BA}"/>
-              </a:ext>
-            </a:extLst>
-          </p:cNvPr>
-          <p:cNvSpPr>
-            <a:spLocks xmlns:a="http://schemas.openxmlformats.org/drawingml/2006/main" noGrp="1"/>
-          </p:cNvSpPr>
-          <p:nvPr/>
-        </p:nvSpPr>
-        <p:spPr>
-          <a:xfrm xmlns:a="http://schemas.openxmlformats.org/drawingml/2006/main" rot="0">
-            <a:off x="3738563" y="4127744"/>
-            <a:ext cx="2014538" cy="669427"/>
+                <a16:creationId xmlns:a16="http://schemas.microsoft.com/office/drawing/2014/main" id="{6F78CE23-17FB-4336-8A7A-426EFA0E8A0A}"/>
+              </a:ext>
+            </a:extLst>
+          </p:cNvPr>
+          <p:cNvSpPr>
+            <a:spLocks xmlns:a="http://schemas.openxmlformats.org/drawingml/2006/main" noGrp="1"/>
+          </p:cNvSpPr>
+          <p:nvPr/>
+        </p:nvSpPr>
+        <p:spPr>
+          <a:xfrm xmlns:a="http://schemas.openxmlformats.org/drawingml/2006/main" rot="0">
+            <a:off x="3738563" y="4238625"/>
+            <a:ext cx="2014538" cy="647700"/>
           </a:xfrm>
           <a:prstGeom xmlns:a="http://schemas.openxmlformats.org/drawingml/2006/main" prst="rect">
             <a:avLst/>
@@ -1817,7 +1817,7 @@
           <a:p xmlns:a="http://schemas.openxmlformats.org/drawingml/2006/main">
             <a:pPr algn="ctr">
               <a:lnSpc>
-                <a:spcPct val="155000"/>
+                <a:spcPct val="150000"/>
               </a:lnSpc>
               <a:buNone/>
               <a:defRPr sz="1700" b="0" i="0">
@@ -1844,7 +1844,7 @@
           <a:p xmlns:a="http://schemas.openxmlformats.org/drawingml/2006/main">
             <a:pPr algn="ctr">
               <a:lnSpc>
-                <a:spcPct val="155000"/>
+                <a:spcPct val="150000"/>
               </a:lnSpc>
               <a:buNone/>
               <a:defRPr sz="1700" b="0" i="0">
@@ -1875,7 +1875,7 @@
           <p:cNvPr id="19" name="parallel-card-underlay-2">
             <a:extLst xmlns:a="http://schemas.openxmlformats.org/drawingml/2006/main">
               <a:ext uri="{FF2B5EF4-FFF2-40B4-BE49-F238E27FC236}">
-                <a16:creationId xmlns:a16="http://schemas.microsoft.com/office/drawing/2014/main" id="{77B2AAFF-7FC7-4A35-A606-F0C335591046}"/>
+                <a16:creationId xmlns:a16="http://schemas.microsoft.com/office/drawing/2014/main" id="{95AD90D0-0509-4FF0-BD97-1349D9117BEE}"/>
               </a:ext>
             </a:extLst>
           </p:cNvPr>
@@ -1910,7 +1910,7 @@
           <p:cNvPr id="20" name="parallel-card-surface-2">
             <a:extLst xmlns:a="http://schemas.openxmlformats.org/drawingml/2006/main">
               <a:ext uri="{FF2B5EF4-FFF2-40B4-BE49-F238E27FC236}">
-                <a16:creationId xmlns:a16="http://schemas.microsoft.com/office/drawing/2014/main" id="{46C3654F-1278-4184-A31C-407B6C3A984B}"/>
+                <a16:creationId xmlns:a16="http://schemas.microsoft.com/office/drawing/2014/main" id="{490CF566-040F-4EFB-BFBA-2F49CD85A91D}"/>
               </a:ext>
             </a:extLst>
           </p:cNvPr>
@@ -1951,7 +1951,7 @@
           <p:cNvPr id="21" name="parallel-card-accent-2">
             <a:extLst xmlns:a="http://schemas.openxmlformats.org/drawingml/2006/main">
               <a:ext uri="{FF2B5EF4-FFF2-40B4-BE49-F238E27FC236}">
-                <a16:creationId xmlns:a16="http://schemas.microsoft.com/office/drawing/2014/main" id="{A188FEFC-B48D-4C21-9A65-90353A4ACD61}"/>
+                <a16:creationId xmlns:a16="http://schemas.microsoft.com/office/drawing/2014/main" id="{EBA7227A-37C9-4707-AE70-904EF32533AA}"/>
               </a:ext>
             </a:extLst>
           </p:cNvPr>
@@ -1984,7 +1984,7 @@
           <p:cNvPr id="22" name="parallel-marker-halo-2">
             <a:extLst xmlns:a="http://schemas.openxmlformats.org/drawingml/2006/main">
               <a:ext uri="{FF2B5EF4-FFF2-40B4-BE49-F238E27FC236}">
-                <a16:creationId xmlns:a16="http://schemas.microsoft.com/office/drawing/2014/main" id="{B41BB570-FDAD-42B8-968C-84C1B6F9BED5}"/>
+                <a16:creationId xmlns:a16="http://schemas.microsoft.com/office/drawing/2014/main" id="{D30127E1-8439-46A3-A646-A0B928E2F54F}"/>
               </a:ext>
             </a:extLst>
           </p:cNvPr>
@@ -2017,7 +2017,7 @@
           <p:cNvPr id="23" name="parallel-marker-core-2">
             <a:extLst xmlns:a="http://schemas.openxmlformats.org/drawingml/2006/main">
               <a:ext uri="{FF2B5EF4-FFF2-40B4-BE49-F238E27FC236}">
-                <a16:creationId xmlns:a16="http://schemas.microsoft.com/office/drawing/2014/main" id="{47F10D69-54E7-43ED-A69B-B0C32882AC76}"/>
+                <a16:creationId xmlns:a16="http://schemas.microsoft.com/office/drawing/2014/main" id="{D6D188DE-4354-4BD9-AAD2-51649CB19E09}"/>
               </a:ext>
             </a:extLst>
           </p:cNvPr>
@@ -2058,10 +2058,10 @@
           <p:nvPr/>
         </p:nvPicPr>
         <p:blipFill>
-          <a:blip xmlns:r="http://schemas.openxmlformats.org/officeDocument/2006/relationships" xmlns:a="http://schemas.openxmlformats.org/drawingml/2006/main" r:embed="R9e7c624f57bb481b">
+          <a:blip xmlns:r="http://schemas.openxmlformats.org/officeDocument/2006/relationships" xmlns:a="http://schemas.openxmlformats.org/drawingml/2006/main" r:embed="Rb360e55580184a7c">
             <a:extLst>
               <a:ext uri="{96DAC541-7B7A-43D3-8B79-37D633B846F1}">
-                <asvg:svgBlip xmlns:asvg="http://schemas.microsoft.com/office/drawing/2016/SVG/main" r:embed="R3317043aad7d4b0e"/>
+                <asvg:svgBlip xmlns:asvg="http://schemas.microsoft.com/office/drawing/2016/SVG/main" r:embed="R0add1f8aad114d74"/>
               </a:ext>
             </a:extLst>
           </a:blip>
@@ -2082,18 +2082,18 @@
           <p:cNvPr id="25" name="parallel-title-2">
             <a:extLst xmlns:a="http://schemas.openxmlformats.org/drawingml/2006/main">
               <a:ext uri="{FF2B5EF4-FFF2-40B4-BE49-F238E27FC236}">
-                <a16:creationId xmlns:a16="http://schemas.microsoft.com/office/drawing/2014/main" id="{8BDC0197-A22B-4DE3-843F-0EA102AA36C6}"/>
-              </a:ext>
-            </a:extLst>
-          </p:cNvPr>
-          <p:cNvSpPr>
-            <a:spLocks xmlns:a="http://schemas.openxmlformats.org/drawingml/2006/main" noGrp="1"/>
-          </p:cNvSpPr>
-          <p:nvPr/>
-        </p:nvSpPr>
-        <p:spPr>
-          <a:xfrm xmlns:a="http://schemas.openxmlformats.org/drawingml/2006/main" rot="0">
-            <a:off x="6438900" y="3489569"/>
+                <a16:creationId xmlns:a16="http://schemas.microsoft.com/office/drawing/2014/main" id="{22D86861-F5C7-4BF3-9AD8-EB2D0B12BB9B}"/>
+              </a:ext>
+            </a:extLst>
+          </p:cNvPr>
+          <p:cNvSpPr>
+            <a:spLocks xmlns:a="http://schemas.openxmlformats.org/drawingml/2006/main" noGrp="1"/>
+          </p:cNvSpPr>
+          <p:nvPr/>
+        </p:nvSpPr>
+        <p:spPr>
+          <a:xfrm xmlns:a="http://schemas.openxmlformats.org/drawingml/2006/main" rot="0">
+            <a:off x="6438900" y="3214688"/>
             <a:ext cx="2014538" cy="333375"/>
           </a:xfrm>
           <a:prstGeom xmlns:a="http://schemas.openxmlformats.org/drawingml/2006/main" prst="rect">
@@ -2106,7 +2106,7 @@
           </a:ln>
         </p:spPr>
         <p:txBody>
-          <a:bodyPr xmlns:a="http://schemas.openxmlformats.org/drawingml/2006/main" wrap="square" lIns="0" tIns="0" rIns="0" bIns="0" anchor="ctr">
+          <a:bodyPr xmlns:a="http://schemas.openxmlformats.org/drawingml/2006/main" wrap="none" lIns="0" tIns="0" rIns="0" bIns="0" anchor="ctr">
             <a:noAutofit/>
           </a:bodyPr>
           <a:lstStyle xmlns:a="http://schemas.openxmlformats.org/drawingml/2006/main"/>
@@ -2144,18 +2144,18 @@
           <p:cNvPr id="26" name="parallel-rule-2">
             <a:extLst xmlns:a="http://schemas.openxmlformats.org/drawingml/2006/main">
               <a:ext uri="{FF2B5EF4-FFF2-40B4-BE49-F238E27FC236}">
-                <a16:creationId xmlns:a16="http://schemas.microsoft.com/office/drawing/2014/main" id="{A90BA6DF-1B4B-425E-A3B5-FE69A17D92A1}"/>
-              </a:ext>
-            </a:extLst>
-          </p:cNvPr>
-          <p:cNvSpPr>
-            <a:spLocks xmlns:a="http://schemas.openxmlformats.org/drawingml/2006/main" noGrp="1"/>
-          </p:cNvSpPr>
-          <p:nvPr/>
-        </p:nvSpPr>
-        <p:spPr>
-          <a:xfrm xmlns:a="http://schemas.openxmlformats.org/drawingml/2006/main" rot="0">
-            <a:off x="7188994" y="3956294"/>
+                <a16:creationId xmlns:a16="http://schemas.microsoft.com/office/drawing/2014/main" id="{FC223BDE-183F-4A83-B706-E220C3EEEBAB}"/>
+              </a:ext>
+            </a:extLst>
+          </p:cNvPr>
+          <p:cNvSpPr>
+            <a:spLocks xmlns:a="http://schemas.openxmlformats.org/drawingml/2006/main" noGrp="1"/>
+          </p:cNvSpPr>
+          <p:nvPr/>
+        </p:nvSpPr>
+        <p:spPr>
+          <a:xfrm xmlns:a="http://schemas.openxmlformats.org/drawingml/2006/main" rot="0">
+            <a:off x="7188994" y="3771900"/>
             <a:ext cx="514350" cy="38100"/>
           </a:xfrm>
           <a:prstGeom xmlns:a="http://schemas.openxmlformats.org/drawingml/2006/main" prst="roundRect">
@@ -2177,19 +2177,19 @@
           <p:cNvPr id="27" name="parallel-body-2">
             <a:extLst xmlns:a="http://schemas.openxmlformats.org/drawingml/2006/main">
               <a:ext uri="{FF2B5EF4-FFF2-40B4-BE49-F238E27FC236}">
-                <a16:creationId xmlns:a16="http://schemas.microsoft.com/office/drawing/2014/main" id="{1E8C39B2-6DB1-43B2-9AC6-858979A0ABF2}"/>
-              </a:ext>
-            </a:extLst>
-          </p:cNvPr>
-          <p:cNvSpPr>
-            <a:spLocks xmlns:a="http://schemas.openxmlformats.org/drawingml/2006/main" noGrp="1"/>
-          </p:cNvSpPr>
-          <p:nvPr/>
-        </p:nvSpPr>
-        <p:spPr>
-          <a:xfrm xmlns:a="http://schemas.openxmlformats.org/drawingml/2006/main" rot="0">
-            <a:off x="6438900" y="4127744"/>
-            <a:ext cx="2014538" cy="669427"/>
+                <a16:creationId xmlns:a16="http://schemas.microsoft.com/office/drawing/2014/main" id="{E91E4137-E862-453A-8D9F-891A6DB870E0}"/>
+              </a:ext>
+            </a:extLst>
+          </p:cNvPr>
+          <p:cNvSpPr>
+            <a:spLocks xmlns:a="http://schemas.openxmlformats.org/drawingml/2006/main" noGrp="1"/>
+          </p:cNvSpPr>
+          <p:nvPr/>
+        </p:nvSpPr>
+        <p:spPr>
+          <a:xfrm xmlns:a="http://schemas.openxmlformats.org/drawingml/2006/main" rot="0">
+            <a:off x="6438900" y="4238625"/>
+            <a:ext cx="2014538" cy="647700"/>
           </a:xfrm>
           <a:prstGeom xmlns:a="http://schemas.openxmlformats.org/drawingml/2006/main" prst="rect">
             <a:avLst/>
@@ -2208,7 +2208,7 @@
           <a:p xmlns:a="http://schemas.openxmlformats.org/drawingml/2006/main">
             <a:pPr algn="ctr">
               <a:lnSpc>
-                <a:spcPct val="155000"/>
+                <a:spcPct val="150000"/>
               </a:lnSpc>
               <a:buNone/>
               <a:defRPr sz="1700" b="0" i="0">
@@ -2235,7 +2235,7 @@
           <a:p xmlns:a="http://schemas.openxmlformats.org/drawingml/2006/main">
             <a:pPr algn="ctr">
               <a:lnSpc>
-                <a:spcPct val="155000"/>
+                <a:spcPct val="150000"/>
               </a:lnSpc>
               <a:buNone/>
               <a:defRPr sz="1700" b="0" i="0">
@@ -2266,7 +2266,7 @@
           <p:cNvPr id="28" name="parallel-card-underlay-3">
             <a:extLst xmlns:a="http://schemas.openxmlformats.org/drawingml/2006/main">
               <a:ext uri="{FF2B5EF4-FFF2-40B4-BE49-F238E27FC236}">
-                <a16:creationId xmlns:a16="http://schemas.microsoft.com/office/drawing/2014/main" id="{6B9D9073-C0A7-4C7F-9AF9-418969455DA6}"/>
+                <a16:creationId xmlns:a16="http://schemas.microsoft.com/office/drawing/2014/main" id="{3DBA649B-0AF0-4530-BBCF-240DF75B8C95}"/>
               </a:ext>
             </a:extLst>
           </p:cNvPr>
@@ -2301,7 +2301,7 @@
           <p:cNvPr id="29" name="parallel-card-surface-3">
             <a:extLst xmlns:a="http://schemas.openxmlformats.org/drawingml/2006/main">
               <a:ext uri="{FF2B5EF4-FFF2-40B4-BE49-F238E27FC236}">
-                <a16:creationId xmlns:a16="http://schemas.microsoft.com/office/drawing/2014/main" id="{1C22E1A0-D567-453E-9786-157832D05C1B}"/>
+                <a16:creationId xmlns:a16="http://schemas.microsoft.com/office/drawing/2014/main" id="{7CB049FA-96FC-4937-B586-B93D84A48F78}"/>
               </a:ext>
             </a:extLst>
           </p:cNvPr>
@@ -2342,7 +2342,7 @@
           <p:cNvPr id="30" name="parallel-card-accent-3">
             <a:extLst xmlns:a="http://schemas.openxmlformats.org/drawingml/2006/main">
               <a:ext uri="{FF2B5EF4-FFF2-40B4-BE49-F238E27FC236}">
-                <a16:creationId xmlns:a16="http://schemas.microsoft.com/office/drawing/2014/main" id="{E0C39EB5-3D3E-4C1D-8C50-60F5F5E7517D}"/>
+                <a16:creationId xmlns:a16="http://schemas.microsoft.com/office/drawing/2014/main" id="{4D402AE3-CF29-4AF3-A4C7-82339019ACC0}"/>
               </a:ext>
             </a:extLst>
           </p:cNvPr>
@@ -2375,7 +2375,7 @@
           <p:cNvPr id="31" name="parallel-marker-halo-3">
             <a:extLst xmlns:a="http://schemas.openxmlformats.org/drawingml/2006/main">
               <a:ext uri="{FF2B5EF4-FFF2-40B4-BE49-F238E27FC236}">
-                <a16:creationId xmlns:a16="http://schemas.microsoft.com/office/drawing/2014/main" id="{D6E5DCDC-BA44-41C9-8733-6F40D59038C8}"/>
+                <a16:creationId xmlns:a16="http://schemas.microsoft.com/office/drawing/2014/main" id="{94DFB673-2E75-4FC0-9B77-9BDE296C3598}"/>
               </a:ext>
             </a:extLst>
           </p:cNvPr>
@@ -2408,7 +2408,7 @@
           <p:cNvPr id="32" name="parallel-marker-core-3">
             <a:extLst xmlns:a="http://schemas.openxmlformats.org/drawingml/2006/main">
               <a:ext uri="{FF2B5EF4-FFF2-40B4-BE49-F238E27FC236}">
-                <a16:creationId xmlns:a16="http://schemas.microsoft.com/office/drawing/2014/main" id="{D8EF22C8-B531-4BBE-93A4-2B1ADDB7FE22}"/>
+                <a16:creationId xmlns:a16="http://schemas.microsoft.com/office/drawing/2014/main" id="{98F638FC-01A8-49EE-B7E2-F04E80E5A197}"/>
               </a:ext>
             </a:extLst>
           </p:cNvPr>
@@ -2449,10 +2449,10 @@
           <p:nvPr/>
         </p:nvPicPr>
         <p:blipFill>
-          <a:blip xmlns:r="http://schemas.openxmlformats.org/officeDocument/2006/relationships" xmlns:a="http://schemas.openxmlformats.org/drawingml/2006/main" r:embed="Rcd7465fe1f014511">
+          <a:blip xmlns:r="http://schemas.openxmlformats.org/officeDocument/2006/relationships" xmlns:a="http://schemas.openxmlformats.org/drawingml/2006/main" r:embed="R60fdc35ceed941fa">
             <a:extLst>
               <a:ext uri="{96DAC541-7B7A-43D3-8B79-37D633B846F1}">
-                <asvg:svgBlip xmlns:asvg="http://schemas.microsoft.com/office/drawing/2016/SVG/main" r:embed="R853e6bde174d4267"/>
+                <asvg:svgBlip xmlns:asvg="http://schemas.microsoft.com/office/drawing/2016/SVG/main" r:embed="R4b4fa45abfa94f7f"/>
               </a:ext>
             </a:extLst>
           </a:blip>
@@ -2473,18 +2473,18 @@
           <p:cNvPr id="34" name="parallel-title-3">
             <a:extLst xmlns:a="http://schemas.openxmlformats.org/drawingml/2006/main">
               <a:ext uri="{FF2B5EF4-FFF2-40B4-BE49-F238E27FC236}">
-                <a16:creationId xmlns:a16="http://schemas.microsoft.com/office/drawing/2014/main" id="{1C7EC433-D1BF-4FE4-9866-0084C6D03364}"/>
-              </a:ext>
-            </a:extLst>
-          </p:cNvPr>
-          <p:cNvSpPr>
-            <a:spLocks xmlns:a="http://schemas.openxmlformats.org/drawingml/2006/main" noGrp="1"/>
-          </p:cNvSpPr>
-          <p:nvPr/>
-        </p:nvSpPr>
-        <p:spPr>
-          <a:xfrm xmlns:a="http://schemas.openxmlformats.org/drawingml/2006/main" rot="0">
-            <a:off x="9139238" y="3489569"/>
+                <a16:creationId xmlns:a16="http://schemas.microsoft.com/office/drawing/2014/main" id="{C463C5DE-791F-4CC5-A454-5F0CFB48DB00}"/>
+              </a:ext>
+            </a:extLst>
+          </p:cNvPr>
+          <p:cNvSpPr>
+            <a:spLocks xmlns:a="http://schemas.openxmlformats.org/drawingml/2006/main" noGrp="1"/>
+          </p:cNvSpPr>
+          <p:nvPr/>
+        </p:nvSpPr>
+        <p:spPr>
+          <a:xfrm xmlns:a="http://schemas.openxmlformats.org/drawingml/2006/main" rot="0">
+            <a:off x="9139238" y="3214688"/>
             <a:ext cx="2014538" cy="333375"/>
           </a:xfrm>
           <a:prstGeom xmlns:a="http://schemas.openxmlformats.org/drawingml/2006/main" prst="rect">
@@ -2497,7 +2497,7 @@
           </a:ln>
         </p:spPr>
         <p:txBody>
-          <a:bodyPr xmlns:a="http://schemas.openxmlformats.org/drawingml/2006/main" wrap="square" lIns="0" tIns="0" rIns="0" bIns="0" anchor="ctr">
+          <a:bodyPr xmlns:a="http://schemas.openxmlformats.org/drawingml/2006/main" wrap="none" lIns="0" tIns="0" rIns="0" bIns="0" anchor="ctr">
             <a:noAutofit/>
           </a:bodyPr>
           <a:lstStyle xmlns:a="http://schemas.openxmlformats.org/drawingml/2006/main"/>
@@ -2535,18 +2535,18 @@
           <p:cNvPr id="35" name="parallel-rule-3">
             <a:extLst xmlns:a="http://schemas.openxmlformats.org/drawingml/2006/main">
               <a:ext uri="{FF2B5EF4-FFF2-40B4-BE49-F238E27FC236}">
-                <a16:creationId xmlns:a16="http://schemas.microsoft.com/office/drawing/2014/main" id="{637F4CD2-D98D-45AC-AF5A-AEBE028CCFBA}"/>
-              </a:ext>
-            </a:extLst>
-          </p:cNvPr>
-          <p:cNvSpPr>
-            <a:spLocks xmlns:a="http://schemas.openxmlformats.org/drawingml/2006/main" noGrp="1"/>
-          </p:cNvSpPr>
-          <p:nvPr/>
-        </p:nvSpPr>
-        <p:spPr>
-          <a:xfrm xmlns:a="http://schemas.openxmlformats.org/drawingml/2006/main" rot="0">
-            <a:off x="9889331" y="3956294"/>
+                <a16:creationId xmlns:a16="http://schemas.microsoft.com/office/drawing/2014/main" id="{1ACC6ED0-367B-45E7-9FC2-5C1209E860F0}"/>
+              </a:ext>
+            </a:extLst>
+          </p:cNvPr>
+          <p:cNvSpPr>
+            <a:spLocks xmlns:a="http://schemas.openxmlformats.org/drawingml/2006/main" noGrp="1"/>
+          </p:cNvSpPr>
+          <p:nvPr/>
+        </p:nvSpPr>
+        <p:spPr>
+          <a:xfrm xmlns:a="http://schemas.openxmlformats.org/drawingml/2006/main" rot="0">
+            <a:off x="9889331" y="3771900"/>
             <a:ext cx="514350" cy="38100"/>
           </a:xfrm>
           <a:prstGeom xmlns:a="http://schemas.openxmlformats.org/drawingml/2006/main" prst="roundRect">
@@ -2568,19 +2568,19 @@
           <p:cNvPr id="36" name="parallel-body-3">
             <a:extLst xmlns:a="http://schemas.openxmlformats.org/drawingml/2006/main">
               <a:ext uri="{FF2B5EF4-FFF2-40B4-BE49-F238E27FC236}">
-                <a16:creationId xmlns:a16="http://schemas.microsoft.com/office/drawing/2014/main" id="{2129B6F3-F7EA-42A3-91B2-BADD4FBE99E2}"/>
-              </a:ext>
-            </a:extLst>
-          </p:cNvPr>
-          <p:cNvSpPr>
-            <a:spLocks xmlns:a="http://schemas.openxmlformats.org/drawingml/2006/main" noGrp="1"/>
-          </p:cNvSpPr>
-          <p:nvPr/>
-        </p:nvSpPr>
-        <p:spPr>
-          <a:xfrm xmlns:a="http://schemas.openxmlformats.org/drawingml/2006/main" rot="0">
-            <a:off x="9139238" y="4127744"/>
-            <a:ext cx="2014538" cy="669427"/>
+                <a16:creationId xmlns:a16="http://schemas.microsoft.com/office/drawing/2014/main" id="{0D39EEFA-C084-4DE2-BFF7-A13E545FD42B}"/>
+              </a:ext>
+            </a:extLst>
+          </p:cNvPr>
+          <p:cNvSpPr>
+            <a:spLocks xmlns:a="http://schemas.openxmlformats.org/drawingml/2006/main" noGrp="1"/>
+          </p:cNvSpPr>
+          <p:nvPr/>
+        </p:nvSpPr>
+        <p:spPr>
+          <a:xfrm xmlns:a="http://schemas.openxmlformats.org/drawingml/2006/main" rot="0">
+            <a:off x="9139238" y="4238625"/>
+            <a:ext cx="2014538" cy="647700"/>
           </a:xfrm>
           <a:prstGeom xmlns:a="http://schemas.openxmlformats.org/drawingml/2006/main" prst="rect">
             <a:avLst/>
@@ -2599,7 +2599,7 @@
           <a:p xmlns:a="http://schemas.openxmlformats.org/drawingml/2006/main">
             <a:pPr algn="ctr">
               <a:lnSpc>
-                <a:spcPct val="155000"/>
+                <a:spcPct val="150000"/>
               </a:lnSpc>
               <a:buNone/>
               <a:defRPr sz="1700" b="0" i="0">
@@ -2626,7 +2626,7 @@
           <a:p xmlns:a="http://schemas.openxmlformats.org/drawingml/2006/main">
             <a:pPr algn="ctr">
               <a:lnSpc>
-                <a:spcPct val="155000"/>
+                <a:spcPct val="150000"/>
               </a:lnSpc>
               <a:buNone/>
               <a:defRPr sz="1700" b="0" i="0">
@@ -2655,7 +2655,7 @@
     </p:spTree>
     <p:extLst>
       <p:ext uri="{BB962C8B-B14F-4D97-AF65-F5344CB8AC3E}">
-        <p14:creationId xmlns:p14="http://schemas.microsoft.com/office/powerpoint/2010/main" val="1102669557"/>
+        <p14:creationId xmlns:p14="http://schemas.microsoft.com/office/powerpoint/2010/main" val="966794721"/>
       </p:ext>
     </p:extLst>
   </p:cSld>

--- a/assets/结构图/等权并列卡片-001/example.pptx
+++ b/assets/结构图/等权并列卡片-001/example.pptx
@@ -2,13 +2,13 @@
 <file path=ppt/presentation.xml><?xml version="1.0" encoding="utf-8"?>
 <p:presentation xmlns:p="http://schemas.openxmlformats.org/presentationml/2006/main">
   <p:sldMasterIdLst>
-    <p:sldMasterId xmlns:r="http://schemas.openxmlformats.org/officeDocument/2006/relationships" id="2147483648" r:id="Rb10ee6ffef3a4891"/>
+    <p:sldMasterId xmlns:r="http://schemas.openxmlformats.org/officeDocument/2006/relationships" id="2147483648" r:id="Rd691ac4c61bc4880"/>
   </p:sldMasterIdLst>
   <p:notesMasterIdLst>
-    <p:notesMasterId xmlns:r="http://schemas.openxmlformats.org/officeDocument/2006/relationships" r:id="R0c44a4f31d5b4ac0"/>
+    <p:notesMasterId xmlns:r="http://schemas.openxmlformats.org/officeDocument/2006/relationships" r:id="R4e5f93dfe8ff4407"/>
   </p:notesMasterIdLst>
   <p:sldIdLst>
-    <p:sldId xmlns:r="http://schemas.openxmlformats.org/officeDocument/2006/relationships" id="256" r:id="R596b03cc362942f1"/>
+    <p:sldId xmlns:r="http://schemas.openxmlformats.org/officeDocument/2006/relationships" id="256" r:id="Rb7a751855a9645dc"/>
   </p:sldIdLst>
   <p:sldSz cx="12192000" cy="6858000"/>
   <p:notesSz cx="6858000" cy="9144000"/>
@@ -524,7 +524,7 @@
   </p:cSld>
   <p:clrMap bg1="lt1" tx1="dk1" bg2="lt2" tx2="dk2" accent1="accent1" accent2="accent2" accent3="accent3" accent4="accent4" accent5="accent5" accent6="accent6" hlink="hlink" folHlink="folHlink"/>
   <p:sldLayoutIdLst>
-    <p:sldLayoutId xmlns:r="http://schemas.openxmlformats.org/officeDocument/2006/relationships" id="2147483649" r:id="R1734e69a602a4b6a"/>
+    <p:sldLayoutId xmlns:r="http://schemas.openxmlformats.org/officeDocument/2006/relationships" id="2147483649" r:id="R2220ff5a1c8e4e72"/>
   </p:sldLayoutIdLst>
   <p:txStyles>
     <p:titleStyle>
@@ -1090,10 +1090,10 @@
       </p:grpSpPr>
       <p:sp>
         <p:nvSpPr>
-          <p:cNvPr id="37" name="parallel-card-underlay-0">
+          <p:cNvPr id="19" name="parallel-card-underlay-0">
             <a:extLst xmlns:a="http://schemas.openxmlformats.org/drawingml/2006/main">
               <a:ext uri="{FF2B5EF4-FFF2-40B4-BE49-F238E27FC236}">
-                <a16:creationId xmlns:a16="http://schemas.microsoft.com/office/drawing/2014/main" id="{E2DEFCA3-E76A-4FC2-A748-771E73F94180}"/>
+                <a16:creationId xmlns:a16="http://schemas.microsoft.com/office/drawing/2014/main" id="{7BF00F34-08FD-4DB1-BF1D-06F6002D321C}"/>
               </a:ext>
             </a:extLst>
           </p:cNvPr>
@@ -1104,12 +1104,12 @@
         </p:nvSpPr>
         <p:spPr>
           <a:xfrm xmlns:a="http://schemas.openxmlformats.org/drawingml/2006/main" rot="0">
-            <a:off x="885825" y="2514600"/>
-            <a:ext cx="2319338" cy="3352800"/>
+            <a:off x="2486025" y="2514600"/>
+            <a:ext cx="3276600" cy="3352800"/>
           </a:xfrm>
           <a:prstGeom xmlns:a="http://schemas.openxmlformats.org/drawingml/2006/main" prst="roundRect">
             <a:avLst>
-              <a:gd name="adj" fmla="val 10678"/>
+              <a:gd name="adj" fmla="val 7558"/>
             </a:avLst>
           </a:prstGeom>
           <a:solidFill xmlns:a="http://schemas.openxmlformats.org/drawingml/2006/main">
@@ -1128,7 +1128,7 @@
           <p:cNvPr id="2" name="parallel-card-surface-0">
             <a:extLst xmlns:a="http://schemas.openxmlformats.org/drawingml/2006/main">
               <a:ext uri="{FF2B5EF4-FFF2-40B4-BE49-F238E27FC236}">
-                <a16:creationId xmlns:a16="http://schemas.microsoft.com/office/drawing/2014/main" id="{9E535A36-7025-48BB-9A48-D7FF0992F1AF}"/>
+                <a16:creationId xmlns:a16="http://schemas.microsoft.com/office/drawing/2014/main" id="{015019C3-1226-475C-A761-762F31631FA8}"/>
               </a:ext>
             </a:extLst>
           </p:cNvPr>
@@ -1139,12 +1139,12 @@
         </p:nvSpPr>
         <p:spPr>
           <a:xfrm xmlns:a="http://schemas.openxmlformats.org/drawingml/2006/main" rot="0">
-            <a:off x="809625" y="2419350"/>
-            <a:ext cx="2471738" cy="3352800"/>
+            <a:off x="2409825" y="2419350"/>
+            <a:ext cx="3429000" cy="3352800"/>
           </a:xfrm>
           <a:prstGeom xmlns:a="http://schemas.openxmlformats.org/drawingml/2006/main" prst="roundRect">
             <a:avLst>
-              <a:gd name="adj" fmla="val 10019"/>
+              <a:gd name="adj" fmla="val 7386"/>
             </a:avLst>
           </a:prstGeom>
           <a:solidFill xmlns:a="http://schemas.openxmlformats.org/drawingml/2006/main">
@@ -1169,7 +1169,7 @@
           <p:cNvPr id="3" name="parallel-card-accent-0">
             <a:extLst xmlns:a="http://schemas.openxmlformats.org/drawingml/2006/main">
               <a:ext uri="{FF2B5EF4-FFF2-40B4-BE49-F238E27FC236}">
-                <a16:creationId xmlns:a16="http://schemas.microsoft.com/office/drawing/2014/main" id="{C232F7E6-ED98-44E0-B4F8-C2D6D9D388E8}"/>
+                <a16:creationId xmlns:a16="http://schemas.microsoft.com/office/drawing/2014/main" id="{AF61B74C-2C9C-4239-9970-7F5060E40638}"/>
               </a:ext>
             </a:extLst>
           </p:cNvPr>
@@ -1180,7 +1180,7 @@
         </p:nvSpPr>
         <p:spPr>
           <a:xfrm xmlns:a="http://schemas.openxmlformats.org/drawingml/2006/main" rot="0">
-            <a:off x="1654969" y="2419350"/>
+            <a:off x="3733800" y="2419350"/>
             <a:ext cx="781050" cy="76200"/>
           </a:xfrm>
           <a:prstGeom xmlns:a="http://schemas.openxmlformats.org/drawingml/2006/main" prst="roundRect">
@@ -1202,7 +1202,7 @@
           <p:cNvPr id="4" name="parallel-marker-halo-0">
             <a:extLst xmlns:a="http://schemas.openxmlformats.org/drawingml/2006/main">
               <a:ext uri="{FF2B5EF4-FFF2-40B4-BE49-F238E27FC236}">
-                <a16:creationId xmlns:a16="http://schemas.microsoft.com/office/drawing/2014/main" id="{7534F736-1E7D-43B2-9E7F-63B458A81824}"/>
+                <a16:creationId xmlns:a16="http://schemas.microsoft.com/office/drawing/2014/main" id="{CC8C0D65-2BF0-47FB-97DF-E0CC2D02E867}"/>
               </a:ext>
             </a:extLst>
           </p:cNvPr>
@@ -1213,7 +1213,7 @@
         </p:nvSpPr>
         <p:spPr>
           <a:xfrm xmlns:a="http://schemas.openxmlformats.org/drawingml/2006/main" rot="0">
-            <a:off x="1588294" y="1962150"/>
+            <a:off x="3667125" y="1962150"/>
             <a:ext cx="914400" cy="914400"/>
           </a:xfrm>
           <a:prstGeom xmlns:a="http://schemas.openxmlformats.org/drawingml/2006/main" prst="ellipse">
@@ -1235,7 +1235,7 @@
           <p:cNvPr id="5" name="parallel-marker-core-0">
             <a:extLst xmlns:a="http://schemas.openxmlformats.org/drawingml/2006/main">
               <a:ext uri="{FF2B5EF4-FFF2-40B4-BE49-F238E27FC236}">
-                <a16:creationId xmlns:a16="http://schemas.microsoft.com/office/drawing/2014/main" id="{C34965EF-A07A-4DAE-B82F-3F3E64169AC3}"/>
+                <a16:creationId xmlns:a16="http://schemas.microsoft.com/office/drawing/2014/main" id="{A5189D76-94D1-46E5-9606-A869D6DB5676}"/>
               </a:ext>
             </a:extLst>
           </p:cNvPr>
@@ -1246,7 +1246,7 @@
         </p:nvSpPr>
         <p:spPr>
           <a:xfrm xmlns:a="http://schemas.openxmlformats.org/drawingml/2006/main" rot="0">
-            <a:off x="1721644" y="2095500"/>
+            <a:off x="3800475" y="2095500"/>
             <a:ext cx="647700" cy="647700"/>
           </a:xfrm>
           <a:prstGeom xmlns:a="http://schemas.openxmlformats.org/drawingml/2006/main" prst="ellipse">
@@ -1269,17 +1269,17 @@
       </p:sp>
       <p:pic>
         <p:nvPicPr>
-          <p:cNvPr id="42" name=""/>
+          <p:cNvPr id="24" name=""/>
           <p:cNvPicPr>
             <a:picLocks xmlns:a="http://schemas.openxmlformats.org/drawingml/2006/main" noChangeAspect="1"/>
           </p:cNvPicPr>
           <p:nvPr/>
         </p:nvPicPr>
         <p:blipFill>
-          <a:blip xmlns:r="http://schemas.openxmlformats.org/officeDocument/2006/relationships" xmlns:a="http://schemas.openxmlformats.org/drawingml/2006/main" r:embed="Rf6786ce4211c487f">
+          <a:blip xmlns:r="http://schemas.openxmlformats.org/officeDocument/2006/relationships" xmlns:a="http://schemas.openxmlformats.org/drawingml/2006/main" r:embed="Rea54af27341f4360">
             <a:extLst>
               <a:ext uri="{96DAC541-7B7A-43D3-8B79-37D633B846F1}">
-                <asvg:svgBlip xmlns:asvg="http://schemas.microsoft.com/office/drawing/2016/SVG/main" r:embed="Rded10df445574cb6"/>
+                <asvg:svgBlip xmlns:asvg="http://schemas.microsoft.com/office/drawing/2016/SVG/main" r:embed="Rb257bc34d4ae46a3"/>
               </a:ext>
             </a:extLst>
           </a:blip>
@@ -1287,7 +1287,7 @@
         </p:blipFill>
         <p:spPr>
           <a:xfrm xmlns:a="http://schemas.openxmlformats.org/drawingml/2006/main">
-            <a:off x="1874044" y="2247900"/>
+            <a:off x="3952875" y="2247900"/>
             <a:ext cx="342900" cy="342900"/>
           </a:xfrm>
           <a:prstGeom xmlns:a="http://schemas.openxmlformats.org/drawingml/2006/main" prst="rect">
@@ -1300,7 +1300,7 @@
           <p:cNvPr id="7" name="parallel-title-0">
             <a:extLst xmlns:a="http://schemas.openxmlformats.org/drawingml/2006/main">
               <a:ext uri="{FF2B5EF4-FFF2-40B4-BE49-F238E27FC236}">
-                <a16:creationId xmlns:a16="http://schemas.microsoft.com/office/drawing/2014/main" id="{A27D157C-A609-4985-B938-398A43769852}"/>
+                <a16:creationId xmlns:a16="http://schemas.microsoft.com/office/drawing/2014/main" id="{65832670-893D-4F56-90E7-FADAD1F0B017}"/>
               </a:ext>
             </a:extLst>
           </p:cNvPr>
@@ -1311,8 +1311,8 @@
         </p:nvSpPr>
         <p:spPr>
           <a:xfrm xmlns:a="http://schemas.openxmlformats.org/drawingml/2006/main" rot="0">
-            <a:off x="1038225" y="3214688"/>
-            <a:ext cx="2014538" cy="333375"/>
+            <a:off x="2676525" y="3238500"/>
+            <a:ext cx="2895600" cy="285750"/>
           </a:xfrm>
           <a:prstGeom xmlns:a="http://schemas.openxmlformats.org/drawingml/2006/main" prst="rect">
             <a:avLst/>
@@ -1334,7 +1334,7 @@
                 <a:spcPct val="125000"/>
               </a:lnSpc>
               <a:buNone/>
-              <a:defRPr sz="2100" b="1" i="0">
+              <a:defRPr sz="1800" b="1" i="0">
                 <a:solidFill>
                   <a:srgbClr val="254B7C"/>
                 </a:solidFill>
@@ -1344,7 +1344,7 @@
               </a:defRPr>
             </a:pPr>
             <a:r>
-              <a:rPr sz="2100" b="1" i="0">
+              <a:rPr sz="1800" b="1" i="0">
                 <a:solidFill>
                   <a:srgbClr val="254B7C"/>
                 </a:solidFill>
@@ -1362,7 +1362,7 @@
           <p:cNvPr id="8" name="parallel-rule-0">
             <a:extLst xmlns:a="http://schemas.openxmlformats.org/drawingml/2006/main">
               <a:ext uri="{FF2B5EF4-FFF2-40B4-BE49-F238E27FC236}">
-                <a16:creationId xmlns:a16="http://schemas.microsoft.com/office/drawing/2014/main" id="{687CA6D6-A122-44BE-82A7-AEF6D56B3823}"/>
+                <a16:creationId xmlns:a16="http://schemas.microsoft.com/office/drawing/2014/main" id="{E8EE72AE-F284-448D-9318-EF1AE6E80486}"/>
               </a:ext>
             </a:extLst>
           </p:cNvPr>
@@ -1373,7 +1373,7 @@
         </p:nvSpPr>
         <p:spPr>
           <a:xfrm xmlns:a="http://schemas.openxmlformats.org/drawingml/2006/main" rot="0">
-            <a:off x="1788319" y="3771900"/>
+            <a:off x="3867150" y="3771900"/>
             <a:ext cx="514350" cy="38100"/>
           </a:xfrm>
           <a:prstGeom xmlns:a="http://schemas.openxmlformats.org/drawingml/2006/main" prst="roundRect">
@@ -1395,7 +1395,7 @@
           <p:cNvPr id="9" name="parallel-body-0">
             <a:extLst xmlns:a="http://schemas.openxmlformats.org/drawingml/2006/main">
               <a:ext uri="{FF2B5EF4-FFF2-40B4-BE49-F238E27FC236}">
-                <a16:creationId xmlns:a16="http://schemas.microsoft.com/office/drawing/2014/main" id="{C1EB5658-87C1-4C39-8040-129DCE5BFE58}"/>
+                <a16:creationId xmlns:a16="http://schemas.microsoft.com/office/drawing/2014/main" id="{FDB00AD6-9404-430D-96C8-F5D234F5C5F8}"/>
               </a:ext>
             </a:extLst>
           </p:cNvPr>
@@ -1406,8 +1406,8 @@
         </p:nvSpPr>
         <p:spPr>
           <a:xfrm xmlns:a="http://schemas.openxmlformats.org/drawingml/2006/main" rot="0">
-            <a:off x="1038225" y="4238625"/>
-            <a:ext cx="2014538" cy="647700"/>
+            <a:off x="2676525" y="4295775"/>
+            <a:ext cx="2895600" cy="533400"/>
           </a:xfrm>
           <a:prstGeom xmlns:a="http://schemas.openxmlformats.org/drawingml/2006/main" prst="rect">
             <a:avLst/>
@@ -1429,7 +1429,7 @@
                 <a:spcPct val="150000"/>
               </a:lnSpc>
               <a:buNone/>
-              <a:defRPr sz="1700" b="0" i="0">
+              <a:defRPr sz="1400" b="0" i="0">
                 <a:solidFill>
                   <a:srgbClr val="46566A"/>
                 </a:solidFill>
@@ -1439,7 +1439,7 @@
               </a:defRPr>
             </a:pPr>
             <a:r>
-              <a:rPr sz="1700" b="0" i="0">
+              <a:rPr sz="1400" b="0" i="0">
                 <a:solidFill>
                   <a:srgbClr val="46566A"/>
                 </a:solidFill>
@@ -1447,7 +1447,7 @@
                 <a:ea typeface="Microsoft YaHei"/>
                 <a:cs typeface="Microsoft YaHei"/>
               </a:rPr>
-              <a:t>以可靠的方法与扎实</a:t>
+              <a:t>以可靠的方法与扎实知识解决复杂任</a:t>
             </a:r>
           </a:p>
           <a:p xmlns:a="http://schemas.openxmlformats.org/drawingml/2006/main">
@@ -1456,7 +1456,7 @@
                 <a:spcPct val="150000"/>
               </a:lnSpc>
               <a:buNone/>
-              <a:defRPr sz="1700" b="0" i="0">
+              <a:defRPr sz="1400" b="0" i="0">
                 <a:solidFill>
                   <a:srgbClr val="46566A"/>
                 </a:solidFill>
@@ -1466,7 +1466,7 @@
               </a:defRPr>
             </a:pPr>
             <a:r>
-              <a:rPr sz="1700" b="0" i="0">
+              <a:rPr sz="1400" b="0" i="0">
                 <a:solidFill>
                   <a:srgbClr val="46566A"/>
                 </a:solidFill>
@@ -1474,7 +1474,7 @@
                 <a:ea typeface="Microsoft YaHei"/>
                 <a:cs typeface="Microsoft YaHei"/>
               </a:rPr>
-              <a:t>知识解决复杂任务</a:t>
+              <a:t>务</a:t>
             </a:r>
           </a:p>
         </p:txBody>
@@ -1484,7 +1484,7 @@
           <p:cNvPr id="10" name="parallel-card-underlay-1">
             <a:extLst xmlns:a="http://schemas.openxmlformats.org/drawingml/2006/main">
               <a:ext uri="{FF2B5EF4-FFF2-40B4-BE49-F238E27FC236}">
-                <a16:creationId xmlns:a16="http://schemas.microsoft.com/office/drawing/2014/main" id="{698499D2-01BD-4E3D-B776-0F3042012B12}"/>
+                <a16:creationId xmlns:a16="http://schemas.microsoft.com/office/drawing/2014/main" id="{F564990F-51CE-4B74-A62C-6EE0B19A2A9D}"/>
               </a:ext>
             </a:extLst>
           </p:cNvPr>
@@ -1495,12 +1495,12 @@
         </p:nvSpPr>
         <p:spPr>
           <a:xfrm xmlns:a="http://schemas.openxmlformats.org/drawingml/2006/main" rot="0">
-            <a:off x="3586163" y="2514600"/>
-            <a:ext cx="2319338" cy="3352800"/>
+            <a:off x="6429375" y="2514600"/>
+            <a:ext cx="3276600" cy="3352800"/>
           </a:xfrm>
           <a:prstGeom xmlns:a="http://schemas.openxmlformats.org/drawingml/2006/main" prst="roundRect">
             <a:avLst>
-              <a:gd name="adj" fmla="val 10678"/>
+              <a:gd name="adj" fmla="val 7558"/>
             </a:avLst>
           </a:prstGeom>
           <a:solidFill xmlns:a="http://schemas.openxmlformats.org/drawingml/2006/main">
@@ -1519,7 +1519,7 @@
           <p:cNvPr id="11" name="parallel-card-surface-1">
             <a:extLst xmlns:a="http://schemas.openxmlformats.org/drawingml/2006/main">
               <a:ext uri="{FF2B5EF4-FFF2-40B4-BE49-F238E27FC236}">
-                <a16:creationId xmlns:a16="http://schemas.microsoft.com/office/drawing/2014/main" id="{FE1615FC-7FFD-4D7F-AB81-A67296322293}"/>
+                <a16:creationId xmlns:a16="http://schemas.microsoft.com/office/drawing/2014/main" id="{B04D216A-5060-4CD2-9782-577C4F123375}"/>
               </a:ext>
             </a:extLst>
           </p:cNvPr>
@@ -1530,12 +1530,12 @@
         </p:nvSpPr>
         <p:spPr>
           <a:xfrm xmlns:a="http://schemas.openxmlformats.org/drawingml/2006/main" rot="0">
-            <a:off x="3509963" y="2419350"/>
-            <a:ext cx="2471738" cy="3352800"/>
+            <a:off x="6353175" y="2419350"/>
+            <a:ext cx="3429000" cy="3352800"/>
           </a:xfrm>
           <a:prstGeom xmlns:a="http://schemas.openxmlformats.org/drawingml/2006/main" prst="roundRect">
             <a:avLst>
-              <a:gd name="adj" fmla="val 10019"/>
+              <a:gd name="adj" fmla="val 7386"/>
             </a:avLst>
           </a:prstGeom>
           <a:solidFill xmlns:a="http://schemas.openxmlformats.org/drawingml/2006/main">
@@ -1560,7 +1560,7 @@
           <p:cNvPr id="12" name="parallel-card-accent-1">
             <a:extLst xmlns:a="http://schemas.openxmlformats.org/drawingml/2006/main">
               <a:ext uri="{FF2B5EF4-FFF2-40B4-BE49-F238E27FC236}">
-                <a16:creationId xmlns:a16="http://schemas.microsoft.com/office/drawing/2014/main" id="{B6C6DAE7-155E-42EE-B3FE-7A7B1330BE9A}"/>
+                <a16:creationId xmlns:a16="http://schemas.microsoft.com/office/drawing/2014/main" id="{68B2E617-9CB5-4E1A-AF2E-CED036C87707}"/>
               </a:ext>
             </a:extLst>
           </p:cNvPr>
@@ -1571,7 +1571,7 @@
         </p:nvSpPr>
         <p:spPr>
           <a:xfrm xmlns:a="http://schemas.openxmlformats.org/drawingml/2006/main" rot="0">
-            <a:off x="4355306" y="2419350"/>
+            <a:off x="7677150" y="2419350"/>
             <a:ext cx="781050" cy="76200"/>
           </a:xfrm>
           <a:prstGeom xmlns:a="http://schemas.openxmlformats.org/drawingml/2006/main" prst="roundRect">
@@ -1593,7 +1593,7 @@
           <p:cNvPr id="13" name="parallel-marker-halo-1">
             <a:extLst xmlns:a="http://schemas.openxmlformats.org/drawingml/2006/main">
               <a:ext uri="{FF2B5EF4-FFF2-40B4-BE49-F238E27FC236}">
-                <a16:creationId xmlns:a16="http://schemas.microsoft.com/office/drawing/2014/main" id="{90C95DA0-583E-4E91-85CC-52D73F890D71}"/>
+                <a16:creationId xmlns:a16="http://schemas.microsoft.com/office/drawing/2014/main" id="{C51551F6-87B3-486A-AE72-6782A9523483}"/>
               </a:ext>
             </a:extLst>
           </p:cNvPr>
@@ -1604,7 +1604,7 @@
         </p:nvSpPr>
         <p:spPr>
           <a:xfrm xmlns:a="http://schemas.openxmlformats.org/drawingml/2006/main" rot="0">
-            <a:off x="4288631" y="1962150"/>
+            <a:off x="7610475" y="1962150"/>
             <a:ext cx="914400" cy="914400"/>
           </a:xfrm>
           <a:prstGeom xmlns:a="http://schemas.openxmlformats.org/drawingml/2006/main" prst="ellipse">
@@ -1626,7 +1626,7 @@
           <p:cNvPr id="14" name="parallel-marker-core-1">
             <a:extLst xmlns:a="http://schemas.openxmlformats.org/drawingml/2006/main">
               <a:ext uri="{FF2B5EF4-FFF2-40B4-BE49-F238E27FC236}">
-                <a16:creationId xmlns:a16="http://schemas.microsoft.com/office/drawing/2014/main" id="{73709FE2-3D91-4DCA-B014-F062E6361974}"/>
+                <a16:creationId xmlns:a16="http://schemas.microsoft.com/office/drawing/2014/main" id="{D4FE1103-2466-40D6-8510-2F64547B41C5}"/>
               </a:ext>
             </a:extLst>
           </p:cNvPr>
@@ -1637,7 +1637,7 @@
         </p:nvSpPr>
         <p:spPr>
           <a:xfrm xmlns:a="http://schemas.openxmlformats.org/drawingml/2006/main" rot="0">
-            <a:off x="4421981" y="2095500"/>
+            <a:off x="7743825" y="2095500"/>
             <a:ext cx="647700" cy="647700"/>
           </a:xfrm>
           <a:prstGeom xmlns:a="http://schemas.openxmlformats.org/drawingml/2006/main" prst="ellipse">
@@ -1660,17 +1660,17 @@
       </p:sp>
       <p:pic>
         <p:nvPicPr>
-          <p:cNvPr id="51" name=""/>
+          <p:cNvPr id="33" name=""/>
           <p:cNvPicPr>
             <a:picLocks xmlns:a="http://schemas.openxmlformats.org/drawingml/2006/main" noChangeAspect="1"/>
           </p:cNvPicPr>
           <p:nvPr/>
         </p:nvPicPr>
         <p:blipFill>
-          <a:blip xmlns:r="http://schemas.openxmlformats.org/officeDocument/2006/relationships" xmlns:a="http://schemas.openxmlformats.org/drawingml/2006/main" r:embed="Rbe02ad2951de4a87">
+          <a:blip xmlns:r="http://schemas.openxmlformats.org/officeDocument/2006/relationships" xmlns:a="http://schemas.openxmlformats.org/drawingml/2006/main" r:embed="R042df5e12cf9413c">
             <a:extLst>
               <a:ext uri="{96DAC541-7B7A-43D3-8B79-37D633B846F1}">
-                <asvg:svgBlip xmlns:asvg="http://schemas.microsoft.com/office/drawing/2016/SVG/main" r:embed="Rb6b78103d1e64f26"/>
+                <asvg:svgBlip xmlns:asvg="http://schemas.microsoft.com/office/drawing/2016/SVG/main" r:embed="R691826e67a644f32"/>
               </a:ext>
             </a:extLst>
           </a:blip>
@@ -1678,7 +1678,7 @@
         </p:blipFill>
         <p:spPr>
           <a:xfrm xmlns:a="http://schemas.openxmlformats.org/drawingml/2006/main">
-            <a:off x="4574381" y="2247900"/>
+            <a:off x="7896225" y="2247900"/>
             <a:ext cx="342900" cy="342900"/>
           </a:xfrm>
           <a:prstGeom xmlns:a="http://schemas.openxmlformats.org/drawingml/2006/main" prst="rect">
@@ -1691,7 +1691,7 @@
           <p:cNvPr id="16" name="parallel-title-1">
             <a:extLst xmlns:a="http://schemas.openxmlformats.org/drawingml/2006/main">
               <a:ext uri="{FF2B5EF4-FFF2-40B4-BE49-F238E27FC236}">
-                <a16:creationId xmlns:a16="http://schemas.microsoft.com/office/drawing/2014/main" id="{EB91ECFE-3DDF-4E5E-9FCD-3AD72E31AA63}"/>
+                <a16:creationId xmlns:a16="http://schemas.microsoft.com/office/drawing/2014/main" id="{3549DA83-B545-414C-89E9-17EEA1F0797D}"/>
               </a:ext>
             </a:extLst>
           </p:cNvPr>
@@ -1702,8 +1702,8 @@
         </p:nvSpPr>
         <p:spPr>
           <a:xfrm xmlns:a="http://schemas.openxmlformats.org/drawingml/2006/main" rot="0">
-            <a:off x="3738563" y="3214688"/>
-            <a:ext cx="2014538" cy="333375"/>
+            <a:off x="6619875" y="3238500"/>
+            <a:ext cx="2895600" cy="285750"/>
           </a:xfrm>
           <a:prstGeom xmlns:a="http://schemas.openxmlformats.org/drawingml/2006/main" prst="rect">
             <a:avLst/>
@@ -1725,7 +1725,7 @@
                 <a:spcPct val="125000"/>
               </a:lnSpc>
               <a:buNone/>
-              <a:defRPr sz="2100" b="1" i="0">
+              <a:defRPr sz="1800" b="1" i="0">
                 <a:solidFill>
                   <a:srgbClr val="254B7C"/>
                 </a:solidFill>
@@ -1735,7 +1735,7 @@
               </a:defRPr>
             </a:pPr>
             <a:r>
-              <a:rPr sz="2100" b="1" i="0">
+              <a:rPr sz="1800" b="1" i="0">
                 <a:solidFill>
                   <a:srgbClr val="254B7C"/>
                 </a:solidFill>
@@ -1753,7 +1753,7 @@
           <p:cNvPr id="17" name="parallel-rule-1">
             <a:extLst xmlns:a="http://schemas.openxmlformats.org/drawingml/2006/main">
               <a:ext uri="{FF2B5EF4-FFF2-40B4-BE49-F238E27FC236}">
-                <a16:creationId xmlns:a16="http://schemas.microsoft.com/office/drawing/2014/main" id="{790BAE4A-0E95-4293-8725-41E2E29E4D1C}"/>
+                <a16:creationId xmlns:a16="http://schemas.microsoft.com/office/drawing/2014/main" id="{C09BBAC5-F4A0-45E2-9CCA-FE75F2318477}"/>
               </a:ext>
             </a:extLst>
           </p:cNvPr>
@@ -1764,7 +1764,7 @@
         </p:nvSpPr>
         <p:spPr>
           <a:xfrm xmlns:a="http://schemas.openxmlformats.org/drawingml/2006/main" rot="0">
-            <a:off x="4488656" y="3771900"/>
+            <a:off x="7810500" y="3771900"/>
             <a:ext cx="514350" cy="38100"/>
           </a:xfrm>
           <a:prstGeom xmlns:a="http://schemas.openxmlformats.org/drawingml/2006/main" prst="roundRect">
@@ -1786,7 +1786,7 @@
           <p:cNvPr id="18" name="parallel-body-1">
             <a:extLst xmlns:a="http://schemas.openxmlformats.org/drawingml/2006/main">
               <a:ext uri="{FF2B5EF4-FFF2-40B4-BE49-F238E27FC236}">
-                <a16:creationId xmlns:a16="http://schemas.microsoft.com/office/drawing/2014/main" id="{6F78CE23-17FB-4336-8A7A-426EFA0E8A0A}"/>
+                <a16:creationId xmlns:a16="http://schemas.microsoft.com/office/drawing/2014/main" id="{D169B8A3-1838-4BE3-B3A6-8FCC950C15E0}"/>
               </a:ext>
             </a:extLst>
           </p:cNvPr>
@@ -1797,8 +1797,8 @@
         </p:nvSpPr>
         <p:spPr>
           <a:xfrm xmlns:a="http://schemas.openxmlformats.org/drawingml/2006/main" rot="0">
-            <a:off x="3738563" y="4238625"/>
-            <a:ext cx="2014538" cy="647700"/>
+            <a:off x="6619875" y="4455766"/>
+            <a:ext cx="2895600" cy="213417"/>
           </a:xfrm>
           <a:prstGeom xmlns:a="http://schemas.openxmlformats.org/drawingml/2006/main" prst="rect">
             <a:avLst/>
@@ -1810,17 +1810,17 @@
           </a:ln>
         </p:spPr>
         <p:txBody>
-          <a:bodyPr xmlns:a="http://schemas.openxmlformats.org/drawingml/2006/main" wrap="square" lIns="0" tIns="0" rIns="0" bIns="0" anchor="ctr">
+          <a:bodyPr xmlns:a="http://schemas.openxmlformats.org/drawingml/2006/main" wrap="none" lIns="0" tIns="0" rIns="0" bIns="0" anchor="ctr">
             <a:noAutofit/>
           </a:bodyPr>
           <a:lstStyle xmlns:a="http://schemas.openxmlformats.org/drawingml/2006/main"/>
           <a:p xmlns:a="http://schemas.openxmlformats.org/drawingml/2006/main">
             <a:pPr algn="ctr">
               <a:lnSpc>
-                <a:spcPct val="150000"/>
+                <a:spcPct val="100000"/>
               </a:lnSpc>
               <a:buNone/>
-              <a:defRPr sz="1700" b="0" i="0">
+              <a:defRPr sz="1400" b="0" i="0">
                 <a:solidFill>
                   <a:srgbClr val="46566A"/>
                 </a:solidFill>
@@ -1830,7 +1830,7 @@
               </a:defRPr>
             </a:pPr>
             <a:r>
-              <a:rPr sz="1700" b="0" i="0">
+              <a:rPr sz="1400" b="0" i="0">
                 <a:solidFill>
                   <a:srgbClr val="46566A"/>
                 </a:solidFill>
@@ -1838,824 +1838,15 @@
                 <a:ea typeface="Microsoft YaHei"/>
                 <a:cs typeface="Microsoft YaHei"/>
               </a:rPr>
-              <a:t>围绕共同目标整合人</a:t>
-            </a:r>
-          </a:p>
-          <a:p xmlns:a="http://schemas.openxmlformats.org/drawingml/2006/main">
-            <a:pPr algn="ctr">
-              <a:lnSpc>
-                <a:spcPct val="150000"/>
-              </a:lnSpc>
-              <a:buNone/>
-              <a:defRPr sz="1700" b="0" i="0">
-                <a:solidFill>
-                  <a:srgbClr val="46566A"/>
-                </a:solidFill>
-                <a:latin typeface="Microsoft YaHei"/>
-                <a:ea typeface="Microsoft YaHei"/>
-                <a:cs typeface="Microsoft YaHei"/>
-              </a:defRPr>
-            </a:pPr>
-            <a:r>
-              <a:rPr sz="1700" b="0" i="0">
-                <a:solidFill>
-                  <a:srgbClr val="46566A"/>
-                </a:solidFill>
-                <a:latin typeface="Microsoft YaHei"/>
-                <a:ea typeface="Microsoft YaHei"/>
-                <a:cs typeface="Microsoft YaHei"/>
-              </a:rPr>
-              <a:t>员、平台与资源</a:t>
+              <a:t>围绕共同目标整合人员、平台与资源</a:t>
             </a:r>
           </a:p>
         </p:txBody>
       </p:sp>
-      <p:sp>
-        <p:nvSpPr>
-          <p:cNvPr id="19" name="parallel-card-underlay-2">
-            <a:extLst xmlns:a="http://schemas.openxmlformats.org/drawingml/2006/main">
-              <a:ext uri="{FF2B5EF4-FFF2-40B4-BE49-F238E27FC236}">
-                <a16:creationId xmlns:a16="http://schemas.microsoft.com/office/drawing/2014/main" id="{95AD90D0-0509-4FF0-BD97-1349D9117BEE}"/>
-              </a:ext>
-            </a:extLst>
-          </p:cNvPr>
-          <p:cNvSpPr>
-            <a:spLocks xmlns:a="http://schemas.openxmlformats.org/drawingml/2006/main" noGrp="1"/>
-          </p:cNvSpPr>
-          <p:nvPr/>
-        </p:nvSpPr>
-        <p:spPr>
-          <a:xfrm xmlns:a="http://schemas.openxmlformats.org/drawingml/2006/main" rot="0">
-            <a:off x="6286500" y="2514600"/>
-            <a:ext cx="2319338" cy="3352800"/>
-          </a:xfrm>
-          <a:prstGeom xmlns:a="http://schemas.openxmlformats.org/drawingml/2006/main" prst="roundRect">
-            <a:avLst>
-              <a:gd name="adj" fmla="val 10678"/>
-            </a:avLst>
-          </a:prstGeom>
-          <a:solidFill xmlns:a="http://schemas.openxmlformats.org/drawingml/2006/main">
-            <a:srgbClr val="DFEAFA"/>
-          </a:solidFill>
-          <a:ln xmlns:a="http://schemas.openxmlformats.org/drawingml/2006/main" w="9525">
-            <a:solidFill>
-              <a:srgbClr val="DCE8F7"/>
-            </a:solidFill>
-            <a:prstDash val="solid"/>
-          </a:ln>
-        </p:spPr>
-      </p:sp>
-      <p:sp>
-        <p:nvSpPr>
-          <p:cNvPr id="20" name="parallel-card-surface-2">
-            <a:extLst xmlns:a="http://schemas.openxmlformats.org/drawingml/2006/main">
-              <a:ext uri="{FF2B5EF4-FFF2-40B4-BE49-F238E27FC236}">
-                <a16:creationId xmlns:a16="http://schemas.microsoft.com/office/drawing/2014/main" id="{490CF566-040F-4EFB-BFBA-2F49CD85A91D}"/>
-              </a:ext>
-            </a:extLst>
-          </p:cNvPr>
-          <p:cNvSpPr>
-            <a:spLocks xmlns:a="http://schemas.openxmlformats.org/drawingml/2006/main" noGrp="1"/>
-          </p:cNvSpPr>
-          <p:nvPr/>
-        </p:nvSpPr>
-        <p:spPr>
-          <a:xfrm xmlns:a="http://schemas.openxmlformats.org/drawingml/2006/main" rot="0">
-            <a:off x="6210300" y="2419350"/>
-            <a:ext cx="2471738" cy="3352800"/>
-          </a:xfrm>
-          <a:prstGeom xmlns:a="http://schemas.openxmlformats.org/drawingml/2006/main" prst="roundRect">
-            <a:avLst>
-              <a:gd name="adj" fmla="val 10019"/>
-            </a:avLst>
-          </a:prstGeom>
-          <a:solidFill xmlns:a="http://schemas.openxmlformats.org/drawingml/2006/main">
-            <a:srgbClr val="F4F8FD"/>
-          </a:solidFill>
-          <a:ln xmlns:a="http://schemas.openxmlformats.org/drawingml/2006/main" w="9525">
-            <a:solidFill>
-              <a:srgbClr val="D2E0F2"/>
-            </a:solidFill>
-            <a:prstDash val="solid"/>
-          </a:ln>
-        </p:spPr>
-        <p:style>
-          <a:lnRef xmlns:a="http://schemas.openxmlformats.org/drawingml/2006/main" idx="0"/>
-          <a:fillRef xmlns:a="http://schemas.openxmlformats.org/drawingml/2006/main" idx="0"/>
-          <a:effectRef xmlns:a="http://schemas.openxmlformats.org/drawingml/2006/main" idx="10"/>
-          <a:fontRef xmlns:a="http://schemas.openxmlformats.org/drawingml/2006/main" idx="major"/>
-        </p:style>
-      </p:sp>
-      <p:sp>
-        <p:nvSpPr>
-          <p:cNvPr id="21" name="parallel-card-accent-2">
-            <a:extLst xmlns:a="http://schemas.openxmlformats.org/drawingml/2006/main">
-              <a:ext uri="{FF2B5EF4-FFF2-40B4-BE49-F238E27FC236}">
-                <a16:creationId xmlns:a16="http://schemas.microsoft.com/office/drawing/2014/main" id="{EBA7227A-37C9-4707-AE70-904EF32533AA}"/>
-              </a:ext>
-            </a:extLst>
-          </p:cNvPr>
-          <p:cNvSpPr>
-            <a:spLocks xmlns:a="http://schemas.openxmlformats.org/drawingml/2006/main" noGrp="1"/>
-          </p:cNvSpPr>
-          <p:nvPr/>
-        </p:nvSpPr>
-        <p:spPr>
-          <a:xfrm xmlns:a="http://schemas.openxmlformats.org/drawingml/2006/main" rot="0">
-            <a:off x="7055644" y="2419350"/>
-            <a:ext cx="781050" cy="76200"/>
-          </a:xfrm>
-          <a:prstGeom xmlns:a="http://schemas.openxmlformats.org/drawingml/2006/main" prst="roundRect">
-            <a:avLst>
-              <a:gd name="adj" fmla="val 50000"/>
-            </a:avLst>
-          </a:prstGeom>
-          <a:solidFill xmlns:a="http://schemas.openxmlformats.org/drawingml/2006/main">
-            <a:srgbClr val="78AEEF"/>
-          </a:solidFill>
-          <a:ln xmlns:a="http://schemas.openxmlformats.org/drawingml/2006/main" w="0">
-            <a:noFill/>
-            <a:prstDash val="solid"/>
-          </a:ln>
-        </p:spPr>
-      </p:sp>
-      <p:sp>
-        <p:nvSpPr>
-          <p:cNvPr id="22" name="parallel-marker-halo-2">
-            <a:extLst xmlns:a="http://schemas.openxmlformats.org/drawingml/2006/main">
-              <a:ext uri="{FF2B5EF4-FFF2-40B4-BE49-F238E27FC236}">
-                <a16:creationId xmlns:a16="http://schemas.microsoft.com/office/drawing/2014/main" id="{D30127E1-8439-46A3-A646-A0B928E2F54F}"/>
-              </a:ext>
-            </a:extLst>
-          </p:cNvPr>
-          <p:cNvSpPr>
-            <a:spLocks xmlns:a="http://schemas.openxmlformats.org/drawingml/2006/main" noGrp="1"/>
-          </p:cNvSpPr>
-          <p:nvPr/>
-        </p:nvSpPr>
-        <p:spPr>
-          <a:xfrm xmlns:a="http://schemas.openxmlformats.org/drawingml/2006/main" rot="0">
-            <a:off x="6988969" y="1962150"/>
-            <a:ext cx="914400" cy="914400"/>
-          </a:xfrm>
-          <a:prstGeom xmlns:a="http://schemas.openxmlformats.org/drawingml/2006/main" prst="ellipse">
-            <a:avLst/>
-          </a:prstGeom>
-          <a:solidFill xmlns:a="http://schemas.openxmlformats.org/drawingml/2006/main">
-            <a:srgbClr val="EDF5FF"/>
-          </a:solidFill>
-          <a:ln xmlns:a="http://schemas.openxmlformats.org/drawingml/2006/main" w="9525">
-            <a:solidFill>
-              <a:srgbClr val="D8E7FA"/>
-            </a:solidFill>
-            <a:prstDash val="solid"/>
-          </a:ln>
-        </p:spPr>
-      </p:sp>
-      <p:sp>
-        <p:nvSpPr>
-          <p:cNvPr id="23" name="parallel-marker-core-2">
-            <a:extLst xmlns:a="http://schemas.openxmlformats.org/drawingml/2006/main">
-              <a:ext uri="{FF2B5EF4-FFF2-40B4-BE49-F238E27FC236}">
-                <a16:creationId xmlns:a16="http://schemas.microsoft.com/office/drawing/2014/main" id="{D6D188DE-4354-4BD9-AAD2-51649CB19E09}"/>
-              </a:ext>
-            </a:extLst>
-          </p:cNvPr>
-          <p:cNvSpPr>
-            <a:spLocks xmlns:a="http://schemas.openxmlformats.org/drawingml/2006/main" noGrp="1"/>
-          </p:cNvSpPr>
-          <p:nvPr/>
-        </p:nvSpPr>
-        <p:spPr>
-          <a:xfrm xmlns:a="http://schemas.openxmlformats.org/drawingml/2006/main" rot="0">
-            <a:off x="7122319" y="2095500"/>
-            <a:ext cx="647700" cy="647700"/>
-          </a:xfrm>
-          <a:prstGeom xmlns:a="http://schemas.openxmlformats.org/drawingml/2006/main" prst="ellipse">
-            <a:avLst/>
-          </a:prstGeom>
-          <a:solidFill xmlns:a="http://schemas.openxmlformats.org/drawingml/2006/main">
-            <a:srgbClr val="2F5EA8"/>
-          </a:solidFill>
-          <a:ln xmlns:a="http://schemas.openxmlformats.org/drawingml/2006/main" w="0">
-            <a:noFill/>
-            <a:prstDash val="solid"/>
-          </a:ln>
-        </p:spPr>
-        <p:style>
-          <a:lnRef xmlns:a="http://schemas.openxmlformats.org/drawingml/2006/main" idx="0"/>
-          <a:fillRef xmlns:a="http://schemas.openxmlformats.org/drawingml/2006/main" idx="0"/>
-          <a:effectRef xmlns:a="http://schemas.openxmlformats.org/drawingml/2006/main" idx="11"/>
-          <a:fontRef xmlns:a="http://schemas.openxmlformats.org/drawingml/2006/main" idx="major"/>
-        </p:style>
-      </p:sp>
-      <p:pic>
-        <p:nvPicPr>
-          <p:cNvPr id="60" name=""/>
-          <p:cNvPicPr>
-            <a:picLocks xmlns:a="http://schemas.openxmlformats.org/drawingml/2006/main" noChangeAspect="1"/>
-          </p:cNvPicPr>
-          <p:nvPr/>
-        </p:nvPicPr>
-        <p:blipFill>
-          <a:blip xmlns:r="http://schemas.openxmlformats.org/officeDocument/2006/relationships" xmlns:a="http://schemas.openxmlformats.org/drawingml/2006/main" r:embed="Rb360e55580184a7c">
-            <a:extLst>
-              <a:ext uri="{96DAC541-7B7A-43D3-8B79-37D633B846F1}">
-                <asvg:svgBlip xmlns:asvg="http://schemas.microsoft.com/office/drawing/2016/SVG/main" r:embed="R0add1f8aad114d74"/>
-              </a:ext>
-            </a:extLst>
-          </a:blip>
-          <a:stretch xmlns:a="http://schemas.openxmlformats.org/drawingml/2006/main"/>
-        </p:blipFill>
-        <p:spPr>
-          <a:xfrm xmlns:a="http://schemas.openxmlformats.org/drawingml/2006/main">
-            <a:off x="7274719" y="2247900"/>
-            <a:ext cx="342900" cy="342900"/>
-          </a:xfrm>
-          <a:prstGeom xmlns:a="http://schemas.openxmlformats.org/drawingml/2006/main" prst="rect">
-            <a:avLst/>
-          </a:prstGeom>
-        </p:spPr>
-      </p:pic>
-      <p:sp>
-        <p:nvSpPr>
-          <p:cNvPr id="25" name="parallel-title-2">
-            <a:extLst xmlns:a="http://schemas.openxmlformats.org/drawingml/2006/main">
-              <a:ext uri="{FF2B5EF4-FFF2-40B4-BE49-F238E27FC236}">
-                <a16:creationId xmlns:a16="http://schemas.microsoft.com/office/drawing/2014/main" id="{22D86861-F5C7-4BF3-9AD8-EB2D0B12BB9B}"/>
-              </a:ext>
-            </a:extLst>
-          </p:cNvPr>
-          <p:cNvSpPr>
-            <a:spLocks xmlns:a="http://schemas.openxmlformats.org/drawingml/2006/main" noGrp="1"/>
-          </p:cNvSpPr>
-          <p:nvPr/>
-        </p:nvSpPr>
-        <p:spPr>
-          <a:xfrm xmlns:a="http://schemas.openxmlformats.org/drawingml/2006/main" rot="0">
-            <a:off x="6438900" y="3214688"/>
-            <a:ext cx="2014538" cy="333375"/>
-          </a:xfrm>
-          <a:prstGeom xmlns:a="http://schemas.openxmlformats.org/drawingml/2006/main" prst="rect">
-            <a:avLst/>
-          </a:prstGeom>
-          <a:noFill xmlns:a="http://schemas.openxmlformats.org/drawingml/2006/main"/>
-          <a:ln xmlns:a="http://schemas.openxmlformats.org/drawingml/2006/main" w="0">
-            <a:noFill/>
-            <a:prstDash val="solid"/>
-          </a:ln>
-        </p:spPr>
-        <p:txBody>
-          <a:bodyPr xmlns:a="http://schemas.openxmlformats.org/drawingml/2006/main" wrap="none" lIns="0" tIns="0" rIns="0" bIns="0" anchor="ctr">
-            <a:noAutofit/>
-          </a:bodyPr>
-          <a:lstStyle xmlns:a="http://schemas.openxmlformats.org/drawingml/2006/main"/>
-          <a:p xmlns:a="http://schemas.openxmlformats.org/drawingml/2006/main">
-            <a:pPr algn="ctr">
-              <a:lnSpc>
-                <a:spcPct val="125000"/>
-              </a:lnSpc>
-              <a:buNone/>
-              <a:defRPr sz="2100" b="1" i="0">
-                <a:solidFill>
-                  <a:srgbClr val="254B7C"/>
-                </a:solidFill>
-                <a:latin typeface="Microsoft YaHei"/>
-                <a:ea typeface="Microsoft YaHei"/>
-                <a:cs typeface="Microsoft YaHei"/>
-              </a:defRPr>
-            </a:pPr>
-            <a:r>
-              <a:rPr sz="2100" b="1" i="0">
-                <a:solidFill>
-                  <a:srgbClr val="254B7C"/>
-                </a:solidFill>
-                <a:latin typeface="Microsoft YaHei"/>
-                <a:ea typeface="Microsoft YaHei"/>
-                <a:cs typeface="Microsoft YaHei"/>
-              </a:rPr>
-              <a:t>创新能力</a:t>
-            </a:r>
-          </a:p>
-        </p:txBody>
-      </p:sp>
-      <p:sp>
-        <p:nvSpPr>
-          <p:cNvPr id="26" name="parallel-rule-2">
-            <a:extLst xmlns:a="http://schemas.openxmlformats.org/drawingml/2006/main">
-              <a:ext uri="{FF2B5EF4-FFF2-40B4-BE49-F238E27FC236}">
-                <a16:creationId xmlns:a16="http://schemas.microsoft.com/office/drawing/2014/main" id="{FC223BDE-183F-4A83-B706-E220C3EEEBAB}"/>
-              </a:ext>
-            </a:extLst>
-          </p:cNvPr>
-          <p:cNvSpPr>
-            <a:spLocks xmlns:a="http://schemas.openxmlformats.org/drawingml/2006/main" noGrp="1"/>
-          </p:cNvSpPr>
-          <p:nvPr/>
-        </p:nvSpPr>
-        <p:spPr>
-          <a:xfrm xmlns:a="http://schemas.openxmlformats.org/drawingml/2006/main" rot="0">
-            <a:off x="7188994" y="3771900"/>
-            <a:ext cx="514350" cy="38100"/>
-          </a:xfrm>
-          <a:prstGeom xmlns:a="http://schemas.openxmlformats.org/drawingml/2006/main" prst="roundRect">
-            <a:avLst>
-              <a:gd name="adj" fmla="val 50000"/>
-            </a:avLst>
-          </a:prstGeom>
-          <a:solidFill xmlns:a="http://schemas.openxmlformats.org/drawingml/2006/main">
-            <a:srgbClr val="78AEEF"/>
-          </a:solidFill>
-          <a:ln xmlns:a="http://schemas.openxmlformats.org/drawingml/2006/main" w="0">
-            <a:noFill/>
-            <a:prstDash val="solid"/>
-          </a:ln>
-        </p:spPr>
-      </p:sp>
-      <p:sp>
-        <p:nvSpPr>
-          <p:cNvPr id="27" name="parallel-body-2">
-            <a:extLst xmlns:a="http://schemas.openxmlformats.org/drawingml/2006/main">
-              <a:ext uri="{FF2B5EF4-FFF2-40B4-BE49-F238E27FC236}">
-                <a16:creationId xmlns:a16="http://schemas.microsoft.com/office/drawing/2014/main" id="{E91E4137-E862-453A-8D9F-891A6DB870E0}"/>
-              </a:ext>
-            </a:extLst>
-          </p:cNvPr>
-          <p:cNvSpPr>
-            <a:spLocks xmlns:a="http://schemas.openxmlformats.org/drawingml/2006/main" noGrp="1"/>
-          </p:cNvSpPr>
-          <p:nvPr/>
-        </p:nvSpPr>
-        <p:spPr>
-          <a:xfrm xmlns:a="http://schemas.openxmlformats.org/drawingml/2006/main" rot="0">
-            <a:off x="6438900" y="4238625"/>
-            <a:ext cx="2014538" cy="647700"/>
-          </a:xfrm>
-          <a:prstGeom xmlns:a="http://schemas.openxmlformats.org/drawingml/2006/main" prst="rect">
-            <a:avLst/>
-          </a:prstGeom>
-          <a:noFill xmlns:a="http://schemas.openxmlformats.org/drawingml/2006/main"/>
-          <a:ln xmlns:a="http://schemas.openxmlformats.org/drawingml/2006/main" w="0">
-            <a:noFill/>
-            <a:prstDash val="solid"/>
-          </a:ln>
-        </p:spPr>
-        <p:txBody>
-          <a:bodyPr xmlns:a="http://schemas.openxmlformats.org/drawingml/2006/main" wrap="square" lIns="0" tIns="0" rIns="0" bIns="0" anchor="ctr">
-            <a:noAutofit/>
-          </a:bodyPr>
-          <a:lstStyle xmlns:a="http://schemas.openxmlformats.org/drawingml/2006/main"/>
-          <a:p xmlns:a="http://schemas.openxmlformats.org/drawingml/2006/main">
-            <a:pPr algn="ctr">
-              <a:lnSpc>
-                <a:spcPct val="150000"/>
-              </a:lnSpc>
-              <a:buNone/>
-              <a:defRPr sz="1700" b="0" i="0">
-                <a:solidFill>
-                  <a:srgbClr val="46566A"/>
-                </a:solidFill>
-                <a:latin typeface="Microsoft YaHei"/>
-                <a:ea typeface="Microsoft YaHei"/>
-                <a:cs typeface="Microsoft YaHei"/>
-              </a:defRPr>
-            </a:pPr>
-            <a:r>
-              <a:rPr sz="1700" b="0" i="0">
-                <a:solidFill>
-                  <a:srgbClr val="46566A"/>
-                </a:solidFill>
-                <a:latin typeface="Microsoft YaHei"/>
-                <a:ea typeface="Microsoft YaHei"/>
-                <a:cs typeface="Microsoft YaHei"/>
-              </a:rPr>
-              <a:t>从真实约束中提出新</a:t>
-            </a:r>
-          </a:p>
-          <a:p xmlns:a="http://schemas.openxmlformats.org/drawingml/2006/main">
-            <a:pPr algn="ctr">
-              <a:lnSpc>
-                <a:spcPct val="150000"/>
-              </a:lnSpc>
-              <a:buNone/>
-              <a:defRPr sz="1700" b="0" i="0">
-                <a:solidFill>
-                  <a:srgbClr val="46566A"/>
-                </a:solidFill>
-                <a:latin typeface="Microsoft YaHei"/>
-                <a:ea typeface="Microsoft YaHei"/>
-                <a:cs typeface="Microsoft YaHei"/>
-              </a:defRPr>
-            </a:pPr>
-            <a:r>
-              <a:rPr sz="1700" b="0" i="0">
-                <a:solidFill>
-                  <a:srgbClr val="46566A"/>
-                </a:solidFill>
-                <a:latin typeface="Microsoft YaHei"/>
-                <a:ea typeface="Microsoft YaHei"/>
-                <a:cs typeface="Microsoft YaHei"/>
-              </a:rPr>
-              <a:t>的思路与解决路径</a:t>
-            </a:r>
-          </a:p>
-        </p:txBody>
-      </p:sp>
-      <p:sp>
-        <p:nvSpPr>
-          <p:cNvPr id="28" name="parallel-card-underlay-3">
-            <a:extLst xmlns:a="http://schemas.openxmlformats.org/drawingml/2006/main">
-              <a:ext uri="{FF2B5EF4-FFF2-40B4-BE49-F238E27FC236}">
-                <a16:creationId xmlns:a16="http://schemas.microsoft.com/office/drawing/2014/main" id="{3DBA649B-0AF0-4530-BBCF-240DF75B8C95}"/>
-              </a:ext>
-            </a:extLst>
-          </p:cNvPr>
-          <p:cNvSpPr>
-            <a:spLocks xmlns:a="http://schemas.openxmlformats.org/drawingml/2006/main" noGrp="1"/>
-          </p:cNvSpPr>
-          <p:nvPr/>
-        </p:nvSpPr>
-        <p:spPr>
-          <a:xfrm xmlns:a="http://schemas.openxmlformats.org/drawingml/2006/main" rot="0">
-            <a:off x="8986838" y="2514600"/>
-            <a:ext cx="2319338" cy="3352800"/>
-          </a:xfrm>
-          <a:prstGeom xmlns:a="http://schemas.openxmlformats.org/drawingml/2006/main" prst="roundRect">
-            <a:avLst>
-              <a:gd name="adj" fmla="val 10678"/>
-            </a:avLst>
-          </a:prstGeom>
-          <a:solidFill xmlns:a="http://schemas.openxmlformats.org/drawingml/2006/main">
-            <a:srgbClr val="DFEAFA"/>
-          </a:solidFill>
-          <a:ln xmlns:a="http://schemas.openxmlformats.org/drawingml/2006/main" w="9525">
-            <a:solidFill>
-              <a:srgbClr val="DCE8F7"/>
-            </a:solidFill>
-            <a:prstDash val="solid"/>
-          </a:ln>
-        </p:spPr>
-      </p:sp>
-      <p:sp>
-        <p:nvSpPr>
-          <p:cNvPr id="29" name="parallel-card-surface-3">
-            <a:extLst xmlns:a="http://schemas.openxmlformats.org/drawingml/2006/main">
-              <a:ext uri="{FF2B5EF4-FFF2-40B4-BE49-F238E27FC236}">
-                <a16:creationId xmlns:a16="http://schemas.microsoft.com/office/drawing/2014/main" id="{7CB049FA-96FC-4937-B586-B93D84A48F78}"/>
-              </a:ext>
-            </a:extLst>
-          </p:cNvPr>
-          <p:cNvSpPr>
-            <a:spLocks xmlns:a="http://schemas.openxmlformats.org/drawingml/2006/main" noGrp="1"/>
-          </p:cNvSpPr>
-          <p:nvPr/>
-        </p:nvSpPr>
-        <p:spPr>
-          <a:xfrm xmlns:a="http://schemas.openxmlformats.org/drawingml/2006/main" rot="0">
-            <a:off x="8910638" y="2419350"/>
-            <a:ext cx="2471738" cy="3352800"/>
-          </a:xfrm>
-          <a:prstGeom xmlns:a="http://schemas.openxmlformats.org/drawingml/2006/main" prst="roundRect">
-            <a:avLst>
-              <a:gd name="adj" fmla="val 10019"/>
-            </a:avLst>
-          </a:prstGeom>
-          <a:solidFill xmlns:a="http://schemas.openxmlformats.org/drawingml/2006/main">
-            <a:srgbClr val="F4F8FD"/>
-          </a:solidFill>
-          <a:ln xmlns:a="http://schemas.openxmlformats.org/drawingml/2006/main" w="9525">
-            <a:solidFill>
-              <a:srgbClr val="D2E0F2"/>
-            </a:solidFill>
-            <a:prstDash val="solid"/>
-          </a:ln>
-        </p:spPr>
-        <p:style>
-          <a:lnRef xmlns:a="http://schemas.openxmlformats.org/drawingml/2006/main" idx="0"/>
-          <a:fillRef xmlns:a="http://schemas.openxmlformats.org/drawingml/2006/main" idx="0"/>
-          <a:effectRef xmlns:a="http://schemas.openxmlformats.org/drawingml/2006/main" idx="10"/>
-          <a:fontRef xmlns:a="http://schemas.openxmlformats.org/drawingml/2006/main" idx="major"/>
-        </p:style>
-      </p:sp>
-      <p:sp>
-        <p:nvSpPr>
-          <p:cNvPr id="30" name="parallel-card-accent-3">
-            <a:extLst xmlns:a="http://schemas.openxmlformats.org/drawingml/2006/main">
-              <a:ext uri="{FF2B5EF4-FFF2-40B4-BE49-F238E27FC236}">
-                <a16:creationId xmlns:a16="http://schemas.microsoft.com/office/drawing/2014/main" id="{4D402AE3-CF29-4AF3-A4C7-82339019ACC0}"/>
-              </a:ext>
-            </a:extLst>
-          </p:cNvPr>
-          <p:cNvSpPr>
-            <a:spLocks xmlns:a="http://schemas.openxmlformats.org/drawingml/2006/main" noGrp="1"/>
-          </p:cNvSpPr>
-          <p:nvPr/>
-        </p:nvSpPr>
-        <p:spPr>
-          <a:xfrm xmlns:a="http://schemas.openxmlformats.org/drawingml/2006/main" rot="0">
-            <a:off x="9755981" y="2419350"/>
-            <a:ext cx="781050" cy="76200"/>
-          </a:xfrm>
-          <a:prstGeom xmlns:a="http://schemas.openxmlformats.org/drawingml/2006/main" prst="roundRect">
-            <a:avLst>
-              <a:gd name="adj" fmla="val 50000"/>
-            </a:avLst>
-          </a:prstGeom>
-          <a:solidFill xmlns:a="http://schemas.openxmlformats.org/drawingml/2006/main">
-            <a:srgbClr val="78AEEF"/>
-          </a:solidFill>
-          <a:ln xmlns:a="http://schemas.openxmlformats.org/drawingml/2006/main" w="0">
-            <a:noFill/>
-            <a:prstDash val="solid"/>
-          </a:ln>
-        </p:spPr>
-      </p:sp>
-      <p:sp>
-        <p:nvSpPr>
-          <p:cNvPr id="31" name="parallel-marker-halo-3">
-            <a:extLst xmlns:a="http://schemas.openxmlformats.org/drawingml/2006/main">
-              <a:ext uri="{FF2B5EF4-FFF2-40B4-BE49-F238E27FC236}">
-                <a16:creationId xmlns:a16="http://schemas.microsoft.com/office/drawing/2014/main" id="{94DFB673-2E75-4FC0-9B77-9BDE296C3598}"/>
-              </a:ext>
-            </a:extLst>
-          </p:cNvPr>
-          <p:cNvSpPr>
-            <a:spLocks xmlns:a="http://schemas.openxmlformats.org/drawingml/2006/main" noGrp="1"/>
-          </p:cNvSpPr>
-          <p:nvPr/>
-        </p:nvSpPr>
-        <p:spPr>
-          <a:xfrm xmlns:a="http://schemas.openxmlformats.org/drawingml/2006/main" rot="0">
-            <a:off x="9689306" y="1962150"/>
-            <a:ext cx="914400" cy="914400"/>
-          </a:xfrm>
-          <a:prstGeom xmlns:a="http://schemas.openxmlformats.org/drawingml/2006/main" prst="ellipse">
-            <a:avLst/>
-          </a:prstGeom>
-          <a:solidFill xmlns:a="http://schemas.openxmlformats.org/drawingml/2006/main">
-            <a:srgbClr val="EDF5FF"/>
-          </a:solidFill>
-          <a:ln xmlns:a="http://schemas.openxmlformats.org/drawingml/2006/main" w="9525">
-            <a:solidFill>
-              <a:srgbClr val="D8E7FA"/>
-            </a:solidFill>
-            <a:prstDash val="solid"/>
-          </a:ln>
-        </p:spPr>
-      </p:sp>
-      <p:sp>
-        <p:nvSpPr>
-          <p:cNvPr id="32" name="parallel-marker-core-3">
-            <a:extLst xmlns:a="http://schemas.openxmlformats.org/drawingml/2006/main">
-              <a:ext uri="{FF2B5EF4-FFF2-40B4-BE49-F238E27FC236}">
-                <a16:creationId xmlns:a16="http://schemas.microsoft.com/office/drawing/2014/main" id="{98F638FC-01A8-49EE-B7E2-F04E80E5A197}"/>
-              </a:ext>
-            </a:extLst>
-          </p:cNvPr>
-          <p:cNvSpPr>
-            <a:spLocks xmlns:a="http://schemas.openxmlformats.org/drawingml/2006/main" noGrp="1"/>
-          </p:cNvSpPr>
-          <p:nvPr/>
-        </p:nvSpPr>
-        <p:spPr>
-          <a:xfrm xmlns:a="http://schemas.openxmlformats.org/drawingml/2006/main" rot="0">
-            <a:off x="9822656" y="2095500"/>
-            <a:ext cx="647700" cy="647700"/>
-          </a:xfrm>
-          <a:prstGeom xmlns:a="http://schemas.openxmlformats.org/drawingml/2006/main" prst="ellipse">
-            <a:avLst/>
-          </a:prstGeom>
-          <a:solidFill xmlns:a="http://schemas.openxmlformats.org/drawingml/2006/main">
-            <a:srgbClr val="2F5EA8"/>
-          </a:solidFill>
-          <a:ln xmlns:a="http://schemas.openxmlformats.org/drawingml/2006/main" w="0">
-            <a:noFill/>
-            <a:prstDash val="solid"/>
-          </a:ln>
-        </p:spPr>
-        <p:style>
-          <a:lnRef xmlns:a="http://schemas.openxmlformats.org/drawingml/2006/main" idx="0"/>
-          <a:fillRef xmlns:a="http://schemas.openxmlformats.org/drawingml/2006/main" idx="0"/>
-          <a:effectRef xmlns:a="http://schemas.openxmlformats.org/drawingml/2006/main" idx="11"/>
-          <a:fontRef xmlns:a="http://schemas.openxmlformats.org/drawingml/2006/main" idx="major"/>
-        </p:style>
-      </p:sp>
-      <p:pic>
-        <p:nvPicPr>
-          <p:cNvPr id="69" name=""/>
-          <p:cNvPicPr>
-            <a:picLocks xmlns:a="http://schemas.openxmlformats.org/drawingml/2006/main" noChangeAspect="1"/>
-          </p:cNvPicPr>
-          <p:nvPr/>
-        </p:nvPicPr>
-        <p:blipFill>
-          <a:blip xmlns:r="http://schemas.openxmlformats.org/officeDocument/2006/relationships" xmlns:a="http://schemas.openxmlformats.org/drawingml/2006/main" r:embed="R60fdc35ceed941fa">
-            <a:extLst>
-              <a:ext uri="{96DAC541-7B7A-43D3-8B79-37D633B846F1}">
-                <asvg:svgBlip xmlns:asvg="http://schemas.microsoft.com/office/drawing/2016/SVG/main" r:embed="R4b4fa45abfa94f7f"/>
-              </a:ext>
-            </a:extLst>
-          </a:blip>
-          <a:stretch xmlns:a="http://schemas.openxmlformats.org/drawingml/2006/main"/>
-        </p:blipFill>
-        <p:spPr>
-          <a:xfrm xmlns:a="http://schemas.openxmlformats.org/drawingml/2006/main">
-            <a:off x="9975056" y="2247900"/>
-            <a:ext cx="342900" cy="342900"/>
-          </a:xfrm>
-          <a:prstGeom xmlns:a="http://schemas.openxmlformats.org/drawingml/2006/main" prst="rect">
-            <a:avLst/>
-          </a:prstGeom>
-        </p:spPr>
-      </p:pic>
-      <p:sp>
-        <p:nvSpPr>
-          <p:cNvPr id="34" name="parallel-title-3">
-            <a:extLst xmlns:a="http://schemas.openxmlformats.org/drawingml/2006/main">
-              <a:ext uri="{FF2B5EF4-FFF2-40B4-BE49-F238E27FC236}">
-                <a16:creationId xmlns:a16="http://schemas.microsoft.com/office/drawing/2014/main" id="{C463C5DE-791F-4CC5-A454-5F0CFB48DB00}"/>
-              </a:ext>
-            </a:extLst>
-          </p:cNvPr>
-          <p:cNvSpPr>
-            <a:spLocks xmlns:a="http://schemas.openxmlformats.org/drawingml/2006/main" noGrp="1"/>
-          </p:cNvSpPr>
-          <p:nvPr/>
-        </p:nvSpPr>
-        <p:spPr>
-          <a:xfrm xmlns:a="http://schemas.openxmlformats.org/drawingml/2006/main" rot="0">
-            <a:off x="9139238" y="3214688"/>
-            <a:ext cx="2014538" cy="333375"/>
-          </a:xfrm>
-          <a:prstGeom xmlns:a="http://schemas.openxmlformats.org/drawingml/2006/main" prst="rect">
-            <a:avLst/>
-          </a:prstGeom>
-          <a:noFill xmlns:a="http://schemas.openxmlformats.org/drawingml/2006/main"/>
-          <a:ln xmlns:a="http://schemas.openxmlformats.org/drawingml/2006/main" w="0">
-            <a:noFill/>
-            <a:prstDash val="solid"/>
-          </a:ln>
-        </p:spPr>
-        <p:txBody>
-          <a:bodyPr xmlns:a="http://schemas.openxmlformats.org/drawingml/2006/main" wrap="none" lIns="0" tIns="0" rIns="0" bIns="0" anchor="ctr">
-            <a:noAutofit/>
-          </a:bodyPr>
-          <a:lstStyle xmlns:a="http://schemas.openxmlformats.org/drawingml/2006/main"/>
-          <a:p xmlns:a="http://schemas.openxmlformats.org/drawingml/2006/main">
-            <a:pPr algn="ctr">
-              <a:lnSpc>
-                <a:spcPct val="125000"/>
-              </a:lnSpc>
-              <a:buNone/>
-              <a:defRPr sz="2100" b="1" i="0">
-                <a:solidFill>
-                  <a:srgbClr val="254B7C"/>
-                </a:solidFill>
-                <a:latin typeface="Microsoft YaHei"/>
-                <a:ea typeface="Microsoft YaHei"/>
-                <a:cs typeface="Microsoft YaHei"/>
-              </a:defRPr>
-            </a:pPr>
-            <a:r>
-              <a:rPr sz="2100" b="1" i="0">
-                <a:solidFill>
-                  <a:srgbClr val="254B7C"/>
-                </a:solidFill>
-                <a:latin typeface="Microsoft YaHei"/>
-                <a:ea typeface="Microsoft YaHei"/>
-                <a:cs typeface="Microsoft YaHei"/>
-              </a:rPr>
-              <a:t>执行能力</a:t>
-            </a:r>
-          </a:p>
-        </p:txBody>
-      </p:sp>
-      <p:sp>
-        <p:nvSpPr>
-          <p:cNvPr id="35" name="parallel-rule-3">
-            <a:extLst xmlns:a="http://schemas.openxmlformats.org/drawingml/2006/main">
-              <a:ext uri="{FF2B5EF4-FFF2-40B4-BE49-F238E27FC236}">
-                <a16:creationId xmlns:a16="http://schemas.microsoft.com/office/drawing/2014/main" id="{1ACC6ED0-367B-45E7-9FC2-5C1209E860F0}"/>
-              </a:ext>
-            </a:extLst>
-          </p:cNvPr>
-          <p:cNvSpPr>
-            <a:spLocks xmlns:a="http://schemas.openxmlformats.org/drawingml/2006/main" noGrp="1"/>
-          </p:cNvSpPr>
-          <p:nvPr/>
-        </p:nvSpPr>
-        <p:spPr>
-          <a:xfrm xmlns:a="http://schemas.openxmlformats.org/drawingml/2006/main" rot="0">
-            <a:off x="9889331" y="3771900"/>
-            <a:ext cx="514350" cy="38100"/>
-          </a:xfrm>
-          <a:prstGeom xmlns:a="http://schemas.openxmlformats.org/drawingml/2006/main" prst="roundRect">
-            <a:avLst>
-              <a:gd name="adj" fmla="val 50000"/>
-            </a:avLst>
-          </a:prstGeom>
-          <a:solidFill xmlns:a="http://schemas.openxmlformats.org/drawingml/2006/main">
-            <a:srgbClr val="78AEEF"/>
-          </a:solidFill>
-          <a:ln xmlns:a="http://schemas.openxmlformats.org/drawingml/2006/main" w="0">
-            <a:noFill/>
-            <a:prstDash val="solid"/>
-          </a:ln>
-        </p:spPr>
-      </p:sp>
-      <p:sp>
-        <p:nvSpPr>
-          <p:cNvPr id="36" name="parallel-body-3">
-            <a:extLst xmlns:a="http://schemas.openxmlformats.org/drawingml/2006/main">
-              <a:ext uri="{FF2B5EF4-FFF2-40B4-BE49-F238E27FC236}">
-                <a16:creationId xmlns:a16="http://schemas.microsoft.com/office/drawing/2014/main" id="{0D39EEFA-C084-4DE2-BFF7-A13E545FD42B}"/>
-              </a:ext>
-            </a:extLst>
-          </p:cNvPr>
-          <p:cNvSpPr>
-            <a:spLocks xmlns:a="http://schemas.openxmlformats.org/drawingml/2006/main" noGrp="1"/>
-          </p:cNvSpPr>
-          <p:nvPr/>
-        </p:nvSpPr>
-        <p:spPr>
-          <a:xfrm xmlns:a="http://schemas.openxmlformats.org/drawingml/2006/main" rot="0">
-            <a:off x="9139238" y="4238625"/>
-            <a:ext cx="2014538" cy="647700"/>
-          </a:xfrm>
-          <a:prstGeom xmlns:a="http://schemas.openxmlformats.org/drawingml/2006/main" prst="rect">
-            <a:avLst/>
-          </a:prstGeom>
-          <a:noFill xmlns:a="http://schemas.openxmlformats.org/drawingml/2006/main"/>
-          <a:ln xmlns:a="http://schemas.openxmlformats.org/drawingml/2006/main" w="0">
-            <a:noFill/>
-            <a:prstDash val="solid"/>
-          </a:ln>
-        </p:spPr>
-        <p:txBody>
-          <a:bodyPr xmlns:a="http://schemas.openxmlformats.org/drawingml/2006/main" wrap="square" lIns="0" tIns="0" rIns="0" bIns="0" anchor="ctr">
-            <a:noAutofit/>
-          </a:bodyPr>
-          <a:lstStyle xmlns:a="http://schemas.openxmlformats.org/drawingml/2006/main"/>
-          <a:p xmlns:a="http://schemas.openxmlformats.org/drawingml/2006/main">
-            <a:pPr algn="ctr">
-              <a:lnSpc>
-                <a:spcPct val="150000"/>
-              </a:lnSpc>
-              <a:buNone/>
-              <a:defRPr sz="1700" b="0" i="0">
-                <a:solidFill>
-                  <a:srgbClr val="46566A"/>
-                </a:solidFill>
-                <a:latin typeface="Microsoft YaHei"/>
-                <a:ea typeface="Microsoft YaHei"/>
-                <a:cs typeface="Microsoft YaHei"/>
-              </a:defRPr>
-            </a:pPr>
-            <a:r>
-              <a:rPr sz="1700" b="0" i="0">
-                <a:solidFill>
-                  <a:srgbClr val="46566A"/>
-                </a:solidFill>
-                <a:latin typeface="Microsoft YaHei"/>
-                <a:ea typeface="Microsoft YaHei"/>
-                <a:cs typeface="Microsoft YaHei"/>
-              </a:rPr>
-              <a:t>把明确方案稳定转化</a:t>
-            </a:r>
-          </a:p>
-          <a:p xmlns:a="http://schemas.openxmlformats.org/drawingml/2006/main">
-            <a:pPr algn="ctr">
-              <a:lnSpc>
-                <a:spcPct val="150000"/>
-              </a:lnSpc>
-              <a:buNone/>
-              <a:defRPr sz="1700" b="0" i="0">
-                <a:solidFill>
-                  <a:srgbClr val="46566A"/>
-                </a:solidFill>
-                <a:latin typeface="Microsoft YaHei"/>
-                <a:ea typeface="Microsoft YaHei"/>
-                <a:cs typeface="Microsoft YaHei"/>
-              </a:defRPr>
-            </a:pPr>
-            <a:r>
-              <a:rPr sz="1700" b="0" i="0">
-                <a:solidFill>
-                  <a:srgbClr val="46566A"/>
-                </a:solidFill>
-                <a:latin typeface="Microsoft YaHei"/>
-                <a:ea typeface="Microsoft YaHei"/>
-                <a:cs typeface="Microsoft YaHei"/>
-              </a:rPr>
-              <a:t>为可交付的结果</a:t>
-            </a:r>
-          </a:p>
-        </p:txBody>
-      </p:sp>
     </p:spTree>
     <p:extLst>
       <p:ext uri="{BB962C8B-B14F-4D97-AF65-F5344CB8AC3E}">
-        <p14:creationId xmlns:p14="http://schemas.microsoft.com/office/powerpoint/2010/main" val="966794721"/>
+        <p14:creationId xmlns:p14="http://schemas.microsoft.com/office/powerpoint/2010/main" val="1659626435"/>
       </p:ext>
     </p:extLst>
   </p:cSld>
